--- a/presentation/Olist E-Commerce Analysis.pptx
+++ b/presentation/Olist E-Commerce Analysis.pptx
@@ -9732,7 +9732,7 @@
           <a:p>
             <a:fld id="{B2374077-9B34-4FA8-8422-634E903F67E1}" type="datetimeFigureOut">
               <a:rPr lang="en-US" smtClean="0"/>
-              <a:t>4/9/2026</a:t>
+              <a:t>4/15/2026</a:t>
             </a:fld>
             <a:endParaRPr lang="en-US"/>
           </a:p>
@@ -9939,7 +9939,7 @@
           <a:p>
             <a:fld id="{B2374077-9B34-4FA8-8422-634E903F67E1}" type="datetimeFigureOut">
               <a:rPr lang="en-US" smtClean="0"/>
-              <a:t>4/9/2026</a:t>
+              <a:t>4/15/2026</a:t>
             </a:fld>
             <a:endParaRPr lang="en-US"/>
           </a:p>
@@ -10119,7 +10119,7 @@
           <a:p>
             <a:fld id="{B2374077-9B34-4FA8-8422-634E903F67E1}" type="datetimeFigureOut">
               <a:rPr lang="en-US" smtClean="0"/>
-              <a:t>4/9/2026</a:t>
+              <a:t>4/15/2026</a:t>
             </a:fld>
             <a:endParaRPr lang="en-US"/>
           </a:p>
@@ -10324,7 +10324,7 @@
           <a:p>
             <a:fld id="{B2374077-9B34-4FA8-8422-634E903F67E1}" type="datetimeFigureOut">
               <a:rPr lang="en-US" smtClean="0"/>
-              <a:t>4/9/2026</a:t>
+              <a:t>4/15/2026</a:t>
             </a:fld>
             <a:endParaRPr lang="en-US"/>
           </a:p>
@@ -19236,7 +19236,7 @@
           <a:p>
             <a:fld id="{B2374077-9B34-4FA8-8422-634E903F67E1}" type="datetimeFigureOut">
               <a:rPr lang="en-US" smtClean="0"/>
-              <a:t>4/9/2026</a:t>
+              <a:t>4/15/2026</a:t>
             </a:fld>
             <a:endParaRPr lang="en-US"/>
           </a:p>
@@ -19510,7 +19510,7 @@
           <a:p>
             <a:fld id="{B2374077-9B34-4FA8-8422-634E903F67E1}" type="datetimeFigureOut">
               <a:rPr lang="en-US" smtClean="0"/>
-              <a:t>4/9/2026</a:t>
+              <a:t>4/15/2026</a:t>
             </a:fld>
             <a:endParaRPr lang="en-US"/>
           </a:p>
@@ -19908,7 +19908,7 @@
           <a:p>
             <a:fld id="{B2374077-9B34-4FA8-8422-634E903F67E1}" type="datetimeFigureOut">
               <a:rPr lang="en-US" smtClean="0"/>
-              <a:t>4/9/2026</a:t>
+              <a:t>4/15/2026</a:t>
             </a:fld>
             <a:endParaRPr lang="en-US"/>
           </a:p>
@@ -20026,7 +20026,7 @@
           <a:p>
             <a:fld id="{B2374077-9B34-4FA8-8422-634E903F67E1}" type="datetimeFigureOut">
               <a:rPr lang="en-US" smtClean="0"/>
-              <a:t>4/9/2026</a:t>
+              <a:t>4/15/2026</a:t>
             </a:fld>
             <a:endParaRPr lang="en-US"/>
           </a:p>
@@ -20121,7 +20121,7 @@
           <a:p>
             <a:fld id="{B2374077-9B34-4FA8-8422-634E903F67E1}" type="datetimeFigureOut">
               <a:rPr lang="en-US" smtClean="0"/>
-              <a:t>4/9/2026</a:t>
+              <a:t>4/15/2026</a:t>
             </a:fld>
             <a:endParaRPr lang="en-US"/>
           </a:p>
@@ -20411,7 +20411,7 @@
           <a:p>
             <a:fld id="{B2374077-9B34-4FA8-8422-634E903F67E1}" type="datetimeFigureOut">
               <a:rPr lang="en-US" smtClean="0"/>
-              <a:t>4/9/2026</a:t>
+              <a:t>4/15/2026</a:t>
             </a:fld>
             <a:endParaRPr lang="en-US"/>
           </a:p>
@@ -20691,7 +20691,7 @@
           <a:p>
             <a:fld id="{B2374077-9B34-4FA8-8422-634E903F67E1}" type="datetimeFigureOut">
               <a:rPr lang="en-US" smtClean="0"/>
-              <a:t>4/9/2026</a:t>
+              <a:t>4/15/2026</a:t>
             </a:fld>
             <a:endParaRPr lang="en-US"/>
           </a:p>
@@ -20941,7 +20941,7 @@
           <a:p>
             <a:fld id="{B2374077-9B34-4FA8-8422-634E903F67E1}" type="datetimeFigureOut">
               <a:rPr lang="en-US" smtClean="0"/>
-              <a:t>4/9/2026</a:t>
+              <a:t>4/15/2026</a:t>
             </a:fld>
             <a:endParaRPr lang="en-US"/>
           </a:p>
@@ -22473,14 +22473,14 @@
             <p:ph sz="half" idx="1"/>
             <p:extLst>
               <p:ext uri="{D42A27DB-BD31-4B8C-83A1-F6EECF244321}">
-                <p14:modId xmlns:p14="http://schemas.microsoft.com/office/powerpoint/2010/main" val="3138031114"/>
+                <p14:modId xmlns:p14="http://schemas.microsoft.com/office/powerpoint/2010/main" val="315209694"/>
               </p:ext>
             </p:extLst>
           </p:nvPr>
         </p:nvGraphicFramePr>
         <p:xfrm>
           <a:off x="1024128" y="1877078"/>
-          <a:ext cx="4885208" cy="4287520"/>
+          <a:ext cx="4885208" cy="4531360"/>
         </p:xfrm>
         <a:graphic>
           <a:graphicData uri="http://schemas.openxmlformats.org/drawingml/2006/table">
@@ -22587,7 +22587,7 @@
                         <a:rPr lang="en-US" sz="1600" dirty="0">
                           <a:latin typeface="+mj-lt"/>
                         </a:rPr>
-                        <a:t> Distance</a:t>
+                        <a:t> Distance (miles)</a:t>
                       </a:r>
                     </a:p>
                   </a:txBody>
@@ -22627,7 +22627,7 @@
                         <a:rPr lang="en-US" sz="1600" dirty="0">
                           <a:latin typeface="+mj-lt"/>
                         </a:rPr>
-                        <a:t> Freight Cost</a:t>
+                        <a:t> Freight Cost (R$)</a:t>
                       </a:r>
                     </a:p>
                   </a:txBody>
@@ -22721,7 +22721,7 @@
                           <a:ea typeface="Aptos" panose="020B0004020202020204" pitchFamily="34" charset="0"/>
                           <a:cs typeface="Times New Roman" panose="02020603050405020304" pitchFamily="18" charset="0"/>
                         </a:rPr>
-                        <a:t>6895</a:t>
+                        <a:t>6,895</a:t>
                       </a:r>
                     </a:p>
                   </a:txBody>
@@ -22748,7 +22748,7 @@
                           <a:ea typeface="Aptos" panose="020B0004020202020204" pitchFamily="34" charset="0"/>
                           <a:cs typeface="Times New Roman" panose="02020603050405020304" pitchFamily="18" charset="0"/>
                         </a:rPr>
-                        <a:t>18.2</a:t>
+                        <a:t>11</a:t>
                       </a:r>
                     </a:p>
                   </a:txBody>
@@ -22878,7 +22878,7 @@
                           <a:ea typeface="Aptos" panose="020B0004020202020204" pitchFamily="34" charset="0"/>
                           <a:cs typeface="Times New Roman" panose="02020603050405020304" pitchFamily="18" charset="0"/>
                         </a:rPr>
-                        <a:t>2396</a:t>
+                        <a:t>2,396</a:t>
                       </a:r>
                     </a:p>
                   </a:txBody>
@@ -22905,7 +22905,7 @@
                           <a:ea typeface="Aptos" panose="020B0004020202020204" pitchFamily="34" charset="0"/>
                           <a:cs typeface="Times New Roman" panose="02020603050405020304" pitchFamily="18" charset="0"/>
                         </a:rPr>
-                        <a:t>374.7</a:t>
+                        <a:t>233</a:t>
                       </a:r>
                     </a:p>
                   </a:txBody>
@@ -23017,7 +23017,7 @@
                           <a:ea typeface="Aptos" panose="020B0004020202020204" pitchFamily="34" charset="0"/>
                           <a:cs typeface="Times New Roman" panose="02020603050405020304" pitchFamily="18" charset="0"/>
                         </a:rPr>
-                        <a:t>1957</a:t>
+                        <a:t>1,957</a:t>
                       </a:r>
                     </a:p>
                   </a:txBody>
@@ -23044,7 +23044,7 @@
                           <a:ea typeface="Aptos" panose="020B0004020202020204" pitchFamily="34" charset="0"/>
                           <a:cs typeface="Times New Roman" panose="02020603050405020304" pitchFamily="18" charset="0"/>
                         </a:rPr>
-                        <a:t>313.0</a:t>
+                        <a:t>195</a:t>
                       </a:r>
                     </a:p>
                   </a:txBody>
@@ -23150,7 +23150,7 @@
                           <a:ea typeface="Aptos" panose="020B0004020202020204" pitchFamily="34" charset="0"/>
                           <a:cs typeface="Times New Roman" panose="02020603050405020304" pitchFamily="18" charset="0"/>
                         </a:rPr>
-                        <a:t>1063</a:t>
+                        <a:t>1,063</a:t>
                       </a:r>
                     </a:p>
                   </a:txBody>
@@ -23177,7 +23177,7 @@
                           <a:ea typeface="Aptos" panose="020B0004020202020204" pitchFamily="34" charset="0"/>
                           <a:cs typeface="Times New Roman" panose="02020603050405020304" pitchFamily="18" charset="0"/>
                         </a:rPr>
-                        <a:t>501.5</a:t>
+                        <a:t>312</a:t>
                       </a:r>
                     </a:p>
                   </a:txBody>
@@ -23325,7 +23325,7 @@
                           <a:ea typeface="Aptos" panose="020B0004020202020204" pitchFamily="34" charset="0"/>
                           <a:cs typeface="Times New Roman" panose="02020603050405020304" pitchFamily="18" charset="0"/>
                         </a:rPr>
-                        <a:t>623.7</a:t>
+                        <a:t>388</a:t>
                       </a:r>
                     </a:p>
                   </a:txBody>
@@ -23455,7 +23455,7 @@
                           <a:ea typeface="Aptos" panose="020B0004020202020204" pitchFamily="34" charset="0"/>
                           <a:cs typeface="Times New Roman" panose="02020603050405020304" pitchFamily="18" charset="0"/>
                         </a:rPr>
-                        <a:t>25.0</a:t>
+                        <a:t>16</a:t>
                       </a:r>
                     </a:p>
                   </a:txBody>
@@ -23585,7 +23585,7 @@
                           <a:ea typeface="Aptos" panose="020B0004020202020204" pitchFamily="34" charset="0"/>
                           <a:cs typeface="Times New Roman" panose="02020603050405020304" pitchFamily="18" charset="0"/>
                         </a:rPr>
-                        <a:t>89.2</a:t>
+                        <a:t>55</a:t>
                       </a:r>
                     </a:p>
                   </a:txBody>
@@ -23718,7 +23718,7 @@
                           <a:ea typeface="Aptos" panose="020B0004020202020204" pitchFamily="34" charset="0"/>
                           <a:cs typeface="Times New Roman" panose="02020603050405020304" pitchFamily="18" charset="0"/>
                         </a:rPr>
-                        <a:t>813.3</a:t>
+                        <a:t>505</a:t>
                       </a:r>
                     </a:p>
                   </a:txBody>
@@ -23851,7 +23851,7 @@
                           <a:ea typeface="Aptos" panose="020B0004020202020204" pitchFamily="34" charset="0"/>
                           <a:cs typeface="Times New Roman" panose="02020603050405020304" pitchFamily="18" charset="0"/>
                         </a:rPr>
-                        <a:t>874.7</a:t>
+                        <a:t>544</a:t>
                       </a:r>
                     </a:p>
                   </a:txBody>
@@ -23984,7 +23984,7 @@
                           <a:ea typeface="Aptos" panose="020B0004020202020204" pitchFamily="34" charset="0"/>
                           <a:cs typeface="Times New Roman" panose="02020603050405020304" pitchFamily="18" charset="0"/>
                         </a:rPr>
-                        <a:t>363.4</a:t>
+                        <a:t>226</a:t>
                       </a:r>
                     </a:p>
                   </a:txBody>
@@ -24101,7 +24101,7 @@
           <a:p>
             <a:r>
               <a:rPr lang="en-US" b="1" dirty="0"/>
-              <a:t>875 km for R$7 extra</a:t>
+              <a:t>533 miles for R$ 7 (~ $1.40) extra </a:t>
             </a:r>
           </a:p>
           <a:p>

--- a/presentation/Olist E-Commerce Analysis.pptx
+++ b/presentation/Olist E-Commerce Analysis.pptx
@@ -7,25 +7,28 @@
   <p:sldIdLst>
     <p:sldId id="256" r:id="rId2"/>
     <p:sldId id="257" r:id="rId3"/>
-    <p:sldId id="258" r:id="rId4"/>
-    <p:sldId id="259" r:id="rId5"/>
-    <p:sldId id="260" r:id="rId6"/>
-    <p:sldId id="261" r:id="rId7"/>
-    <p:sldId id="264" r:id="rId8"/>
-    <p:sldId id="262" r:id="rId9"/>
-    <p:sldId id="263" r:id="rId10"/>
-    <p:sldId id="265" r:id="rId11"/>
-    <p:sldId id="266" r:id="rId12"/>
-    <p:sldId id="267" r:id="rId13"/>
-    <p:sldId id="268" r:id="rId14"/>
-    <p:sldId id="269" r:id="rId15"/>
-    <p:sldId id="270" r:id="rId16"/>
-    <p:sldId id="271" r:id="rId17"/>
-    <p:sldId id="272" r:id="rId18"/>
-    <p:sldId id="275" r:id="rId19"/>
-    <p:sldId id="276" r:id="rId20"/>
-    <p:sldId id="273" r:id="rId21"/>
-    <p:sldId id="274" r:id="rId22"/>
+    <p:sldId id="279" r:id="rId4"/>
+    <p:sldId id="258" r:id="rId5"/>
+    <p:sldId id="259" r:id="rId6"/>
+    <p:sldId id="260" r:id="rId7"/>
+    <p:sldId id="277" r:id="rId8"/>
+    <p:sldId id="261" r:id="rId9"/>
+    <p:sldId id="278" r:id="rId10"/>
+    <p:sldId id="264" r:id="rId11"/>
+    <p:sldId id="262" r:id="rId12"/>
+    <p:sldId id="263" r:id="rId13"/>
+    <p:sldId id="265" r:id="rId14"/>
+    <p:sldId id="266" r:id="rId15"/>
+    <p:sldId id="267" r:id="rId16"/>
+    <p:sldId id="268" r:id="rId17"/>
+    <p:sldId id="269" r:id="rId18"/>
+    <p:sldId id="270" r:id="rId19"/>
+    <p:sldId id="271" r:id="rId20"/>
+    <p:sldId id="272" r:id="rId21"/>
+    <p:sldId id="275" r:id="rId22"/>
+    <p:sldId id="276" r:id="rId23"/>
+    <p:sldId id="273" r:id="rId24"/>
+    <p:sldId id="274" r:id="rId25"/>
   </p:sldIdLst>
   <p:sldSz cx="12192000" cy="6858000"/>
   <p:notesSz cx="6858000" cy="9144000"/>
@@ -925,6 +928,872 @@
 </pc:chgInfo>
 </file>
 
+<file path=ppt/charts/chart1.xml><?xml version="1.0" encoding="utf-8"?>
+<c:chartSpace xmlns:c="http://schemas.openxmlformats.org/drawingml/2006/chart" xmlns:a="http://schemas.openxmlformats.org/drawingml/2006/main" xmlns:r="http://schemas.openxmlformats.org/officeDocument/2006/relationships" xmlns:c16r2="http://schemas.microsoft.com/office/drawing/2015/06/chart">
+  <c:date1904 val="0"/>
+  <c:lang val="en-US"/>
+  <c:roundedCorners val="0"/>
+  <mc:AlternateContent xmlns:mc="http://schemas.openxmlformats.org/markup-compatibility/2006">
+    <mc:Choice xmlns:c14="http://schemas.microsoft.com/office/drawing/2007/8/2/chart" Requires="c14">
+      <c14:style val="102"/>
+    </mc:Choice>
+    <mc:Fallback>
+      <c:style val="2"/>
+    </mc:Fallback>
+  </mc:AlternateContent>
+  <c:chart>
+    <c:title>
+      <c:overlay val="0"/>
+      <c:spPr>
+        <a:noFill/>
+        <a:ln>
+          <a:noFill/>
+        </a:ln>
+        <a:effectLst/>
+      </c:spPr>
+      <c:txPr>
+        <a:bodyPr rot="0" spcFirstLastPara="1" vertOverflow="ellipsis" vert="horz" wrap="square" anchor="ctr" anchorCtr="1"/>
+        <a:lstStyle/>
+        <a:p>
+          <a:pPr>
+            <a:defRPr sz="2200" b="1" i="0" u="none" strike="noStrike" kern="1200" spc="0" baseline="0">
+              <a:solidFill>
+                <a:schemeClr val="tx1">
+                  <a:lumMod val="65000"/>
+                  <a:lumOff val="35000"/>
+                </a:schemeClr>
+              </a:solidFill>
+              <a:latin typeface="+mn-lt"/>
+              <a:ea typeface="+mn-ea"/>
+              <a:cs typeface="+mn-cs"/>
+            </a:defRPr>
+          </a:pPr>
+          <a:endParaRPr lang="en-US"/>
+        </a:p>
+      </c:txPr>
+    </c:title>
+    <c:autoTitleDeleted val="0"/>
+    <c:plotArea>
+      <c:layout/>
+      <c:barChart>
+        <c:barDir val="bar"/>
+        <c:grouping val="clustered"/>
+        <c:varyColors val="0"/>
+        <c:ser>
+          <c:idx val="0"/>
+          <c:order val="0"/>
+          <c:tx>
+            <c:strRef>
+              <c:f>Sheet1!$B$1</c:f>
+              <c:strCache>
+                <c:ptCount val="1"/>
+                <c:pt idx="0">
+                  <c:v>Revenue (R$ million)</c:v>
+                </c:pt>
+              </c:strCache>
+            </c:strRef>
+          </c:tx>
+          <c:spPr>
+            <a:solidFill>
+              <a:schemeClr val="accent1"/>
+            </a:solidFill>
+            <a:ln>
+              <a:noFill/>
+            </a:ln>
+            <a:effectLst/>
+          </c:spPr>
+          <c:invertIfNegative val="0"/>
+          <c:cat>
+            <c:strRef>
+              <c:f>Sheet1!$A$2:$A$11</c:f>
+              <c:strCache>
+                <c:ptCount val="10"/>
+                <c:pt idx="0">
+                  <c:v>garden_tools</c:v>
+                </c:pt>
+                <c:pt idx="1">
+                  <c:v>auto</c:v>
+                </c:pt>
+                <c:pt idx="2">
+                  <c:v>cool_stuff</c:v>
+                </c:pt>
+                <c:pt idx="3">
+                  <c:v>housewares</c:v>
+                </c:pt>
+                <c:pt idx="4">
+                  <c:v>furniture_decor</c:v>
+                </c:pt>
+                <c:pt idx="5">
+                  <c:v>computers_accessories</c:v>
+                </c:pt>
+                <c:pt idx="6">
+                  <c:v>sports_leisure</c:v>
+                </c:pt>
+                <c:pt idx="7">
+                  <c:v>bed_bath_table</c:v>
+                </c:pt>
+                <c:pt idx="8">
+                  <c:v>watches_gifts</c:v>
+                </c:pt>
+                <c:pt idx="9">
+                  <c:v>health_beauty</c:v>
+                </c:pt>
+              </c:strCache>
+            </c:strRef>
+          </c:cat>
+          <c:val>
+            <c:numRef>
+              <c:f>Sheet1!$B$2:$B$11</c:f>
+              <c:numCache>
+                <c:formatCode>#,##0.0</c:formatCode>
+                <c:ptCount val="10"/>
+                <c:pt idx="0">
+                  <c:v>0.58421920999999999</c:v>
+                </c:pt>
+                <c:pt idx="1">
+                  <c:v>0.68538431999999994</c:v>
+                </c:pt>
+                <c:pt idx="2">
+                  <c:v>0.71932995</c:v>
+                </c:pt>
+                <c:pt idx="3">
+                  <c:v>0.77839776999999999</c:v>
+                </c:pt>
+                <c:pt idx="4">
+                  <c:v>0.90251179000000004</c:v>
+                </c:pt>
+                <c:pt idx="5">
+                  <c:v>1.0592724</c:v>
+                </c:pt>
+                <c:pt idx="6">
+                  <c:v>1.1566564799999999</c:v>
+                </c:pt>
+                <c:pt idx="7">
+                  <c:v>1.2416817199999999</c:v>
+                </c:pt>
+                <c:pt idx="8">
+                  <c:v>1.3055416100000001</c:v>
+                </c:pt>
+                <c:pt idx="9">
+                  <c:v>1.4412480700000001</c:v>
+                </c:pt>
+              </c:numCache>
+            </c:numRef>
+          </c:val>
+          <c:extLst>
+            <c:ext xmlns:c16="http://schemas.microsoft.com/office/drawing/2014/chart" uri="{C3380CC4-5D6E-409C-BE32-E72D297353CC}">
+              <c16:uniqueId val="{00000000-87CC-4C8F-9E73-961FD4132C93}"/>
+            </c:ext>
+          </c:extLst>
+        </c:ser>
+        <c:dLbls>
+          <c:showLegendKey val="0"/>
+          <c:showVal val="0"/>
+          <c:showCatName val="0"/>
+          <c:showSerName val="0"/>
+          <c:showPercent val="0"/>
+          <c:showBubbleSize val="0"/>
+        </c:dLbls>
+        <c:gapWidth val="219"/>
+        <c:axId val="1378809056"/>
+        <c:axId val="1378799936"/>
+      </c:barChart>
+      <c:catAx>
+        <c:axId val="1378809056"/>
+        <c:scaling>
+          <c:orientation val="minMax"/>
+        </c:scaling>
+        <c:delete val="0"/>
+        <c:axPos val="l"/>
+        <c:numFmt formatCode="General" sourceLinked="1"/>
+        <c:majorTickMark val="none"/>
+        <c:minorTickMark val="none"/>
+        <c:tickLblPos val="nextTo"/>
+        <c:spPr>
+          <a:noFill/>
+          <a:ln w="9525" cap="flat" cmpd="sng" algn="ctr">
+            <a:solidFill>
+              <a:schemeClr val="tx1">
+                <a:lumMod val="15000"/>
+                <a:lumOff val="85000"/>
+              </a:schemeClr>
+            </a:solidFill>
+            <a:round/>
+          </a:ln>
+          <a:effectLst/>
+        </c:spPr>
+        <c:txPr>
+          <a:bodyPr rot="-60000000" spcFirstLastPara="1" vertOverflow="ellipsis" vert="horz" wrap="square" anchor="ctr" anchorCtr="1"/>
+          <a:lstStyle/>
+          <a:p>
+            <a:pPr>
+              <a:defRPr sz="2200" b="0" i="0" u="none" strike="noStrike" kern="1200" baseline="0">
+                <a:ln>
+                  <a:noFill/>
+                </a:ln>
+                <a:solidFill>
+                  <a:schemeClr val="tx1">
+                    <a:lumMod val="65000"/>
+                    <a:lumOff val="35000"/>
+                  </a:schemeClr>
+                </a:solidFill>
+                <a:latin typeface="+mn-lt"/>
+                <a:ea typeface="+mn-ea"/>
+                <a:cs typeface="+mn-cs"/>
+              </a:defRPr>
+            </a:pPr>
+            <a:endParaRPr lang="en-US"/>
+          </a:p>
+        </c:txPr>
+        <c:crossAx val="1378799936"/>
+        <c:crosses val="autoZero"/>
+        <c:auto val="1"/>
+        <c:lblAlgn val="ctr"/>
+        <c:lblOffset val="100"/>
+        <c:noMultiLvlLbl val="0"/>
+      </c:catAx>
+      <c:valAx>
+        <c:axId val="1378799936"/>
+        <c:scaling>
+          <c:orientation val="minMax"/>
+          <c:max val="1.5"/>
+        </c:scaling>
+        <c:delete val="0"/>
+        <c:axPos val="b"/>
+        <c:majorGridlines>
+          <c:spPr>
+            <a:ln w="9525" cap="flat" cmpd="sng" algn="ctr">
+              <a:solidFill>
+                <a:schemeClr val="tx1">
+                  <a:lumMod val="15000"/>
+                  <a:lumOff val="85000"/>
+                </a:schemeClr>
+              </a:solidFill>
+              <a:round/>
+            </a:ln>
+            <a:effectLst/>
+          </c:spPr>
+        </c:majorGridlines>
+        <c:numFmt formatCode="#,##0.0" sourceLinked="1"/>
+        <c:majorTickMark val="none"/>
+        <c:minorTickMark val="none"/>
+        <c:tickLblPos val="nextTo"/>
+        <c:spPr>
+          <a:noFill/>
+          <a:ln>
+            <a:noFill/>
+          </a:ln>
+          <a:effectLst/>
+        </c:spPr>
+        <c:txPr>
+          <a:bodyPr rot="-60000000" spcFirstLastPara="1" vertOverflow="ellipsis" vert="horz" wrap="square" anchor="ctr" anchorCtr="1"/>
+          <a:lstStyle/>
+          <a:p>
+            <a:pPr>
+              <a:defRPr sz="2200" b="0" i="0" u="none" strike="noStrike" kern="1200" baseline="0">
+                <a:solidFill>
+                  <a:schemeClr val="tx1">
+                    <a:lumMod val="65000"/>
+                    <a:lumOff val="35000"/>
+                  </a:schemeClr>
+                </a:solidFill>
+                <a:latin typeface="+mn-lt"/>
+                <a:ea typeface="+mn-ea"/>
+                <a:cs typeface="+mn-cs"/>
+              </a:defRPr>
+            </a:pPr>
+            <a:endParaRPr lang="en-US"/>
+          </a:p>
+        </c:txPr>
+        <c:crossAx val="1378809056"/>
+        <c:crosses val="autoZero"/>
+        <c:crossBetween val="between"/>
+      </c:valAx>
+      <c:spPr>
+        <a:noFill/>
+        <a:ln>
+          <a:noFill/>
+        </a:ln>
+        <a:effectLst/>
+      </c:spPr>
+    </c:plotArea>
+    <c:plotVisOnly val="1"/>
+    <c:dispBlanksAs val="gap"/>
+    <c:showDLblsOverMax val="0"/>
+    <c:extLst>
+      <c:ext xmlns:c16r3="http://schemas.microsoft.com/office/drawing/2017/03/chart" uri="{56B9EC1D-385E-4148-901F-78D8002777C0}">
+        <c16r3:dataDisplayOptions16>
+          <c16r3:dispNaAsBlank val="1"/>
+        </c16r3:dataDisplayOptions16>
+      </c:ext>
+    </c:extLst>
+  </c:chart>
+  <c:spPr>
+    <a:noFill/>
+    <a:ln>
+      <a:noFill/>
+    </a:ln>
+    <a:effectLst/>
+  </c:spPr>
+  <c:txPr>
+    <a:bodyPr/>
+    <a:lstStyle/>
+    <a:p>
+      <a:pPr>
+        <a:defRPr/>
+      </a:pPr>
+      <a:endParaRPr lang="en-US"/>
+    </a:p>
+  </c:txPr>
+  <c:externalData r:id="rId3">
+    <c:autoUpdate val="0"/>
+  </c:externalData>
+</c:chartSpace>
+</file>
+
+<file path=ppt/charts/colors1.xml><?xml version="1.0" encoding="utf-8"?>
+<cs:colorStyle xmlns:cs="http://schemas.microsoft.com/office/drawing/2012/chartStyle" xmlns:a="http://schemas.openxmlformats.org/drawingml/2006/main" meth="cycle" id="10">
+  <a:schemeClr val="accent1"/>
+  <a:schemeClr val="accent2"/>
+  <a:schemeClr val="accent3"/>
+  <a:schemeClr val="accent4"/>
+  <a:schemeClr val="accent5"/>
+  <a:schemeClr val="accent6"/>
+  <cs:variation/>
+  <cs:variation>
+    <a:lumMod val="60000"/>
+  </cs:variation>
+  <cs:variation>
+    <a:lumMod val="80000"/>
+    <a:lumOff val="20000"/>
+  </cs:variation>
+  <cs:variation>
+    <a:lumMod val="80000"/>
+  </cs:variation>
+  <cs:variation>
+    <a:lumMod val="60000"/>
+    <a:lumOff val="40000"/>
+  </cs:variation>
+  <cs:variation>
+    <a:lumMod val="50000"/>
+  </cs:variation>
+  <cs:variation>
+    <a:lumMod val="70000"/>
+    <a:lumOff val="30000"/>
+  </cs:variation>
+  <cs:variation>
+    <a:lumMod val="70000"/>
+  </cs:variation>
+  <cs:variation>
+    <a:lumMod val="50000"/>
+    <a:lumOff val="50000"/>
+  </cs:variation>
+</cs:colorStyle>
+</file>
+
+<file path=ppt/charts/style1.xml><?xml version="1.0" encoding="utf-8"?>
+<cs:chartStyle xmlns:cs="http://schemas.microsoft.com/office/drawing/2012/chartStyle" xmlns:a="http://schemas.openxmlformats.org/drawingml/2006/main" id="201">
+  <cs:axisTitle>
+    <cs:lnRef idx="0"/>
+    <cs:fillRef idx="0"/>
+    <cs:effectRef idx="0"/>
+    <cs:fontRef idx="minor">
+      <a:schemeClr val="tx1">
+        <a:lumMod val="65000"/>
+        <a:lumOff val="35000"/>
+      </a:schemeClr>
+    </cs:fontRef>
+    <cs:defRPr sz="1330" kern="1200"/>
+  </cs:axisTitle>
+  <cs:categoryAxis>
+    <cs:lnRef idx="0"/>
+    <cs:fillRef idx="0"/>
+    <cs:effectRef idx="0"/>
+    <cs:fontRef idx="minor">
+      <a:schemeClr val="tx1">
+        <a:lumMod val="65000"/>
+        <a:lumOff val="35000"/>
+      </a:schemeClr>
+    </cs:fontRef>
+    <cs:spPr>
+      <a:ln w="9525" cap="flat" cmpd="sng" algn="ctr">
+        <a:solidFill>
+          <a:schemeClr val="tx1">
+            <a:lumMod val="15000"/>
+            <a:lumOff val="85000"/>
+          </a:schemeClr>
+        </a:solidFill>
+        <a:round/>
+      </a:ln>
+    </cs:spPr>
+    <cs:defRPr sz="1197" kern="1200"/>
+  </cs:categoryAxis>
+  <cs:chartArea mods="allowNoFillOverride allowNoLineOverride">
+    <cs:lnRef idx="0"/>
+    <cs:fillRef idx="0"/>
+    <cs:effectRef idx="0"/>
+    <cs:fontRef idx="minor">
+      <a:schemeClr val="tx1"/>
+    </cs:fontRef>
+    <cs:spPr>
+      <a:solidFill>
+        <a:schemeClr val="bg1"/>
+      </a:solidFill>
+      <a:ln w="9525" cap="flat" cmpd="sng" algn="ctr">
+        <a:solidFill>
+          <a:schemeClr val="tx1">
+            <a:lumMod val="15000"/>
+            <a:lumOff val="85000"/>
+          </a:schemeClr>
+        </a:solidFill>
+        <a:round/>
+      </a:ln>
+    </cs:spPr>
+    <cs:defRPr sz="1330" kern="1200"/>
+  </cs:chartArea>
+  <cs:dataLabel>
+    <cs:lnRef idx="0"/>
+    <cs:fillRef idx="0"/>
+    <cs:effectRef idx="0"/>
+    <cs:fontRef idx="minor">
+      <a:schemeClr val="tx1">
+        <a:lumMod val="75000"/>
+        <a:lumOff val="25000"/>
+      </a:schemeClr>
+    </cs:fontRef>
+    <cs:defRPr sz="1197" kern="1200"/>
+  </cs:dataLabel>
+  <cs:dataLabelCallout>
+    <cs:lnRef idx="0"/>
+    <cs:fillRef idx="0"/>
+    <cs:effectRef idx="0"/>
+    <cs:fontRef idx="minor">
+      <a:schemeClr val="dk1">
+        <a:lumMod val="65000"/>
+        <a:lumOff val="35000"/>
+      </a:schemeClr>
+    </cs:fontRef>
+    <cs:spPr>
+      <a:solidFill>
+        <a:schemeClr val="lt1"/>
+      </a:solidFill>
+      <a:ln>
+        <a:solidFill>
+          <a:schemeClr val="dk1">
+            <a:lumMod val="25000"/>
+            <a:lumOff val="75000"/>
+          </a:schemeClr>
+        </a:solidFill>
+      </a:ln>
+    </cs:spPr>
+    <cs:defRPr sz="1197" kern="1200"/>
+    <cs:bodyPr rot="0" spcFirstLastPara="1" vertOverflow="clip" horzOverflow="clip" vert="horz" wrap="square" lIns="36576" tIns="18288" rIns="36576" bIns="18288" anchor="ctr" anchorCtr="1">
+      <a:spAutoFit/>
+    </cs:bodyPr>
+  </cs:dataLabelCallout>
+  <cs:dataPoint>
+    <cs:lnRef idx="0"/>
+    <cs:fillRef idx="1">
+      <cs:styleClr val="auto"/>
+    </cs:fillRef>
+    <cs:effectRef idx="0"/>
+    <cs:fontRef idx="minor">
+      <a:schemeClr val="tx1"/>
+    </cs:fontRef>
+  </cs:dataPoint>
+  <cs:dataPoint3D>
+    <cs:lnRef idx="0"/>
+    <cs:fillRef idx="1">
+      <cs:styleClr val="auto"/>
+    </cs:fillRef>
+    <cs:effectRef idx="0"/>
+    <cs:fontRef idx="minor">
+      <a:schemeClr val="tx1"/>
+    </cs:fontRef>
+  </cs:dataPoint3D>
+  <cs:dataPointLine>
+    <cs:lnRef idx="0">
+      <cs:styleClr val="auto"/>
+    </cs:lnRef>
+    <cs:fillRef idx="1"/>
+    <cs:effectRef idx="0"/>
+    <cs:fontRef idx="minor">
+      <a:schemeClr val="tx1"/>
+    </cs:fontRef>
+    <cs:spPr>
+      <a:ln w="28575" cap="rnd">
+        <a:solidFill>
+          <a:schemeClr val="phClr"/>
+        </a:solidFill>
+        <a:round/>
+      </a:ln>
+    </cs:spPr>
+  </cs:dataPointLine>
+  <cs:dataPointMarker>
+    <cs:lnRef idx="0">
+      <cs:styleClr val="auto"/>
+    </cs:lnRef>
+    <cs:fillRef idx="1">
+      <cs:styleClr val="auto"/>
+    </cs:fillRef>
+    <cs:effectRef idx="0"/>
+    <cs:fontRef idx="minor">
+      <a:schemeClr val="tx1"/>
+    </cs:fontRef>
+    <cs:spPr>
+      <a:ln w="9525">
+        <a:solidFill>
+          <a:schemeClr val="phClr"/>
+        </a:solidFill>
+      </a:ln>
+    </cs:spPr>
+  </cs:dataPointMarker>
+  <cs:dataPointMarkerLayout symbol="circle" size="5"/>
+  <cs:dataPointWireframe>
+    <cs:lnRef idx="0">
+      <cs:styleClr val="auto"/>
+    </cs:lnRef>
+    <cs:fillRef idx="1"/>
+    <cs:effectRef idx="0"/>
+    <cs:fontRef idx="minor">
+      <a:schemeClr val="tx1"/>
+    </cs:fontRef>
+    <cs:spPr>
+      <a:ln w="9525" cap="rnd">
+        <a:solidFill>
+          <a:schemeClr val="phClr"/>
+        </a:solidFill>
+        <a:round/>
+      </a:ln>
+    </cs:spPr>
+  </cs:dataPointWireframe>
+  <cs:dataTable>
+    <cs:lnRef idx="0"/>
+    <cs:fillRef idx="0"/>
+    <cs:effectRef idx="0"/>
+    <cs:fontRef idx="minor">
+      <a:schemeClr val="tx1">
+        <a:lumMod val="65000"/>
+        <a:lumOff val="35000"/>
+      </a:schemeClr>
+    </cs:fontRef>
+    <cs:spPr>
+      <a:noFill/>
+      <a:ln w="9525" cap="flat" cmpd="sng" algn="ctr">
+        <a:solidFill>
+          <a:schemeClr val="tx1">
+            <a:lumMod val="15000"/>
+            <a:lumOff val="85000"/>
+          </a:schemeClr>
+        </a:solidFill>
+        <a:round/>
+      </a:ln>
+    </cs:spPr>
+    <cs:defRPr sz="1197" kern="1200"/>
+  </cs:dataTable>
+  <cs:downBar>
+    <cs:lnRef idx="0"/>
+    <cs:fillRef idx="0"/>
+    <cs:effectRef idx="0"/>
+    <cs:fontRef idx="minor">
+      <a:schemeClr val="dk1"/>
+    </cs:fontRef>
+    <cs:spPr>
+      <a:solidFill>
+        <a:schemeClr val="dk1">
+          <a:lumMod val="65000"/>
+          <a:lumOff val="35000"/>
+        </a:schemeClr>
+      </a:solidFill>
+      <a:ln w="9525">
+        <a:solidFill>
+          <a:schemeClr val="tx1">
+            <a:lumMod val="65000"/>
+            <a:lumOff val="35000"/>
+          </a:schemeClr>
+        </a:solidFill>
+      </a:ln>
+    </cs:spPr>
+  </cs:downBar>
+  <cs:dropLine>
+    <cs:lnRef idx="0"/>
+    <cs:fillRef idx="0"/>
+    <cs:effectRef idx="0"/>
+    <cs:fontRef idx="minor">
+      <a:schemeClr val="tx1"/>
+    </cs:fontRef>
+    <cs:spPr>
+      <a:ln w="9525" cap="flat" cmpd="sng" algn="ctr">
+        <a:solidFill>
+          <a:schemeClr val="tx1">
+            <a:lumMod val="35000"/>
+            <a:lumOff val="65000"/>
+          </a:schemeClr>
+        </a:solidFill>
+        <a:round/>
+      </a:ln>
+    </cs:spPr>
+  </cs:dropLine>
+  <cs:errorBar>
+    <cs:lnRef idx="0"/>
+    <cs:fillRef idx="0"/>
+    <cs:effectRef idx="0"/>
+    <cs:fontRef idx="minor">
+      <a:schemeClr val="tx1"/>
+    </cs:fontRef>
+    <cs:spPr>
+      <a:ln w="9525" cap="flat" cmpd="sng" algn="ctr">
+        <a:solidFill>
+          <a:schemeClr val="tx1">
+            <a:lumMod val="65000"/>
+            <a:lumOff val="35000"/>
+          </a:schemeClr>
+        </a:solidFill>
+        <a:round/>
+      </a:ln>
+    </cs:spPr>
+  </cs:errorBar>
+  <cs:floor>
+    <cs:lnRef idx="0"/>
+    <cs:fillRef idx="0"/>
+    <cs:effectRef idx="0"/>
+    <cs:fontRef idx="minor">
+      <a:schemeClr val="tx1"/>
+    </cs:fontRef>
+    <cs:spPr>
+      <a:noFill/>
+      <a:ln>
+        <a:noFill/>
+      </a:ln>
+    </cs:spPr>
+  </cs:floor>
+  <cs:gridlineMajor>
+    <cs:lnRef idx="0"/>
+    <cs:fillRef idx="0"/>
+    <cs:effectRef idx="0"/>
+    <cs:fontRef idx="minor">
+      <a:schemeClr val="tx1"/>
+    </cs:fontRef>
+    <cs:spPr>
+      <a:ln w="9525" cap="flat" cmpd="sng" algn="ctr">
+        <a:solidFill>
+          <a:schemeClr val="tx1">
+            <a:lumMod val="15000"/>
+            <a:lumOff val="85000"/>
+          </a:schemeClr>
+        </a:solidFill>
+        <a:round/>
+      </a:ln>
+    </cs:spPr>
+  </cs:gridlineMajor>
+  <cs:gridlineMinor>
+    <cs:lnRef idx="0"/>
+    <cs:fillRef idx="0"/>
+    <cs:effectRef idx="0"/>
+    <cs:fontRef idx="minor">
+      <a:schemeClr val="tx1"/>
+    </cs:fontRef>
+    <cs:spPr>
+      <a:ln w="9525" cap="flat" cmpd="sng" algn="ctr">
+        <a:solidFill>
+          <a:schemeClr val="tx1">
+            <a:lumMod val="5000"/>
+            <a:lumOff val="95000"/>
+          </a:schemeClr>
+        </a:solidFill>
+        <a:round/>
+      </a:ln>
+    </cs:spPr>
+  </cs:gridlineMinor>
+  <cs:hiLoLine>
+    <cs:lnRef idx="0"/>
+    <cs:fillRef idx="0"/>
+    <cs:effectRef idx="0"/>
+    <cs:fontRef idx="minor">
+      <a:schemeClr val="tx1"/>
+    </cs:fontRef>
+    <cs:spPr>
+      <a:ln w="9525" cap="flat" cmpd="sng" algn="ctr">
+        <a:solidFill>
+          <a:schemeClr val="tx1">
+            <a:lumMod val="75000"/>
+            <a:lumOff val="25000"/>
+          </a:schemeClr>
+        </a:solidFill>
+        <a:round/>
+      </a:ln>
+    </cs:spPr>
+  </cs:hiLoLine>
+  <cs:leaderLine>
+    <cs:lnRef idx="0"/>
+    <cs:fillRef idx="0"/>
+    <cs:effectRef idx="0"/>
+    <cs:fontRef idx="minor">
+      <a:schemeClr val="tx1"/>
+    </cs:fontRef>
+    <cs:spPr>
+      <a:ln w="9525" cap="flat" cmpd="sng" algn="ctr">
+        <a:solidFill>
+          <a:schemeClr val="tx1">
+            <a:lumMod val="35000"/>
+            <a:lumOff val="65000"/>
+          </a:schemeClr>
+        </a:solidFill>
+        <a:round/>
+      </a:ln>
+    </cs:spPr>
+  </cs:leaderLine>
+  <cs:legend>
+    <cs:lnRef idx="0"/>
+    <cs:fillRef idx="0"/>
+    <cs:effectRef idx="0"/>
+    <cs:fontRef idx="minor">
+      <a:schemeClr val="tx1">
+        <a:lumMod val="65000"/>
+        <a:lumOff val="35000"/>
+      </a:schemeClr>
+    </cs:fontRef>
+    <cs:defRPr sz="1197" kern="1200"/>
+  </cs:legend>
+  <cs:plotArea mods="allowNoFillOverride allowNoLineOverride">
+    <cs:lnRef idx="0"/>
+    <cs:fillRef idx="0"/>
+    <cs:effectRef idx="0"/>
+    <cs:fontRef idx="minor">
+      <a:schemeClr val="tx1"/>
+    </cs:fontRef>
+  </cs:plotArea>
+  <cs:plotArea3D mods="allowNoFillOverride allowNoLineOverride">
+    <cs:lnRef idx="0"/>
+    <cs:fillRef idx="0"/>
+    <cs:effectRef idx="0"/>
+    <cs:fontRef idx="minor">
+      <a:schemeClr val="tx1"/>
+    </cs:fontRef>
+  </cs:plotArea3D>
+  <cs:seriesAxis>
+    <cs:lnRef idx="0"/>
+    <cs:fillRef idx="0"/>
+    <cs:effectRef idx="0"/>
+    <cs:fontRef idx="minor">
+      <a:schemeClr val="tx1">
+        <a:lumMod val="65000"/>
+        <a:lumOff val="35000"/>
+      </a:schemeClr>
+    </cs:fontRef>
+    <cs:defRPr sz="1197" kern="1200"/>
+  </cs:seriesAxis>
+  <cs:seriesLine>
+    <cs:lnRef idx="0"/>
+    <cs:fillRef idx="0"/>
+    <cs:effectRef idx="0"/>
+    <cs:fontRef idx="minor">
+      <a:schemeClr val="tx1"/>
+    </cs:fontRef>
+    <cs:spPr>
+      <a:ln w="9525" cap="flat" cmpd="sng" algn="ctr">
+        <a:solidFill>
+          <a:schemeClr val="tx1">
+            <a:lumMod val="35000"/>
+            <a:lumOff val="65000"/>
+          </a:schemeClr>
+        </a:solidFill>
+        <a:round/>
+      </a:ln>
+    </cs:spPr>
+  </cs:seriesLine>
+  <cs:title>
+    <cs:lnRef idx="0"/>
+    <cs:fillRef idx="0"/>
+    <cs:effectRef idx="0"/>
+    <cs:fontRef idx="minor">
+      <a:schemeClr val="tx1">
+        <a:lumMod val="65000"/>
+        <a:lumOff val="35000"/>
+      </a:schemeClr>
+    </cs:fontRef>
+    <cs:defRPr sz="1862" b="0" kern="1200" spc="0" baseline="0"/>
+  </cs:title>
+  <cs:trendline>
+    <cs:lnRef idx="0">
+      <cs:styleClr val="auto"/>
+    </cs:lnRef>
+    <cs:fillRef idx="0"/>
+    <cs:effectRef idx="0"/>
+    <cs:fontRef idx="minor">
+      <a:schemeClr val="tx1"/>
+    </cs:fontRef>
+    <cs:spPr>
+      <a:ln w="19050" cap="rnd">
+        <a:solidFill>
+          <a:schemeClr val="phClr"/>
+        </a:solidFill>
+        <a:prstDash val="sysDot"/>
+      </a:ln>
+    </cs:spPr>
+  </cs:trendline>
+  <cs:trendlineLabel>
+    <cs:lnRef idx="0"/>
+    <cs:fillRef idx="0"/>
+    <cs:effectRef idx="0"/>
+    <cs:fontRef idx="minor">
+      <a:schemeClr val="tx1">
+        <a:lumMod val="65000"/>
+        <a:lumOff val="35000"/>
+      </a:schemeClr>
+    </cs:fontRef>
+    <cs:defRPr sz="1197" kern="1200"/>
+  </cs:trendlineLabel>
+  <cs:upBar>
+    <cs:lnRef idx="0"/>
+    <cs:fillRef idx="0"/>
+    <cs:effectRef idx="0"/>
+    <cs:fontRef idx="minor">
+      <a:schemeClr val="dk1"/>
+    </cs:fontRef>
+    <cs:spPr>
+      <a:solidFill>
+        <a:schemeClr val="lt1"/>
+      </a:solidFill>
+      <a:ln w="9525">
+        <a:solidFill>
+          <a:schemeClr val="tx1">
+            <a:lumMod val="15000"/>
+            <a:lumOff val="85000"/>
+          </a:schemeClr>
+        </a:solidFill>
+      </a:ln>
+    </cs:spPr>
+  </cs:upBar>
+  <cs:valueAxis>
+    <cs:lnRef idx="0"/>
+    <cs:fillRef idx="0"/>
+    <cs:effectRef idx="0"/>
+    <cs:fontRef idx="minor">
+      <a:schemeClr val="tx1">
+        <a:lumMod val="65000"/>
+        <a:lumOff val="35000"/>
+      </a:schemeClr>
+    </cs:fontRef>
+    <cs:defRPr sz="1197" kern="1200"/>
+  </cs:valueAxis>
+  <cs:wall>
+    <cs:lnRef idx="0"/>
+    <cs:fillRef idx="0"/>
+    <cs:effectRef idx="0"/>
+    <cs:fontRef idx="minor">
+      <a:schemeClr val="tx1"/>
+    </cs:fontRef>
+    <cs:spPr>
+      <a:noFill/>
+      <a:ln>
+        <a:noFill/>
+      </a:ln>
+    </cs:spPr>
+  </cs:wall>
+</cs:chartStyle>
+</file>
+
 <file path=ppt/slideLayouts/slideLayout1.xml><?xml version="1.0" encoding="utf-8"?>
 <p:sldLayout xmlns:a="http://schemas.openxmlformats.org/drawingml/2006/main" xmlns:r="http://schemas.openxmlformats.org/officeDocument/2006/relationships" xmlns:p="http://schemas.openxmlformats.org/presentationml/2006/main" showMasterSp="0" type="title" preserve="1">
   <p:cSld name="Title Slide">
@@ -9732,7 +10601,7 @@
           <a:p>
             <a:fld id="{B2374077-9B34-4FA8-8422-634E903F67E1}" type="datetimeFigureOut">
               <a:rPr lang="en-US" smtClean="0"/>
-              <a:t>4/15/2026</a:t>
+              <a:t>4/19/2026</a:t>
             </a:fld>
             <a:endParaRPr lang="en-US"/>
           </a:p>
@@ -9939,7 +10808,7 @@
           <a:p>
             <a:fld id="{B2374077-9B34-4FA8-8422-634E903F67E1}" type="datetimeFigureOut">
               <a:rPr lang="en-US" smtClean="0"/>
-              <a:t>4/15/2026</a:t>
+              <a:t>4/19/2026</a:t>
             </a:fld>
             <a:endParaRPr lang="en-US"/>
           </a:p>
@@ -10119,7 +10988,7 @@
           <a:p>
             <a:fld id="{B2374077-9B34-4FA8-8422-634E903F67E1}" type="datetimeFigureOut">
               <a:rPr lang="en-US" smtClean="0"/>
-              <a:t>4/15/2026</a:t>
+              <a:t>4/19/2026</a:t>
             </a:fld>
             <a:endParaRPr lang="en-US"/>
           </a:p>
@@ -10324,7 +11193,7 @@
           <a:p>
             <a:fld id="{B2374077-9B34-4FA8-8422-634E903F67E1}" type="datetimeFigureOut">
               <a:rPr lang="en-US" smtClean="0"/>
-              <a:t>4/15/2026</a:t>
+              <a:t>4/19/2026</a:t>
             </a:fld>
             <a:endParaRPr lang="en-US"/>
           </a:p>
@@ -19236,7 +20105,7 @@
           <a:p>
             <a:fld id="{B2374077-9B34-4FA8-8422-634E903F67E1}" type="datetimeFigureOut">
               <a:rPr lang="en-US" smtClean="0"/>
-              <a:t>4/15/2026</a:t>
+              <a:t>4/19/2026</a:t>
             </a:fld>
             <a:endParaRPr lang="en-US"/>
           </a:p>
@@ -19510,7 +20379,7 @@
           <a:p>
             <a:fld id="{B2374077-9B34-4FA8-8422-634E903F67E1}" type="datetimeFigureOut">
               <a:rPr lang="en-US" smtClean="0"/>
-              <a:t>4/15/2026</a:t>
+              <a:t>4/19/2026</a:t>
             </a:fld>
             <a:endParaRPr lang="en-US"/>
           </a:p>
@@ -19908,7 +20777,7 @@
           <a:p>
             <a:fld id="{B2374077-9B34-4FA8-8422-634E903F67E1}" type="datetimeFigureOut">
               <a:rPr lang="en-US" smtClean="0"/>
-              <a:t>4/15/2026</a:t>
+              <a:t>4/19/2026</a:t>
             </a:fld>
             <a:endParaRPr lang="en-US"/>
           </a:p>
@@ -20026,7 +20895,7 @@
           <a:p>
             <a:fld id="{B2374077-9B34-4FA8-8422-634E903F67E1}" type="datetimeFigureOut">
               <a:rPr lang="en-US" smtClean="0"/>
-              <a:t>4/15/2026</a:t>
+              <a:t>4/19/2026</a:t>
             </a:fld>
             <a:endParaRPr lang="en-US"/>
           </a:p>
@@ -20121,7 +20990,7 @@
           <a:p>
             <a:fld id="{B2374077-9B34-4FA8-8422-634E903F67E1}" type="datetimeFigureOut">
               <a:rPr lang="en-US" smtClean="0"/>
-              <a:t>4/15/2026</a:t>
+              <a:t>4/19/2026</a:t>
             </a:fld>
             <a:endParaRPr lang="en-US"/>
           </a:p>
@@ -20411,7 +21280,7 @@
           <a:p>
             <a:fld id="{B2374077-9B34-4FA8-8422-634E903F67E1}" type="datetimeFigureOut">
               <a:rPr lang="en-US" smtClean="0"/>
-              <a:t>4/15/2026</a:t>
+              <a:t>4/19/2026</a:t>
             </a:fld>
             <a:endParaRPr lang="en-US"/>
           </a:p>
@@ -20691,7 +21560,7 @@
           <a:p>
             <a:fld id="{B2374077-9B34-4FA8-8422-634E903F67E1}" type="datetimeFigureOut">
               <a:rPr lang="en-US" smtClean="0"/>
-              <a:t>4/15/2026</a:t>
+              <a:t>4/19/2026</a:t>
             </a:fld>
             <a:endParaRPr lang="en-US"/>
           </a:p>
@@ -20941,7 +21810,7 @@
           <a:p>
             <a:fld id="{B2374077-9B34-4FA8-8422-634E903F67E1}" type="datetimeFigureOut">
               <a:rPr lang="en-US" smtClean="0"/>
-              <a:t>4/15/2026</a:t>
+              <a:t>4/19/2026</a:t>
             </a:fld>
             <a:endParaRPr lang="en-US"/>
           </a:p>
@@ -21529,6 +22398,432 @@
   <p:cSld>
     <p:spTree>
       <p:nvGrpSpPr>
+        <p:cNvPr id="1" name=""/>
+        <p:cNvGrpSpPr/>
+        <p:nvPr/>
+      </p:nvGrpSpPr>
+      <p:grpSpPr>
+        <a:xfrm>
+          <a:off x="0" y="0"/>
+          <a:ext cx="0" cy="0"/>
+          <a:chOff x="0" y="0"/>
+          <a:chExt cx="0" cy="0"/>
+        </a:xfrm>
+      </p:grpSpPr>
+      <p:sp>
+        <p:nvSpPr>
+          <p:cNvPr id="7" name="Title 6">
+            <a:extLst>
+              <a:ext uri="{FF2B5EF4-FFF2-40B4-BE49-F238E27FC236}">
+                <a16:creationId xmlns:a16="http://schemas.microsoft.com/office/drawing/2014/main" id="{5BD0FE1D-EE1D-CBA0-440A-FC5AF9D86BAB}"/>
+              </a:ext>
+            </a:extLst>
+          </p:cNvPr>
+          <p:cNvSpPr>
+            <a:spLocks noGrp="1"/>
+          </p:cNvSpPr>
+          <p:nvPr>
+            <p:ph type="title"/>
+          </p:nvPr>
+        </p:nvSpPr>
+        <p:spPr/>
+        <p:txBody>
+          <a:bodyPr/>
+          <a:lstStyle/>
+          <a:p>
+            <a:r>
+              <a:rPr lang="en-US" dirty="0"/>
+              <a:t>Customer &amp; Delivery Behavior</a:t>
+            </a:r>
+          </a:p>
+        </p:txBody>
+      </p:sp>
+      <p:sp>
+        <p:nvSpPr>
+          <p:cNvPr id="8" name="Text Placeholder 7">
+            <a:extLst>
+              <a:ext uri="{FF2B5EF4-FFF2-40B4-BE49-F238E27FC236}">
+                <a16:creationId xmlns:a16="http://schemas.microsoft.com/office/drawing/2014/main" id="{B732DF04-1DE9-5BF9-6277-EF7309B44354}"/>
+              </a:ext>
+            </a:extLst>
+          </p:cNvPr>
+          <p:cNvSpPr>
+            <a:spLocks noGrp="1"/>
+          </p:cNvSpPr>
+          <p:nvPr>
+            <p:ph type="body" idx="1"/>
+          </p:nvPr>
+        </p:nvSpPr>
+        <p:spPr/>
+        <p:txBody>
+          <a:bodyPr/>
+          <a:lstStyle/>
+          <a:p>
+            <a:r>
+              <a:rPr lang="en-US" dirty="0"/>
+              <a:t>Michael Amaya | Q5–Q8</a:t>
+            </a:r>
+          </a:p>
+        </p:txBody>
+      </p:sp>
+    </p:spTree>
+    <p:extLst>
+      <p:ext uri="{BB962C8B-B14F-4D97-AF65-F5344CB8AC3E}">
+        <p14:creationId xmlns:p14="http://schemas.microsoft.com/office/powerpoint/2010/main" val="2306582258"/>
+      </p:ext>
+    </p:extLst>
+  </p:cSld>
+  <p:clrMapOvr>
+    <a:masterClrMapping/>
+  </p:clrMapOvr>
+</p:sld>
+</file>
+
+<file path=ppt/slides/slide11.xml><?xml version="1.0" encoding="utf-8"?>
+<p:sld xmlns:a="http://schemas.openxmlformats.org/drawingml/2006/main" xmlns:r="http://schemas.openxmlformats.org/officeDocument/2006/relationships" xmlns:p="http://schemas.openxmlformats.org/presentationml/2006/main">
+  <p:cSld>
+    <p:spTree>
+      <p:nvGrpSpPr>
+        <p:cNvPr id="1" name=""/>
+        <p:cNvGrpSpPr/>
+        <p:nvPr/>
+      </p:nvGrpSpPr>
+      <p:grpSpPr>
+        <a:xfrm>
+          <a:off x="0" y="0"/>
+          <a:ext cx="0" cy="0"/>
+          <a:chOff x="0" y="0"/>
+          <a:chExt cx="0" cy="0"/>
+        </a:xfrm>
+      </p:grpSpPr>
+      <p:sp>
+        <p:nvSpPr>
+          <p:cNvPr id="2" name="Title 1">
+            <a:extLst>
+              <a:ext uri="{FF2B5EF4-FFF2-40B4-BE49-F238E27FC236}">
+                <a16:creationId xmlns:a16="http://schemas.microsoft.com/office/drawing/2014/main" id="{A7D68A88-CD02-E230-F679-81946D1CFA58}"/>
+              </a:ext>
+            </a:extLst>
+          </p:cNvPr>
+          <p:cNvSpPr>
+            <a:spLocks noGrp="1"/>
+          </p:cNvSpPr>
+          <p:nvPr>
+            <p:ph type="title"/>
+          </p:nvPr>
+        </p:nvSpPr>
+        <p:spPr/>
+        <p:txBody>
+          <a:bodyPr/>
+          <a:lstStyle/>
+          <a:p>
+            <a:r>
+              <a:rPr lang="en-US" dirty="0"/>
+              <a:t>Delivery Time &amp; Customer Reviews</a:t>
+            </a:r>
+          </a:p>
+        </p:txBody>
+      </p:sp>
+      <p:sp>
+        <p:nvSpPr>
+          <p:cNvPr id="3" name="Text Placeholder 2">
+            <a:extLst>
+              <a:ext uri="{FF2B5EF4-FFF2-40B4-BE49-F238E27FC236}">
+                <a16:creationId xmlns:a16="http://schemas.microsoft.com/office/drawing/2014/main" id="{3B5E2797-167C-8E8B-B485-E71790C6E69C}"/>
+              </a:ext>
+            </a:extLst>
+          </p:cNvPr>
+          <p:cNvSpPr>
+            <a:spLocks noGrp="1"/>
+          </p:cNvSpPr>
+          <p:nvPr>
+            <p:ph type="body" idx="1"/>
+          </p:nvPr>
+        </p:nvSpPr>
+        <p:spPr/>
+        <p:txBody>
+          <a:bodyPr/>
+          <a:lstStyle/>
+          <a:p>
+            <a:r>
+              <a:rPr lang="en-US" dirty="0"/>
+              <a:t>Q5</a:t>
+            </a:r>
+          </a:p>
+        </p:txBody>
+      </p:sp>
+      <p:sp>
+        <p:nvSpPr>
+          <p:cNvPr id="4" name="Content Placeholder 3">
+            <a:extLst>
+              <a:ext uri="{FF2B5EF4-FFF2-40B4-BE49-F238E27FC236}">
+                <a16:creationId xmlns:a16="http://schemas.microsoft.com/office/drawing/2014/main" id="{E72F4CE0-5F18-E6DB-A60B-95D50722AD46}"/>
+              </a:ext>
+            </a:extLst>
+          </p:cNvPr>
+          <p:cNvSpPr>
+            <a:spLocks noGrp="1"/>
+          </p:cNvSpPr>
+          <p:nvPr>
+            <p:ph sz="half" idx="2"/>
+          </p:nvPr>
+        </p:nvSpPr>
+        <p:spPr/>
+        <p:txBody>
+          <a:bodyPr/>
+          <a:lstStyle/>
+          <a:p>
+            <a:r>
+              <a:rPr lang="en-US" dirty="0"/>
+              <a:t>TODO</a:t>
+            </a:r>
+          </a:p>
+        </p:txBody>
+      </p:sp>
+      <p:sp>
+        <p:nvSpPr>
+          <p:cNvPr id="5" name="Text Placeholder 4">
+            <a:extLst>
+              <a:ext uri="{FF2B5EF4-FFF2-40B4-BE49-F238E27FC236}">
+                <a16:creationId xmlns:a16="http://schemas.microsoft.com/office/drawing/2014/main" id="{5F0F5418-56A8-AEE0-C231-11278121AA9D}"/>
+              </a:ext>
+            </a:extLst>
+          </p:cNvPr>
+          <p:cNvSpPr>
+            <a:spLocks noGrp="1"/>
+          </p:cNvSpPr>
+          <p:nvPr>
+            <p:ph type="body" sz="quarter" idx="3"/>
+          </p:nvPr>
+        </p:nvSpPr>
+        <p:spPr/>
+        <p:txBody>
+          <a:bodyPr/>
+          <a:lstStyle/>
+          <a:p>
+            <a:r>
+              <a:rPr lang="en-US" dirty="0"/>
+              <a:t>Q6</a:t>
+            </a:r>
+          </a:p>
+        </p:txBody>
+      </p:sp>
+      <p:sp>
+        <p:nvSpPr>
+          <p:cNvPr id="6" name="Content Placeholder 5">
+            <a:extLst>
+              <a:ext uri="{FF2B5EF4-FFF2-40B4-BE49-F238E27FC236}">
+                <a16:creationId xmlns:a16="http://schemas.microsoft.com/office/drawing/2014/main" id="{2EF9F847-1D46-C17E-05CA-C013095844DE}"/>
+              </a:ext>
+            </a:extLst>
+          </p:cNvPr>
+          <p:cNvSpPr>
+            <a:spLocks noGrp="1"/>
+          </p:cNvSpPr>
+          <p:nvPr>
+            <p:ph sz="quarter" idx="4"/>
+          </p:nvPr>
+        </p:nvSpPr>
+        <p:spPr/>
+        <p:txBody>
+          <a:bodyPr/>
+          <a:lstStyle/>
+          <a:p>
+            <a:r>
+              <a:rPr lang="en-US" dirty="0"/>
+              <a:t>TODO</a:t>
+            </a:r>
+          </a:p>
+        </p:txBody>
+      </p:sp>
+    </p:spTree>
+    <p:extLst>
+      <p:ext uri="{BB962C8B-B14F-4D97-AF65-F5344CB8AC3E}">
+        <p14:creationId xmlns:p14="http://schemas.microsoft.com/office/powerpoint/2010/main" val="296423964"/>
+      </p:ext>
+    </p:extLst>
+  </p:cSld>
+  <p:clrMapOvr>
+    <a:masterClrMapping/>
+  </p:clrMapOvr>
+</p:sld>
+</file>
+
+<file path=ppt/slides/slide12.xml><?xml version="1.0" encoding="utf-8"?>
+<p:sld xmlns:a="http://schemas.openxmlformats.org/drawingml/2006/main" xmlns:r="http://schemas.openxmlformats.org/officeDocument/2006/relationships" xmlns:p="http://schemas.openxmlformats.org/presentationml/2006/main">
+  <p:cSld>
+    <p:spTree>
+      <p:nvGrpSpPr>
+        <p:cNvPr id="1" name=""/>
+        <p:cNvGrpSpPr/>
+        <p:nvPr/>
+      </p:nvGrpSpPr>
+      <p:grpSpPr>
+        <a:xfrm>
+          <a:off x="0" y="0"/>
+          <a:ext cx="0" cy="0"/>
+          <a:chOff x="0" y="0"/>
+          <a:chExt cx="0" cy="0"/>
+        </a:xfrm>
+      </p:grpSpPr>
+      <p:sp>
+        <p:nvSpPr>
+          <p:cNvPr id="2" name="Title 1">
+            <a:extLst>
+              <a:ext uri="{FF2B5EF4-FFF2-40B4-BE49-F238E27FC236}">
+                <a16:creationId xmlns:a16="http://schemas.microsoft.com/office/drawing/2014/main" id="{F9406560-2801-DF72-748D-88EA669A4A43}"/>
+              </a:ext>
+            </a:extLst>
+          </p:cNvPr>
+          <p:cNvSpPr>
+            <a:spLocks noGrp="1"/>
+          </p:cNvSpPr>
+          <p:nvPr>
+            <p:ph type="title"/>
+          </p:nvPr>
+        </p:nvSpPr>
+        <p:spPr/>
+        <p:txBody>
+          <a:bodyPr/>
+          <a:lstStyle/>
+          <a:p>
+            <a:r>
+              <a:rPr lang="en-US" dirty="0"/>
+              <a:t>Order Insights</a:t>
+            </a:r>
+          </a:p>
+        </p:txBody>
+      </p:sp>
+      <p:sp>
+        <p:nvSpPr>
+          <p:cNvPr id="3" name="Text Placeholder 2">
+            <a:extLst>
+              <a:ext uri="{FF2B5EF4-FFF2-40B4-BE49-F238E27FC236}">
+                <a16:creationId xmlns:a16="http://schemas.microsoft.com/office/drawing/2014/main" id="{BF3F6C46-87BA-B4DA-4388-4B98932BFA35}"/>
+              </a:ext>
+            </a:extLst>
+          </p:cNvPr>
+          <p:cNvSpPr>
+            <a:spLocks noGrp="1"/>
+          </p:cNvSpPr>
+          <p:nvPr>
+            <p:ph type="body" idx="1"/>
+          </p:nvPr>
+        </p:nvSpPr>
+        <p:spPr/>
+        <p:txBody>
+          <a:bodyPr/>
+          <a:lstStyle/>
+          <a:p>
+            <a:r>
+              <a:rPr lang="en-US" dirty="0"/>
+              <a:t>Q7</a:t>
+            </a:r>
+          </a:p>
+        </p:txBody>
+      </p:sp>
+      <p:sp>
+        <p:nvSpPr>
+          <p:cNvPr id="4" name="Content Placeholder 3">
+            <a:extLst>
+              <a:ext uri="{FF2B5EF4-FFF2-40B4-BE49-F238E27FC236}">
+                <a16:creationId xmlns:a16="http://schemas.microsoft.com/office/drawing/2014/main" id="{3A9AED6A-86DC-694C-C636-2D6D387EEB7D}"/>
+              </a:ext>
+            </a:extLst>
+          </p:cNvPr>
+          <p:cNvSpPr>
+            <a:spLocks noGrp="1"/>
+          </p:cNvSpPr>
+          <p:nvPr>
+            <p:ph sz="half" idx="2"/>
+          </p:nvPr>
+        </p:nvSpPr>
+        <p:spPr/>
+        <p:txBody>
+          <a:bodyPr/>
+          <a:lstStyle/>
+          <a:p>
+            <a:r>
+              <a:rPr lang="en-US" dirty="0"/>
+              <a:t>TODO</a:t>
+            </a:r>
+          </a:p>
+        </p:txBody>
+      </p:sp>
+      <p:sp>
+        <p:nvSpPr>
+          <p:cNvPr id="5" name="Text Placeholder 4">
+            <a:extLst>
+              <a:ext uri="{FF2B5EF4-FFF2-40B4-BE49-F238E27FC236}">
+                <a16:creationId xmlns:a16="http://schemas.microsoft.com/office/drawing/2014/main" id="{5AFE4C2F-7FAD-2628-CE31-14ADE076AB8B}"/>
+              </a:ext>
+            </a:extLst>
+          </p:cNvPr>
+          <p:cNvSpPr>
+            <a:spLocks noGrp="1"/>
+          </p:cNvSpPr>
+          <p:nvPr>
+            <p:ph type="body" sz="quarter" idx="3"/>
+          </p:nvPr>
+        </p:nvSpPr>
+        <p:spPr/>
+        <p:txBody>
+          <a:bodyPr/>
+          <a:lstStyle/>
+          <a:p>
+            <a:r>
+              <a:rPr lang="en-US" dirty="0"/>
+              <a:t>Q8</a:t>
+            </a:r>
+          </a:p>
+        </p:txBody>
+      </p:sp>
+      <p:sp>
+        <p:nvSpPr>
+          <p:cNvPr id="6" name="Content Placeholder 5">
+            <a:extLst>
+              <a:ext uri="{FF2B5EF4-FFF2-40B4-BE49-F238E27FC236}">
+                <a16:creationId xmlns:a16="http://schemas.microsoft.com/office/drawing/2014/main" id="{86BFE0CA-2E02-792F-8BE4-233204DDE9A5}"/>
+              </a:ext>
+            </a:extLst>
+          </p:cNvPr>
+          <p:cNvSpPr>
+            <a:spLocks noGrp="1"/>
+          </p:cNvSpPr>
+          <p:nvPr>
+            <p:ph sz="quarter" idx="4"/>
+          </p:nvPr>
+        </p:nvSpPr>
+        <p:spPr/>
+        <p:txBody>
+          <a:bodyPr/>
+          <a:lstStyle/>
+          <a:p>
+            <a:r>
+              <a:rPr lang="en-US" dirty="0"/>
+              <a:t>TODO</a:t>
+            </a:r>
+          </a:p>
+        </p:txBody>
+      </p:sp>
+    </p:spTree>
+    <p:extLst>
+      <p:ext uri="{BB962C8B-B14F-4D97-AF65-F5344CB8AC3E}">
+        <p14:creationId xmlns:p14="http://schemas.microsoft.com/office/powerpoint/2010/main" val="3907987761"/>
+      </p:ext>
+    </p:extLst>
+  </p:cSld>
+  <p:clrMapOvr>
+    <a:masterClrMapping/>
+  </p:clrMapOvr>
+</p:sld>
+</file>
+
+<file path=ppt/slides/slide13.xml><?xml version="1.0" encoding="utf-8"?>
+<p:sld xmlns:a="http://schemas.openxmlformats.org/drawingml/2006/main" xmlns:r="http://schemas.openxmlformats.org/officeDocument/2006/relationships" xmlns:p="http://schemas.openxmlformats.org/presentationml/2006/main">
+  <p:cSld>
+    <p:spTree>
+      <p:nvGrpSpPr>
         <p:cNvPr id="1" name="">
           <a:extLst>
             <a:ext uri="{FF2B5EF4-FFF2-40B4-BE49-F238E27FC236}">
@@ -21616,7 +22911,7 @@
 </p:sld>
 </file>
 
-<file path=ppt/slides/slide11.xml><?xml version="1.0" encoding="utf-8"?>
+<file path=ppt/slides/slide14.xml><?xml version="1.0" encoding="utf-8"?>
 <p:sld xmlns:a="http://schemas.openxmlformats.org/drawingml/2006/main" xmlns:r="http://schemas.openxmlformats.org/officeDocument/2006/relationships" xmlns:p="http://schemas.openxmlformats.org/presentationml/2006/main">
   <p:cSld>
     <p:spTree>
@@ -21792,7 +23087,7 @@
 </p:sld>
 </file>
 
-<file path=ppt/slides/slide12.xml><?xml version="1.0" encoding="utf-8"?>
+<file path=ppt/slides/slide15.xml><?xml version="1.0" encoding="utf-8"?>
 <p:sld xmlns:a="http://schemas.openxmlformats.org/drawingml/2006/main" xmlns:r="http://schemas.openxmlformats.org/officeDocument/2006/relationships" xmlns:p="http://schemas.openxmlformats.org/presentationml/2006/main">
   <p:cSld>
     <p:spTree>
@@ -21968,7 +23263,7 @@
 </p:sld>
 </file>
 
-<file path=ppt/slides/slide13.xml><?xml version="1.0" encoding="utf-8"?>
+<file path=ppt/slides/slide16.xml><?xml version="1.0" encoding="utf-8"?>
 <p:sld xmlns:a="http://schemas.openxmlformats.org/drawingml/2006/main" xmlns:r="http://schemas.openxmlformats.org/officeDocument/2006/relationships" xmlns:p="http://schemas.openxmlformats.org/presentationml/2006/main">
   <p:cSld>
     <p:spTree>
@@ -22082,7 +23377,7 @@
 </p:sld>
 </file>
 
-<file path=ppt/slides/slide14.xml><?xml version="1.0" encoding="utf-8"?>
+<file path=ppt/slides/slide17.xml><?xml version="1.0" encoding="utf-8"?>
 <p:sld xmlns:a="http://schemas.openxmlformats.org/drawingml/2006/main" xmlns:r="http://schemas.openxmlformats.org/officeDocument/2006/relationships" xmlns:p="http://schemas.openxmlformats.org/presentationml/2006/main">
   <p:cSld>
     <p:spTree>
@@ -22140,7 +23435,7 @@
 </p:sld>
 </file>
 
-<file path=ppt/slides/slide15.xml><?xml version="1.0" encoding="utf-8"?>
+<file path=ppt/slides/slide18.xml><?xml version="1.0" encoding="utf-8"?>
 <p:sld xmlns:a="http://schemas.openxmlformats.org/drawingml/2006/main" xmlns:r="http://schemas.openxmlformats.org/officeDocument/2006/relationships" xmlns:p="http://schemas.openxmlformats.org/presentationml/2006/main">
   <p:cSld>
     <p:spTree>
@@ -22198,7 +23493,7 @@
 </p:sld>
 </file>
 
-<file path=ppt/slides/slide16.xml><?xml version="1.0" encoding="utf-8"?>
+<file path=ppt/slides/slide19.xml><?xml version="1.0" encoding="utf-8"?>
 <p:sld xmlns:a="http://schemas.openxmlformats.org/drawingml/2006/main" xmlns:r="http://schemas.openxmlformats.org/officeDocument/2006/relationships" xmlns:p="http://schemas.openxmlformats.org/presentationml/2006/main">
   <p:cSld>
     <p:spTree>
@@ -22262,7 +23557,223 @@
 </p:sld>
 </file>
 
-<file path=ppt/slides/slide17.xml><?xml version="1.0" encoding="utf-8"?>
+<file path=ppt/slides/slide2.xml><?xml version="1.0" encoding="utf-8"?>
+<p:sld xmlns:a="http://schemas.openxmlformats.org/drawingml/2006/main" xmlns:r="http://schemas.openxmlformats.org/officeDocument/2006/relationships" xmlns:p="http://schemas.openxmlformats.org/presentationml/2006/main">
+  <p:cSld>
+    <p:spTree>
+      <p:nvGrpSpPr>
+        <p:cNvPr id="1" name=""/>
+        <p:cNvGrpSpPr/>
+        <p:nvPr/>
+      </p:nvGrpSpPr>
+      <p:grpSpPr>
+        <a:xfrm>
+          <a:off x="0" y="0"/>
+          <a:ext cx="0" cy="0"/>
+          <a:chOff x="0" y="0"/>
+          <a:chExt cx="0" cy="0"/>
+        </a:xfrm>
+      </p:grpSpPr>
+      <p:sp>
+        <p:nvSpPr>
+          <p:cNvPr id="4" name="Title 3">
+            <a:extLst>
+              <a:ext uri="{FF2B5EF4-FFF2-40B4-BE49-F238E27FC236}">
+                <a16:creationId xmlns:a16="http://schemas.microsoft.com/office/drawing/2014/main" id="{B1BD08D1-A20C-8824-49BF-4AD31207C703}"/>
+              </a:ext>
+            </a:extLst>
+          </p:cNvPr>
+          <p:cNvSpPr>
+            <a:spLocks noGrp="1"/>
+          </p:cNvSpPr>
+          <p:nvPr>
+            <p:ph type="title"/>
+          </p:nvPr>
+        </p:nvSpPr>
+        <p:spPr/>
+        <p:txBody>
+          <a:bodyPr/>
+          <a:lstStyle/>
+          <a:p>
+            <a:r>
+              <a:rPr lang="en-US" dirty="0"/>
+              <a:t>Overview</a:t>
+            </a:r>
+          </a:p>
+        </p:txBody>
+      </p:sp>
+      <p:sp>
+        <p:nvSpPr>
+          <p:cNvPr id="7" name="Text Placeholder 6">
+            <a:extLst>
+              <a:ext uri="{FF2B5EF4-FFF2-40B4-BE49-F238E27FC236}">
+                <a16:creationId xmlns:a16="http://schemas.microsoft.com/office/drawing/2014/main" id="{B469FF13-3531-629D-F396-B0DEF3786080}"/>
+              </a:ext>
+            </a:extLst>
+          </p:cNvPr>
+          <p:cNvSpPr>
+            <a:spLocks noGrp="1"/>
+          </p:cNvSpPr>
+          <p:nvPr>
+            <p:ph type="body" idx="1"/>
+          </p:nvPr>
+        </p:nvSpPr>
+        <p:spPr/>
+        <p:txBody>
+          <a:bodyPr/>
+          <a:lstStyle/>
+          <a:p>
+            <a:r>
+              <a:rPr lang="en-US" dirty="0"/>
+              <a:t>About the Dataset</a:t>
+            </a:r>
+          </a:p>
+        </p:txBody>
+      </p:sp>
+      <p:sp>
+        <p:nvSpPr>
+          <p:cNvPr id="5" name="Content Placeholder 4">
+            <a:extLst>
+              <a:ext uri="{FF2B5EF4-FFF2-40B4-BE49-F238E27FC236}">
+                <a16:creationId xmlns:a16="http://schemas.microsoft.com/office/drawing/2014/main" id="{24CF210F-1633-099E-EDC2-40945E14CCB4}"/>
+              </a:ext>
+            </a:extLst>
+          </p:cNvPr>
+          <p:cNvSpPr>
+            <a:spLocks noGrp="1"/>
+          </p:cNvSpPr>
+          <p:nvPr>
+            <p:ph sz="half" idx="2"/>
+          </p:nvPr>
+        </p:nvSpPr>
+        <p:spPr/>
+        <p:txBody>
+          <a:bodyPr>
+            <a:normAutofit/>
+          </a:bodyPr>
+          <a:lstStyle/>
+          <a:p>
+            <a:r>
+              <a:rPr lang="en-US" b="1" dirty="0"/>
+              <a:t>Brazilian e-commerce marketplace</a:t>
+            </a:r>
+            <a:r>
+              <a:rPr lang="en-US" dirty="0"/>
+              <a:t>, data collected January 2017 – August 2018</a:t>
+            </a:r>
+          </a:p>
+          <a:p>
+            <a:r>
+              <a:rPr lang="en-US" dirty="0"/>
+              <a:t>11 tables | ~1.56 million rows</a:t>
+            </a:r>
+          </a:p>
+          <a:p>
+            <a:r>
+              <a:rPr lang="en-US" dirty="0"/>
+              <a:t>Orders, customers, sellers, products, payments, reviews, marketing leads</a:t>
+            </a:r>
+          </a:p>
+        </p:txBody>
+      </p:sp>
+      <p:sp>
+        <p:nvSpPr>
+          <p:cNvPr id="8" name="Text Placeholder 7">
+            <a:extLst>
+              <a:ext uri="{FF2B5EF4-FFF2-40B4-BE49-F238E27FC236}">
+                <a16:creationId xmlns:a16="http://schemas.microsoft.com/office/drawing/2014/main" id="{191E1A53-C0C9-652E-D895-46D5E3F7287E}"/>
+              </a:ext>
+            </a:extLst>
+          </p:cNvPr>
+          <p:cNvSpPr>
+            <a:spLocks noGrp="1"/>
+          </p:cNvSpPr>
+          <p:nvPr>
+            <p:ph type="body" sz="quarter" idx="3"/>
+          </p:nvPr>
+        </p:nvSpPr>
+        <p:spPr/>
+        <p:txBody>
+          <a:bodyPr/>
+          <a:lstStyle/>
+          <a:p>
+            <a:r>
+              <a:rPr lang="en-US" dirty="0"/>
+              <a:t>Goal</a:t>
+            </a:r>
+          </a:p>
+        </p:txBody>
+      </p:sp>
+      <p:sp>
+        <p:nvSpPr>
+          <p:cNvPr id="6" name="Content Placeholder 5">
+            <a:extLst>
+              <a:ext uri="{FF2B5EF4-FFF2-40B4-BE49-F238E27FC236}">
+                <a16:creationId xmlns:a16="http://schemas.microsoft.com/office/drawing/2014/main" id="{FD210212-EDE2-D982-0ED2-33A80E851551}"/>
+              </a:ext>
+            </a:extLst>
+          </p:cNvPr>
+          <p:cNvSpPr>
+            <a:spLocks noGrp="1"/>
+          </p:cNvSpPr>
+          <p:nvPr>
+            <p:ph sz="quarter" idx="4"/>
+          </p:nvPr>
+        </p:nvSpPr>
+        <p:spPr/>
+        <p:txBody>
+          <a:bodyPr>
+            <a:normAutofit/>
+          </a:bodyPr>
+          <a:lstStyle/>
+          <a:p>
+            <a:r>
+              <a:rPr lang="en-US" dirty="0"/>
+              <a:t>Analyze </a:t>
+            </a:r>
+            <a:r>
+              <a:rPr lang="en-US" b="1" dirty="0"/>
+              <a:t>sales performance and customer behavior</a:t>
+            </a:r>
+            <a:r>
+              <a:rPr lang="en-US" dirty="0"/>
+              <a:t> in a large e‑commerce marketplace</a:t>
+            </a:r>
+          </a:p>
+          <a:p>
+            <a:r>
+              <a:rPr lang="en-US" dirty="0"/>
+              <a:t>Jan: Sales &amp; Revenue (Q01–Q04)</a:t>
+            </a:r>
+          </a:p>
+          <a:p>
+            <a:r>
+              <a:rPr lang="en-US" dirty="0"/>
+              <a:t>Michael: Customer &amp; Delivery Behavior (Q05–Q08)</a:t>
+            </a:r>
+          </a:p>
+          <a:p>
+            <a:r>
+              <a:rPr lang="en-US" dirty="0"/>
+              <a:t>Vanessa: Seller &amp; Product Performance (Q09–Q12)</a:t>
+            </a:r>
+          </a:p>
+        </p:txBody>
+      </p:sp>
+    </p:spTree>
+    <p:extLst>
+      <p:ext uri="{BB962C8B-B14F-4D97-AF65-F5344CB8AC3E}">
+        <p14:creationId xmlns:p14="http://schemas.microsoft.com/office/powerpoint/2010/main" val="486327789"/>
+      </p:ext>
+    </p:extLst>
+  </p:cSld>
+  <p:clrMapOvr>
+    <a:masterClrMapping/>
+  </p:clrMapOvr>
+</p:sld>
+</file>
+
+<file path=ppt/slides/slide20.xml><?xml version="1.0" encoding="utf-8"?>
 <p:sld xmlns:a="http://schemas.openxmlformats.org/drawingml/2006/main" xmlns:r="http://schemas.openxmlformats.org/officeDocument/2006/relationships" xmlns:p="http://schemas.openxmlformats.org/presentationml/2006/main">
   <p:cSld>
     <p:spTree>
@@ -22320,7 +23831,7 @@
 </p:sld>
 </file>
 
-<file path=ppt/slides/slide18.xml><?xml version="1.0" encoding="utf-8"?>
+<file path=ppt/slides/slide21.xml><?xml version="1.0" encoding="utf-8"?>
 <p:sld xmlns:a="http://schemas.openxmlformats.org/drawingml/2006/main" xmlns:r="http://schemas.openxmlformats.org/officeDocument/2006/relationships" xmlns:p="http://schemas.openxmlformats.org/presentationml/2006/main">
   <p:cSld>
     <p:spTree>
@@ -22412,7 +23923,7 @@
 </p:sld>
 </file>
 
-<file path=ppt/slides/slide19.xml><?xml version="1.0" encoding="utf-8"?>
+<file path=ppt/slides/slide22.xml><?xml version="1.0" encoding="utf-8"?>
 <p:sld xmlns:a="http://schemas.openxmlformats.org/drawingml/2006/main" xmlns:r="http://schemas.openxmlformats.org/officeDocument/2006/relationships" xmlns:p="http://schemas.openxmlformats.org/presentationml/2006/main">
   <p:cSld>
     <p:spTree>
@@ -24153,219 +25664,7 @@
 </p:sld>
 </file>
 
-<file path=ppt/slides/slide2.xml><?xml version="1.0" encoding="utf-8"?>
-<p:sld xmlns:a="http://schemas.openxmlformats.org/drawingml/2006/main" xmlns:r="http://schemas.openxmlformats.org/officeDocument/2006/relationships" xmlns:p="http://schemas.openxmlformats.org/presentationml/2006/main">
-  <p:cSld>
-    <p:spTree>
-      <p:nvGrpSpPr>
-        <p:cNvPr id="1" name=""/>
-        <p:cNvGrpSpPr/>
-        <p:nvPr/>
-      </p:nvGrpSpPr>
-      <p:grpSpPr>
-        <a:xfrm>
-          <a:off x="0" y="0"/>
-          <a:ext cx="0" cy="0"/>
-          <a:chOff x="0" y="0"/>
-          <a:chExt cx="0" cy="0"/>
-        </a:xfrm>
-      </p:grpSpPr>
-      <p:sp>
-        <p:nvSpPr>
-          <p:cNvPr id="4" name="Title 3">
-            <a:extLst>
-              <a:ext uri="{FF2B5EF4-FFF2-40B4-BE49-F238E27FC236}">
-                <a16:creationId xmlns:a16="http://schemas.microsoft.com/office/drawing/2014/main" id="{B1BD08D1-A20C-8824-49BF-4AD31207C703}"/>
-              </a:ext>
-            </a:extLst>
-          </p:cNvPr>
-          <p:cNvSpPr>
-            <a:spLocks noGrp="1"/>
-          </p:cNvSpPr>
-          <p:nvPr>
-            <p:ph type="title"/>
-          </p:nvPr>
-        </p:nvSpPr>
-        <p:spPr/>
-        <p:txBody>
-          <a:bodyPr/>
-          <a:lstStyle/>
-          <a:p>
-            <a:r>
-              <a:rPr lang="en-US" dirty="0"/>
-              <a:t>Overview</a:t>
-            </a:r>
-          </a:p>
-        </p:txBody>
-      </p:sp>
-      <p:sp>
-        <p:nvSpPr>
-          <p:cNvPr id="7" name="Text Placeholder 6">
-            <a:extLst>
-              <a:ext uri="{FF2B5EF4-FFF2-40B4-BE49-F238E27FC236}">
-                <a16:creationId xmlns:a16="http://schemas.microsoft.com/office/drawing/2014/main" id="{B469FF13-3531-629D-F396-B0DEF3786080}"/>
-              </a:ext>
-            </a:extLst>
-          </p:cNvPr>
-          <p:cNvSpPr>
-            <a:spLocks noGrp="1"/>
-          </p:cNvSpPr>
-          <p:nvPr>
-            <p:ph type="body" idx="1"/>
-          </p:nvPr>
-        </p:nvSpPr>
-        <p:spPr/>
-        <p:txBody>
-          <a:bodyPr/>
-          <a:lstStyle/>
-          <a:p>
-            <a:r>
-              <a:rPr lang="en-US" dirty="0"/>
-              <a:t>About the Dataset</a:t>
-            </a:r>
-          </a:p>
-        </p:txBody>
-      </p:sp>
-      <p:sp>
-        <p:nvSpPr>
-          <p:cNvPr id="5" name="Content Placeholder 4">
-            <a:extLst>
-              <a:ext uri="{FF2B5EF4-FFF2-40B4-BE49-F238E27FC236}">
-                <a16:creationId xmlns:a16="http://schemas.microsoft.com/office/drawing/2014/main" id="{24CF210F-1633-099E-EDC2-40945E14CCB4}"/>
-              </a:ext>
-            </a:extLst>
-          </p:cNvPr>
-          <p:cNvSpPr>
-            <a:spLocks noGrp="1"/>
-          </p:cNvSpPr>
-          <p:nvPr>
-            <p:ph sz="half" idx="2"/>
-          </p:nvPr>
-        </p:nvSpPr>
-        <p:spPr/>
-        <p:txBody>
-          <a:bodyPr>
-            <a:normAutofit/>
-          </a:bodyPr>
-          <a:lstStyle/>
-          <a:p>
-            <a:r>
-              <a:rPr lang="en-US" dirty="0"/>
-              <a:t>Brazilian e-commerce marketplace, 2016–2018</a:t>
-            </a:r>
-          </a:p>
-          <a:p>
-            <a:r>
-              <a:rPr lang="en-US" dirty="0"/>
-              <a:t>11 tables | ~1.56 million rows</a:t>
-            </a:r>
-          </a:p>
-          <a:p>
-            <a:r>
-              <a:rPr lang="en-US" dirty="0"/>
-              <a:t>Orders, customers, sellers, products, payments, reviews, marketing leads</a:t>
-            </a:r>
-          </a:p>
-        </p:txBody>
-      </p:sp>
-      <p:sp>
-        <p:nvSpPr>
-          <p:cNvPr id="8" name="Text Placeholder 7">
-            <a:extLst>
-              <a:ext uri="{FF2B5EF4-FFF2-40B4-BE49-F238E27FC236}">
-                <a16:creationId xmlns:a16="http://schemas.microsoft.com/office/drawing/2014/main" id="{191E1A53-C0C9-652E-D895-46D5E3F7287E}"/>
-              </a:ext>
-            </a:extLst>
-          </p:cNvPr>
-          <p:cNvSpPr>
-            <a:spLocks noGrp="1"/>
-          </p:cNvSpPr>
-          <p:nvPr>
-            <p:ph type="body" sz="quarter" idx="3"/>
-          </p:nvPr>
-        </p:nvSpPr>
-        <p:spPr/>
-        <p:txBody>
-          <a:bodyPr/>
-          <a:lstStyle/>
-          <a:p>
-            <a:r>
-              <a:rPr lang="en-US" dirty="0"/>
-              <a:t>Goal</a:t>
-            </a:r>
-          </a:p>
-        </p:txBody>
-      </p:sp>
-      <p:sp>
-        <p:nvSpPr>
-          <p:cNvPr id="6" name="Content Placeholder 5">
-            <a:extLst>
-              <a:ext uri="{FF2B5EF4-FFF2-40B4-BE49-F238E27FC236}">
-                <a16:creationId xmlns:a16="http://schemas.microsoft.com/office/drawing/2014/main" id="{FD210212-EDE2-D982-0ED2-33A80E851551}"/>
-              </a:ext>
-            </a:extLst>
-          </p:cNvPr>
-          <p:cNvSpPr>
-            <a:spLocks noGrp="1"/>
-          </p:cNvSpPr>
-          <p:nvPr>
-            <p:ph sz="quarter" idx="4"/>
-          </p:nvPr>
-        </p:nvSpPr>
-        <p:spPr/>
-        <p:txBody>
-          <a:bodyPr>
-            <a:normAutofit/>
-          </a:bodyPr>
-          <a:lstStyle/>
-          <a:p>
-            <a:r>
-              <a:rPr lang="en-US" dirty="0"/>
-              <a:t>Analyze Sales performance and customer behavior in a </a:t>
-            </a:r>
-            <a:r>
-              <a:rPr lang="en-US"/>
-              <a:t>large e‑commerce </a:t>
-            </a:r>
-            <a:r>
-              <a:rPr lang="en-US" dirty="0"/>
-              <a:t>marketplace</a:t>
-            </a:r>
-          </a:p>
-          <a:p>
-            <a:r>
-              <a:rPr lang="en-US" dirty="0"/>
-              <a:t>Jan: Sales &amp; Revenue (Q01–Q04)</a:t>
-            </a:r>
-          </a:p>
-          <a:p>
-            <a:r>
-              <a:rPr lang="en-US" dirty="0"/>
-              <a:t>Michael: Customer &amp; Delivery Behavior (Q05–Q08)</a:t>
-            </a:r>
-          </a:p>
-          <a:p>
-            <a:r>
-              <a:rPr lang="en-US" dirty="0"/>
-              <a:t>Vanessa: Seller &amp; Product Performance (Q09–Q12)</a:t>
-            </a:r>
-          </a:p>
-        </p:txBody>
-      </p:sp>
-    </p:spTree>
-    <p:extLst>
-      <p:ext uri="{BB962C8B-B14F-4D97-AF65-F5344CB8AC3E}">
-        <p14:creationId xmlns:p14="http://schemas.microsoft.com/office/powerpoint/2010/main" val="486327789"/>
-      </p:ext>
-    </p:extLst>
-  </p:cSld>
-  <p:clrMapOvr>
-    <a:masterClrMapping/>
-  </p:clrMapOvr>
-</p:sld>
-</file>
-
-<file path=ppt/slides/slide20.xml><?xml version="1.0" encoding="utf-8"?>
+<file path=ppt/slides/slide23.xml><?xml version="1.0" encoding="utf-8"?>
 <p:sld xmlns:a="http://schemas.openxmlformats.org/drawingml/2006/main" xmlns:r="http://schemas.openxmlformats.org/officeDocument/2006/relationships" xmlns:p="http://schemas.openxmlformats.org/presentationml/2006/main">
   <p:cSld>
     <p:spTree>
@@ -24478,7 +25777,7 @@
 </p:sld>
 </file>
 
-<file path=ppt/slides/slide21.xml><?xml version="1.0" encoding="utf-8"?>
+<file path=ppt/slides/slide24.xml><?xml version="1.0" encoding="utf-8"?>
 <p:sld xmlns:a="http://schemas.openxmlformats.org/drawingml/2006/main" xmlns:r="http://schemas.openxmlformats.org/officeDocument/2006/relationships" xmlns:p="http://schemas.openxmlformats.org/presentationml/2006/main">
   <p:cSld>
     <p:spTree>
@@ -24562,6 +25861,312 @@
 </file>
 
 <file path=ppt/slides/slide3.xml><?xml version="1.0" encoding="utf-8"?>
+<p:sld xmlns:a="http://schemas.openxmlformats.org/drawingml/2006/main" xmlns:r="http://schemas.openxmlformats.org/officeDocument/2006/relationships" xmlns:p="http://schemas.openxmlformats.org/presentationml/2006/main">
+  <p:cSld>
+    <p:spTree>
+      <p:nvGrpSpPr>
+        <p:cNvPr id="1" name=""/>
+        <p:cNvGrpSpPr/>
+        <p:nvPr/>
+      </p:nvGrpSpPr>
+      <p:grpSpPr>
+        <a:xfrm>
+          <a:off x="0" y="0"/>
+          <a:ext cx="0" cy="0"/>
+          <a:chOff x="0" y="0"/>
+          <a:chExt cx="0" cy="0"/>
+        </a:xfrm>
+      </p:grpSpPr>
+      <p:sp>
+        <p:nvSpPr>
+          <p:cNvPr id="2" name="Title 1">
+            <a:extLst>
+              <a:ext uri="{FF2B5EF4-FFF2-40B4-BE49-F238E27FC236}">
+                <a16:creationId xmlns:a16="http://schemas.microsoft.com/office/drawing/2014/main" id="{210C8AC0-62E9-57DD-DC84-99F7E9D64E63}"/>
+              </a:ext>
+            </a:extLst>
+          </p:cNvPr>
+          <p:cNvSpPr>
+            <a:spLocks noGrp="1"/>
+          </p:cNvSpPr>
+          <p:nvPr>
+            <p:ph type="title"/>
+          </p:nvPr>
+        </p:nvSpPr>
+        <p:spPr/>
+        <p:txBody>
+          <a:bodyPr/>
+          <a:lstStyle/>
+          <a:p>
+            <a:r>
+              <a:rPr lang="it-IT" dirty="0"/>
+              <a:t>Data Pipeline: SQLite → SQL Server</a:t>
+            </a:r>
+            <a:endParaRPr lang="en-US" dirty="0"/>
+          </a:p>
+        </p:txBody>
+      </p:sp>
+      <p:sp>
+        <p:nvSpPr>
+          <p:cNvPr id="3" name="Content Placeholder 2">
+            <a:extLst>
+              <a:ext uri="{FF2B5EF4-FFF2-40B4-BE49-F238E27FC236}">
+                <a16:creationId xmlns:a16="http://schemas.microsoft.com/office/drawing/2014/main" id="{A92CA810-54C5-D62B-F075-194CB2D39CB3}"/>
+              </a:ext>
+            </a:extLst>
+          </p:cNvPr>
+          <p:cNvSpPr>
+            <a:spLocks noGrp="1"/>
+          </p:cNvSpPr>
+          <p:nvPr>
+            <p:ph idx="1"/>
+          </p:nvPr>
+        </p:nvSpPr>
+        <p:spPr/>
+        <p:txBody>
+          <a:bodyPr>
+            <a:normAutofit lnSpcReduction="10000"/>
+          </a:bodyPr>
+          <a:lstStyle/>
+          <a:p>
+            <a:r>
+              <a:rPr lang="en-US" dirty="0"/>
+              <a:t>Source: single-file </a:t>
+            </a:r>
+            <a:r>
+              <a:rPr lang="en-US" b="1" dirty="0"/>
+              <a:t>SQLite</a:t>
+            </a:r>
+            <a:r>
+              <a:rPr lang="en-US" dirty="0"/>
+              <a:t> database (110 MB)</a:t>
+            </a:r>
+          </a:p>
+          <a:p>
+            <a:r>
+              <a:rPr lang="en-US" b="1" dirty="0"/>
+              <a:t>Python script:</a:t>
+            </a:r>
+          </a:p>
+          <a:p>
+            <a:pPr lvl="1"/>
+            <a:r>
+              <a:rPr lang="cs-CZ" dirty="0"/>
+              <a:t>P</a:t>
+            </a:r>
+            <a:r>
+              <a:rPr lang="en-US" dirty="0" err="1"/>
+              <a:t>arsed</a:t>
+            </a:r>
+            <a:r>
+              <a:rPr lang="en-US" dirty="0"/>
+              <a:t> the SQLite data</a:t>
+            </a:r>
+          </a:p>
+          <a:p>
+            <a:pPr lvl="1"/>
+            <a:r>
+              <a:rPr lang="cs-CZ" dirty="0"/>
+              <a:t>G</a:t>
+            </a:r>
+            <a:r>
+              <a:rPr lang="en-US" dirty="0" err="1"/>
+              <a:t>enerated</a:t>
+            </a:r>
+            <a:r>
+              <a:rPr lang="en-US" dirty="0"/>
+              <a:t> SQL Server-compatible INSERT scripts for each entity</a:t>
+            </a:r>
+          </a:p>
+          <a:p>
+            <a:pPr lvl="1"/>
+            <a:r>
+              <a:rPr lang="cs-CZ" dirty="0"/>
+              <a:t>H</a:t>
+            </a:r>
+            <a:r>
+              <a:rPr lang="en-US" dirty="0" err="1"/>
+              <a:t>andled</a:t>
+            </a:r>
+            <a:r>
+              <a:rPr lang="en-US" dirty="0"/>
+              <a:t> </a:t>
+            </a:r>
+            <a:r>
+              <a:rPr lang="en-US" b="1" dirty="0"/>
+              <a:t>type conversion</a:t>
+            </a:r>
+            <a:r>
+              <a:rPr lang="en-US" dirty="0"/>
+              <a:t>, scientific notation, FK ordering, and </a:t>
+            </a:r>
+            <a:r>
+              <a:rPr lang="en-US" b="1" dirty="0"/>
+              <a:t>data validation</a:t>
+            </a:r>
+          </a:p>
+          <a:p>
+            <a:r>
+              <a:rPr lang="en-US" dirty="0"/>
+              <a:t>Scripts executed in SQL Server Management Studio to create and populate the database on </a:t>
+            </a:r>
+            <a:r>
+              <a:rPr lang="en-US" b="1" dirty="0"/>
+              <a:t>local SQL Server</a:t>
+            </a:r>
+          </a:p>
+          <a:p>
+            <a:r>
+              <a:rPr lang="en-US" dirty="0"/>
+              <a:t>Database exported as a </a:t>
+            </a:r>
+            <a:r>
+              <a:rPr lang="en-US" b="1" dirty="0"/>
+              <a:t>.</a:t>
+            </a:r>
+            <a:r>
+              <a:rPr lang="en-US" b="1" dirty="0" err="1"/>
+              <a:t>bacpac</a:t>
+            </a:r>
+            <a:r>
+              <a:rPr lang="en-US" dirty="0"/>
+              <a:t> file and uploaded to </a:t>
+            </a:r>
+            <a:r>
+              <a:rPr lang="en-US" b="1" dirty="0"/>
+              <a:t>Azure SQL</a:t>
+            </a:r>
+            <a:r>
+              <a:rPr lang="en-US" dirty="0"/>
+              <a:t> for team access</a:t>
+            </a:r>
+          </a:p>
+          <a:p>
+            <a:r>
+              <a:rPr lang="en-US" dirty="0"/>
+              <a:t>SQL Server database schema </a:t>
+            </a:r>
+            <a:r>
+              <a:rPr lang="cs-CZ" b="1" dirty="0" err="1"/>
+              <a:t>verified</a:t>
+            </a:r>
+            <a:r>
+              <a:rPr lang="en-US" dirty="0"/>
+              <a:t> via an SQL script</a:t>
+            </a:r>
+            <a:endParaRPr lang="cs-CZ" dirty="0"/>
+          </a:p>
+          <a:p>
+            <a:pPr lvl="1"/>
+            <a:r>
+              <a:rPr lang="cs-CZ" dirty="0" err="1"/>
+              <a:t>Verified</a:t>
+            </a:r>
+            <a:r>
+              <a:rPr lang="cs-CZ" dirty="0"/>
+              <a:t> data profile and </a:t>
+            </a:r>
+            <a:r>
+              <a:rPr lang="cs-CZ" dirty="0" err="1"/>
+              <a:t>types</a:t>
+            </a:r>
+            <a:r>
+              <a:rPr lang="cs-CZ" dirty="0"/>
+              <a:t> (sanity </a:t>
+            </a:r>
+            <a:r>
+              <a:rPr lang="cs-CZ" dirty="0" err="1"/>
+              <a:t>check</a:t>
+            </a:r>
+            <a:r>
+              <a:rPr lang="cs-CZ" dirty="0"/>
+              <a:t>)</a:t>
+            </a:r>
+          </a:p>
+          <a:p>
+            <a:pPr lvl="1"/>
+            <a:r>
+              <a:rPr lang="cs-CZ" dirty="0" err="1"/>
+              <a:t>Compared</a:t>
+            </a:r>
+            <a:r>
+              <a:rPr lang="cs-CZ" dirty="0"/>
+              <a:t> </a:t>
+            </a:r>
+            <a:r>
+              <a:rPr lang="cs-CZ" dirty="0" err="1"/>
+              <a:t>the</a:t>
+            </a:r>
+            <a:r>
+              <a:rPr lang="cs-CZ" dirty="0"/>
+              <a:t> </a:t>
+            </a:r>
+            <a:r>
+              <a:rPr lang="cs-CZ" dirty="0" err="1"/>
+              <a:t>result</a:t>
+            </a:r>
+            <a:r>
+              <a:rPr lang="cs-CZ" dirty="0"/>
+              <a:t> to </a:t>
+            </a:r>
+            <a:r>
+              <a:rPr lang="cs-CZ" dirty="0" err="1"/>
+              <a:t>an</a:t>
+            </a:r>
+            <a:r>
+              <a:rPr lang="cs-CZ" dirty="0"/>
+              <a:t> </a:t>
+            </a:r>
+            <a:r>
+              <a:rPr lang="cs-CZ" dirty="0" err="1"/>
+              <a:t>SQLite</a:t>
+            </a:r>
+            <a:r>
+              <a:rPr lang="cs-CZ" dirty="0"/>
+              <a:t> script ran on </a:t>
+            </a:r>
+            <a:r>
+              <a:rPr lang="cs-CZ" dirty="0" err="1"/>
+              <a:t>the</a:t>
+            </a:r>
+            <a:r>
+              <a:rPr lang="cs-CZ" dirty="0"/>
+              <a:t> </a:t>
+            </a:r>
+            <a:r>
+              <a:rPr lang="cs-CZ" dirty="0" err="1"/>
+              <a:t>original</a:t>
+            </a:r>
+            <a:r>
+              <a:rPr lang="cs-CZ" dirty="0"/>
+              <a:t> </a:t>
+            </a:r>
+            <a:r>
+              <a:rPr lang="cs-CZ" dirty="0" err="1"/>
+              <a:t>SQLite</a:t>
+            </a:r>
+            <a:r>
+              <a:rPr lang="cs-CZ" dirty="0"/>
+              <a:t> database</a:t>
+            </a:r>
+            <a:endParaRPr lang="en-US" dirty="0"/>
+          </a:p>
+        </p:txBody>
+      </p:sp>
+    </p:spTree>
+    <p:extLst>
+      <p:ext uri="{BB962C8B-B14F-4D97-AF65-F5344CB8AC3E}">
+        <p14:creationId xmlns:p14="http://schemas.microsoft.com/office/powerpoint/2010/main" val="3352467750"/>
+      </p:ext>
+    </p:extLst>
+  </p:cSld>
+  <p:clrMapOvr>
+    <a:masterClrMapping/>
+  </p:clrMapOvr>
+</p:sld>
+</file>
+
+<file path=ppt/slides/slide4.xml><?xml version="1.0" encoding="utf-8"?>
 <p:sld xmlns:a="http://schemas.openxmlformats.org/drawingml/2006/main" xmlns:r="http://schemas.openxmlformats.org/officeDocument/2006/relationships" xmlns:p="http://schemas.openxmlformats.org/presentationml/2006/main">
   <p:cSld>
     <p:bg>
@@ -24891,7 +26496,7 @@
 </p:sld>
 </file>
 
-<file path=ppt/slides/slide4.xml><?xml version="1.0" encoding="utf-8"?>
+<file path=ppt/slides/slide5.xml><?xml version="1.0" encoding="utf-8"?>
 <p:sld xmlns:a="http://schemas.openxmlformats.org/drawingml/2006/main" xmlns:r="http://schemas.openxmlformats.org/officeDocument/2006/relationships" xmlns:p="http://schemas.openxmlformats.org/presentationml/2006/main">
   <p:cSld>
     <p:spTree>
@@ -24977,7 +26582,7 @@
 </p:sld>
 </file>
 
-<file path=ppt/slides/slide5.xml><?xml version="1.0" encoding="utf-8"?>
+<file path=ppt/slides/slide6.xml><?xml version="1.0" encoding="utf-8"?>
 <p:sld xmlns:a="http://schemas.openxmlformats.org/drawingml/2006/main" xmlns:r="http://schemas.openxmlformats.org/officeDocument/2006/relationships" xmlns:p="http://schemas.openxmlformats.org/presentationml/2006/main">
   <p:cSld>
     <p:spTree>
@@ -25017,7 +26622,7 @@
           <a:p>
             <a:r>
               <a:rPr lang="en-US" dirty="0"/>
-              <a:t>Revenue Trends &amp; Payment Methods</a:t>
+              <a:t>Revenue Trends</a:t>
             </a:r>
           </a:p>
         </p:txBody>
@@ -25045,7 +26650,7 @@
           <a:p>
             <a:r>
               <a:rPr lang="en-US" dirty="0"/>
-              <a:t>Q1</a:t>
+              <a:t>Q1 (+ View)</a:t>
             </a:r>
           </a:p>
         </p:txBody>
@@ -25072,44 +26677,140 @@
           <a:lstStyle/>
           <a:p>
             <a:r>
-              <a:rPr lang="en-US" dirty="0"/>
-              <a:t>Orders grew 9x from January 2017 (~750) to January 2018 (~7,069)</a:t>
+              <a:rPr lang="en-US" b="1" dirty="0"/>
+              <a:t>Revenue grew 9x</a:t>
             </a:r>
-          </a:p>
-          <a:p>
             <a:r>
               <a:rPr lang="en-US" dirty="0"/>
-              <a:t>Nov 2017 revenue spike: R$1.15M</a:t>
+              <a:t> from January 2017</a:t>
             </a:r>
             <a:br>
               <a:rPr lang="en-US" dirty="0"/>
             </a:br>
             <a:r>
               <a:rPr lang="en-US" dirty="0"/>
-              <a:t>— Black Friday effect</a:t>
-            </a:r>
-          </a:p>
-          <a:p>
-            <a:r>
-              <a:rPr lang="en-US" dirty="0"/>
-              <a:t>Dataset ends Aug 2018</a:t>
+              <a:t>to peak in November 2017</a:t>
             </a:r>
             <a:br>
               <a:rPr lang="en-US" dirty="0"/>
             </a:br>
             <a:r>
               <a:rPr lang="en-US" dirty="0"/>
-              <a:t>— not a revenue decline</a:t>
+              <a:t>— potential seasonality</a:t>
+            </a:r>
+            <a:br>
+              <a:rPr lang="en-US" dirty="0"/>
+            </a:br>
+            <a:r>
+              <a:rPr lang="en-US" dirty="0"/>
+              <a:t>(Black Friday effect)</a:t>
+            </a:r>
+          </a:p>
+          <a:p>
+            <a:r>
+              <a:rPr lang="en-US" b="1" dirty="0"/>
+              <a:t>Average</a:t>
+            </a:r>
+            <a:r>
+              <a:rPr lang="en-US" dirty="0"/>
+              <a:t> monthly growth was 15%</a:t>
+            </a:r>
+          </a:p>
+          <a:p>
+            <a:r>
+              <a:rPr lang="en-US" dirty="0"/>
+              <a:t>Revenue </a:t>
+            </a:r>
+            <a:r>
+              <a:rPr lang="en-US" b="1" dirty="0"/>
+              <a:t>plateaued</a:t>
+            </a:r>
+            <a:r>
+              <a:rPr lang="en-US" dirty="0"/>
+              <a:t> in 2018 around R$1M</a:t>
             </a:r>
           </a:p>
         </p:txBody>
       </p:sp>
+      <p:pic>
+        <p:nvPicPr>
+          <p:cNvPr id="12" name="Content Placeholder 11">
+            <a:extLst>
+              <a:ext uri="{FF2B5EF4-FFF2-40B4-BE49-F238E27FC236}">
+                <a16:creationId xmlns:a16="http://schemas.microsoft.com/office/drawing/2014/main" id="{0B2F043B-34CA-9F4F-EFA4-BDF09EBAFF68}"/>
+              </a:ext>
+            </a:extLst>
+          </p:cNvPr>
+          <p:cNvPicPr>
+            <a:picLocks noGrp="1" noChangeAspect="1"/>
+          </p:cNvPicPr>
+          <p:nvPr>
+            <p:ph sz="quarter" idx="4"/>
+          </p:nvPr>
+        </p:nvPicPr>
+        <p:blipFill>
+          <a:blip r:embed="rId2">
+            <a:extLst>
+              <a:ext uri="{28A0092B-C50C-407E-A947-70E740481C1C}">
+                <a14:useLocalDpi xmlns:a14="http://schemas.microsoft.com/office/drawing/2010/main" val="0"/>
+              </a:ext>
+            </a:extLst>
+          </a:blip>
+          <a:srcRect/>
+          <a:stretch/>
+        </p:blipFill>
+        <p:spPr>
+          <a:xfrm>
+            <a:off x="5614315" y="2591116"/>
+            <a:ext cx="5553557" cy="3262792"/>
+          </a:xfrm>
+          <a:prstGeom prst="rect">
+            <a:avLst/>
+          </a:prstGeom>
+        </p:spPr>
+      </p:pic>
+    </p:spTree>
+    <p:extLst>
+      <p:ext uri="{BB962C8B-B14F-4D97-AF65-F5344CB8AC3E}">
+        <p14:creationId xmlns:p14="http://schemas.microsoft.com/office/powerpoint/2010/main" val="1094190350"/>
+      </p:ext>
+    </p:extLst>
+  </p:cSld>
+  <p:clrMapOvr>
+    <a:masterClrMapping/>
+  </p:clrMapOvr>
+</p:sld>
+</file>
+
+<file path=ppt/slides/slide7.xml><?xml version="1.0" encoding="utf-8"?>
+<p:sld xmlns:a="http://schemas.openxmlformats.org/drawingml/2006/main" xmlns:r="http://schemas.openxmlformats.org/officeDocument/2006/relationships" xmlns:p="http://schemas.openxmlformats.org/presentationml/2006/main">
+  <p:cSld>
+    <p:spTree>
+      <p:nvGrpSpPr>
+        <p:cNvPr id="1" name="">
+          <a:extLst>
+            <a:ext uri="{FF2B5EF4-FFF2-40B4-BE49-F238E27FC236}">
+              <a16:creationId xmlns:a16="http://schemas.microsoft.com/office/drawing/2014/main" id="{1CDF7E7E-E86F-BF34-4266-26DE5F24A3F5}"/>
+            </a:ext>
+          </a:extLst>
+        </p:cNvPr>
+        <p:cNvGrpSpPr/>
+        <p:nvPr/>
+      </p:nvGrpSpPr>
+      <p:grpSpPr>
+        <a:xfrm>
+          <a:off x="0" y="0"/>
+          <a:ext cx="0" cy="0"/>
+          <a:chOff x="0" y="0"/>
+          <a:chExt cx="0" cy="0"/>
+        </a:xfrm>
+      </p:grpSpPr>
       <p:sp>
         <p:nvSpPr>
-          <p:cNvPr id="10" name="Text Placeholder 9">
+          <p:cNvPr id="7" name="Title 6">
             <a:extLst>
               <a:ext uri="{FF2B5EF4-FFF2-40B4-BE49-F238E27FC236}">
-                <a16:creationId xmlns:a16="http://schemas.microsoft.com/office/drawing/2014/main" id="{E88F7E96-7FEC-1CBA-B922-1799F1C24513}"/>
+                <a16:creationId xmlns:a16="http://schemas.microsoft.com/office/drawing/2014/main" id="{B218C80C-155D-F089-E84F-73A4E80E3568}"/>
               </a:ext>
             </a:extLst>
           </p:cNvPr>
@@ -25117,7 +26818,35 @@
             <a:spLocks noGrp="1"/>
           </p:cNvSpPr>
           <p:nvPr>
-            <p:ph type="body" sz="quarter" idx="3"/>
+            <p:ph type="title"/>
+          </p:nvPr>
+        </p:nvSpPr>
+        <p:spPr/>
+        <p:txBody>
+          <a:bodyPr/>
+          <a:lstStyle/>
+          <a:p>
+            <a:r>
+              <a:rPr lang="en-US" dirty="0"/>
+              <a:t>Payment Methods</a:t>
+            </a:r>
+          </a:p>
+        </p:txBody>
+      </p:sp>
+      <p:sp>
+        <p:nvSpPr>
+          <p:cNvPr id="8" name="Text Placeholder 7">
+            <a:extLst>
+              <a:ext uri="{FF2B5EF4-FFF2-40B4-BE49-F238E27FC236}">
+                <a16:creationId xmlns:a16="http://schemas.microsoft.com/office/drawing/2014/main" id="{F551A200-32D5-D819-B163-F3710DDDC013}"/>
+              </a:ext>
+            </a:extLst>
+          </p:cNvPr>
+          <p:cNvSpPr>
+            <a:spLocks noGrp="1"/>
+          </p:cNvSpPr>
+          <p:nvPr>
+            <p:ph type="body" idx="1"/>
           </p:nvPr>
         </p:nvSpPr>
         <p:spPr/>
@@ -25134,10 +26863,10 @@
       </p:sp>
       <p:sp>
         <p:nvSpPr>
-          <p:cNvPr id="11" name="Content Placeholder 10">
+          <p:cNvPr id="9" name="Content Placeholder 8">
             <a:extLst>
               <a:ext uri="{FF2B5EF4-FFF2-40B4-BE49-F238E27FC236}">
-                <a16:creationId xmlns:a16="http://schemas.microsoft.com/office/drawing/2014/main" id="{883DF136-3D88-B9A9-D241-011616964AF1}"/>
+                <a16:creationId xmlns:a16="http://schemas.microsoft.com/office/drawing/2014/main" id="{46929EB6-3647-FFAC-71AD-4ABFBB35A46C}"/>
               </a:ext>
             </a:extLst>
           </p:cNvPr>
@@ -25145,7 +26874,7 @@
             <a:spLocks noGrp="1"/>
           </p:cNvSpPr>
           <p:nvPr>
-            <p:ph sz="quarter" idx="4"/>
+            <p:ph sz="half" idx="2"/>
           </p:nvPr>
         </p:nvSpPr>
         <p:spPr/>
@@ -25154,32 +26883,81 @@
           <a:lstStyle/>
           <a:p>
             <a:r>
+              <a:rPr lang="en-US" b="1" dirty="0"/>
+              <a:t>Credit cards</a:t>
+            </a:r>
+            <a:r>
               <a:rPr lang="en-US" dirty="0"/>
-              <a:t>Credit card dominates — 76,505 orders, avg 3.5 installments</a:t>
+              <a:t> dominate</a:t>
+            </a:r>
+            <a:br>
+              <a:rPr lang="en-US" dirty="0"/>
+            </a:br>
+            <a:r>
+              <a:rPr lang="en-US" dirty="0"/>
+              <a:t>— CC purchases split to 3.5 installments on average, confirms that installment culture is important in Brazilian e-commerce</a:t>
             </a:r>
           </a:p>
           <a:p>
             <a:r>
-              <a:rPr lang="en-US" dirty="0" err="1"/>
+              <a:rPr lang="en-US" b="1" dirty="0" err="1"/>
               <a:t>Boleto</a:t>
             </a:r>
             <a:r>
               <a:rPr lang="en-US" dirty="0"/>
-              <a:t> (bank slip) second: 19,784 orders — no card required</a:t>
+              <a:t> (bank slip) second</a:t>
             </a:r>
-          </a:p>
-          <a:p>
+            <a:br>
+              <a:rPr lang="en-US" dirty="0"/>
+            </a:br>
             <a:r>
               <a:rPr lang="en-US" dirty="0"/>
-              <a:t>Installment culture is central to Brazilian e-commerce</a:t>
+              <a:t>— no card required</a:t>
             </a:r>
           </a:p>
         </p:txBody>
       </p:sp>
+      <p:pic>
+        <p:nvPicPr>
+          <p:cNvPr id="12" name="Content Placeholder 11">
+            <a:extLst>
+              <a:ext uri="{FF2B5EF4-FFF2-40B4-BE49-F238E27FC236}">
+                <a16:creationId xmlns:a16="http://schemas.microsoft.com/office/drawing/2014/main" id="{3323EC8F-035A-2D2E-C23B-14D40A5CB204}"/>
+              </a:ext>
+            </a:extLst>
+          </p:cNvPr>
+          <p:cNvPicPr>
+            <a:picLocks noGrp="1" noChangeAspect="1"/>
+          </p:cNvPicPr>
+          <p:nvPr>
+            <p:ph sz="quarter" idx="4"/>
+          </p:nvPr>
+        </p:nvPicPr>
+        <p:blipFill>
+          <a:blip r:embed="rId2">
+            <a:extLst>
+              <a:ext uri="{28A0092B-C50C-407E-A947-70E740481C1C}">
+                <a14:useLocalDpi xmlns:a14="http://schemas.microsoft.com/office/drawing/2010/main" val="0"/>
+              </a:ext>
+            </a:extLst>
+          </a:blip>
+          <a:srcRect/>
+          <a:stretch/>
+        </p:blipFill>
+        <p:spPr>
+          <a:xfrm>
+            <a:off x="5884164" y="2591116"/>
+            <a:ext cx="5550408" cy="3211439"/>
+          </a:xfrm>
+          <a:prstGeom prst="rect">
+            <a:avLst/>
+          </a:prstGeom>
+        </p:spPr>
+      </p:pic>
     </p:spTree>
     <p:extLst>
       <p:ext uri="{BB962C8B-B14F-4D97-AF65-F5344CB8AC3E}">
-        <p14:creationId xmlns:p14="http://schemas.microsoft.com/office/powerpoint/2010/main" val="1094190350"/>
+        <p14:creationId xmlns:p14="http://schemas.microsoft.com/office/powerpoint/2010/main" val="1662100909"/>
       </p:ext>
     </p:extLst>
   </p:cSld>
@@ -25189,7 +26967,7 @@
 </p:sld>
 </file>
 
-<file path=ppt/slides/slide6.xml><?xml version="1.0" encoding="utf-8"?>
+<file path=ppt/slides/slide8.xml><?xml version="1.0" encoding="utf-8"?>
 <p:sld xmlns:a="http://schemas.openxmlformats.org/drawingml/2006/main" xmlns:r="http://schemas.openxmlformats.org/officeDocument/2006/relationships" xmlns:p="http://schemas.openxmlformats.org/presentationml/2006/main">
   <p:cSld>
     <p:spTree>
@@ -25229,7 +27007,7 @@
           <a:p>
             <a:r>
               <a:rPr lang="en-US" dirty="0"/>
-              <a:t>Order Value by State &amp; Top Categories</a:t>
+              <a:t>Order Value by State</a:t>
             </a:r>
           </a:p>
         </p:txBody>
@@ -25285,13 +27063,25 @@
           <a:p>
             <a:r>
               <a:rPr lang="en-US" dirty="0"/>
-              <a:t>Top 10 highest avg order value are all North/Northeast states</a:t>
+              <a:t>Top 10 </a:t>
+            </a:r>
+            <a:r>
+              <a:rPr lang="en-US" b="1" dirty="0"/>
+              <a:t>highest avg order</a:t>
+            </a:r>
+            <a:r>
+              <a:rPr lang="en-US" dirty="0"/>
+              <a:t> value are all North/Northeast states</a:t>
             </a:r>
           </a:p>
           <a:p>
             <a:r>
+              <a:rPr lang="en-US" b="1" dirty="0"/>
+              <a:t>Paraíba</a:t>
+            </a:r>
+            <a:r>
               <a:rPr lang="en-US" dirty="0"/>
-              <a:t>Paraíba highest: avg product</a:t>
+              <a:t> highest: average product value</a:t>
             </a:r>
             <a:br>
               <a:rPr lang="en-US" dirty="0"/>
@@ -25316,88 +27106,44 @@
           </a:p>
         </p:txBody>
       </p:sp>
-      <p:sp>
-        <p:nvSpPr>
-          <p:cNvPr id="5" name="Text Placeholder 4">
+      <p:pic>
+        <p:nvPicPr>
+          <p:cNvPr id="12" name="Content Placeholder 11">
             <a:extLst>
               <a:ext uri="{FF2B5EF4-FFF2-40B4-BE49-F238E27FC236}">
-                <a16:creationId xmlns:a16="http://schemas.microsoft.com/office/drawing/2014/main" id="{3A56FE17-6551-BC43-8051-A9768FD2BEF9}"/>
+                <a16:creationId xmlns:a16="http://schemas.microsoft.com/office/drawing/2014/main" id="{474A8FA5-08AC-5AD7-B425-4F3967258738}"/>
               </a:ext>
             </a:extLst>
           </p:cNvPr>
-          <p:cNvSpPr>
-            <a:spLocks noGrp="1"/>
-          </p:cNvSpPr>
-          <p:nvPr>
-            <p:ph type="body" sz="quarter" idx="3"/>
-          </p:nvPr>
-        </p:nvSpPr>
-        <p:spPr/>
-        <p:txBody>
-          <a:bodyPr/>
-          <a:lstStyle/>
-          <a:p>
-            <a:r>
-              <a:rPr lang="en-US" dirty="0"/>
-              <a:t>Q4</a:t>
-            </a:r>
-          </a:p>
-        </p:txBody>
-      </p:sp>
-      <p:sp>
-        <p:nvSpPr>
-          <p:cNvPr id="6" name="Content Placeholder 5">
-            <a:extLst>
-              <a:ext uri="{FF2B5EF4-FFF2-40B4-BE49-F238E27FC236}">
-                <a16:creationId xmlns:a16="http://schemas.microsoft.com/office/drawing/2014/main" id="{6E53D4E1-B327-658E-E128-6C1D5838E760}"/>
-              </a:ext>
-            </a:extLst>
-          </p:cNvPr>
-          <p:cNvSpPr>
-            <a:spLocks noGrp="1"/>
-          </p:cNvSpPr>
+          <p:cNvPicPr>
+            <a:picLocks noGrp="1" noChangeAspect="1"/>
+          </p:cNvPicPr>
           <p:nvPr>
             <p:ph sz="quarter" idx="4"/>
           </p:nvPr>
-        </p:nvSpPr>
-        <p:spPr/>
-        <p:txBody>
-          <a:bodyPr/>
-          <a:lstStyle/>
-          <a:p>
-            <a:r>
-              <a:rPr lang="en-US" dirty="0"/>
-              <a:t>Health &amp; beauty is #1 category by revenue: R$1.44M</a:t>
-            </a:r>
-          </a:p>
-          <a:p>
-            <a:r>
-              <a:rPr lang="en-US" dirty="0"/>
-              <a:t>Watches &amp; gifts #2</a:t>
-            </a:r>
-            <a:br>
-              <a:rPr lang="en-US" dirty="0"/>
-            </a:br>
-            <a:r>
-              <a:rPr lang="en-US" dirty="0"/>
-              <a:t>Bed/bath/table #3</a:t>
-            </a:r>
-            <a:br>
-              <a:rPr lang="en-US" dirty="0"/>
-            </a:br>
-            <a:r>
-              <a:rPr lang="en-US" dirty="0"/>
-              <a:t>— lifestyle over electronics</a:t>
-            </a:r>
-          </a:p>
-          <a:p>
-            <a:r>
-              <a:rPr lang="en-US" dirty="0"/>
-              <a:t>No single tech category in the top 10</a:t>
-            </a:r>
-          </a:p>
-        </p:txBody>
-      </p:sp>
+        </p:nvPicPr>
+        <p:blipFill>
+          <a:blip r:embed="rId2">
+            <a:extLst>
+              <a:ext uri="{28A0092B-C50C-407E-A947-70E740481C1C}">
+                <a14:useLocalDpi xmlns:a14="http://schemas.microsoft.com/office/drawing/2010/main" val="0"/>
+              </a:ext>
+            </a:extLst>
+          </a:blip>
+          <a:stretch>
+            <a:fillRect/>
+          </a:stretch>
+        </p:blipFill>
+        <p:spPr>
+          <a:xfrm>
+            <a:off x="5597188" y="548640"/>
+            <a:ext cx="6480512" cy="6080173"/>
+          </a:xfrm>
+          <a:prstGeom prst="rect">
+            <a:avLst/>
+          </a:prstGeom>
+        </p:spPr>
+      </p:pic>
     </p:spTree>
     <p:extLst>
       <p:ext uri="{BB962C8B-B14F-4D97-AF65-F5344CB8AC3E}">
@@ -25411,12 +27157,18 @@
 </p:sld>
 </file>
 
-<file path=ppt/slides/slide7.xml><?xml version="1.0" encoding="utf-8"?>
+<file path=ppt/slides/slide9.xml><?xml version="1.0" encoding="utf-8"?>
 <p:sld xmlns:a="http://schemas.openxmlformats.org/drawingml/2006/main" xmlns:r="http://schemas.openxmlformats.org/officeDocument/2006/relationships" xmlns:p="http://schemas.openxmlformats.org/presentationml/2006/main">
   <p:cSld>
     <p:spTree>
       <p:nvGrpSpPr>
-        <p:cNvPr id="1" name=""/>
+        <p:cNvPr id="1" name="">
+          <a:extLst>
+            <a:ext uri="{FF2B5EF4-FFF2-40B4-BE49-F238E27FC236}">
+              <a16:creationId xmlns:a16="http://schemas.microsoft.com/office/drawing/2014/main" id="{BE46EF7D-C4D3-1886-3EFD-250D00DC8260}"/>
+            </a:ext>
+          </a:extLst>
+        </p:cNvPr>
         <p:cNvGrpSpPr/>
         <p:nvPr/>
       </p:nvGrpSpPr>
@@ -25430,10 +27182,10 @@
       </p:grpSpPr>
       <p:sp>
         <p:nvSpPr>
-          <p:cNvPr id="7" name="Title 6">
+          <p:cNvPr id="2" name="Title 1">
             <a:extLst>
               <a:ext uri="{FF2B5EF4-FFF2-40B4-BE49-F238E27FC236}">
-                <a16:creationId xmlns:a16="http://schemas.microsoft.com/office/drawing/2014/main" id="{5BD0FE1D-EE1D-CBA0-440A-FC5AF9D86BAB}"/>
+                <a16:creationId xmlns:a16="http://schemas.microsoft.com/office/drawing/2014/main" id="{3187A426-DB27-7205-36CC-082B1FD1B064}"/>
               </a:ext>
             </a:extLst>
           </p:cNvPr>
@@ -25451,17 +27203,17 @@
           <a:p>
             <a:r>
               <a:rPr lang="en-US" dirty="0"/>
-              <a:t>Customer &amp; Delivery Behavior</a:t>
+              <a:t>Top 10 Categories by revenue</a:t>
             </a:r>
           </a:p>
         </p:txBody>
       </p:sp>
       <p:sp>
         <p:nvSpPr>
-          <p:cNvPr id="8" name="Text Placeholder 7">
+          <p:cNvPr id="3" name="Text Placeholder 2">
             <a:extLst>
               <a:ext uri="{FF2B5EF4-FFF2-40B4-BE49-F238E27FC236}">
-                <a16:creationId xmlns:a16="http://schemas.microsoft.com/office/drawing/2014/main" id="{B732DF04-1DE9-5BF9-6277-EF7309B44354}"/>
+                <a16:creationId xmlns:a16="http://schemas.microsoft.com/office/drawing/2014/main" id="{BE484BA7-BE6A-AD2F-4130-D5561A2CF76D}"/>
               </a:ext>
             </a:extLst>
           </p:cNvPr>
@@ -25479,93 +27231,7 @@
           <a:p>
             <a:r>
               <a:rPr lang="en-US" dirty="0"/>
-              <a:t>Michael Amaya | Q5–Q8</a:t>
-            </a:r>
-          </a:p>
-        </p:txBody>
-      </p:sp>
-    </p:spTree>
-    <p:extLst>
-      <p:ext uri="{BB962C8B-B14F-4D97-AF65-F5344CB8AC3E}">
-        <p14:creationId xmlns:p14="http://schemas.microsoft.com/office/powerpoint/2010/main" val="2306582258"/>
-      </p:ext>
-    </p:extLst>
-  </p:cSld>
-  <p:clrMapOvr>
-    <a:masterClrMapping/>
-  </p:clrMapOvr>
-</p:sld>
-</file>
-
-<file path=ppt/slides/slide8.xml><?xml version="1.0" encoding="utf-8"?>
-<p:sld xmlns:a="http://schemas.openxmlformats.org/drawingml/2006/main" xmlns:r="http://schemas.openxmlformats.org/officeDocument/2006/relationships" xmlns:p="http://schemas.openxmlformats.org/presentationml/2006/main">
-  <p:cSld>
-    <p:spTree>
-      <p:nvGrpSpPr>
-        <p:cNvPr id="1" name=""/>
-        <p:cNvGrpSpPr/>
-        <p:nvPr/>
-      </p:nvGrpSpPr>
-      <p:grpSpPr>
-        <a:xfrm>
-          <a:off x="0" y="0"/>
-          <a:ext cx="0" cy="0"/>
-          <a:chOff x="0" y="0"/>
-          <a:chExt cx="0" cy="0"/>
-        </a:xfrm>
-      </p:grpSpPr>
-      <p:sp>
-        <p:nvSpPr>
-          <p:cNvPr id="2" name="Title 1">
-            <a:extLst>
-              <a:ext uri="{FF2B5EF4-FFF2-40B4-BE49-F238E27FC236}">
-                <a16:creationId xmlns:a16="http://schemas.microsoft.com/office/drawing/2014/main" id="{A7D68A88-CD02-E230-F679-81946D1CFA58}"/>
-              </a:ext>
-            </a:extLst>
-          </p:cNvPr>
-          <p:cNvSpPr>
-            <a:spLocks noGrp="1"/>
-          </p:cNvSpPr>
-          <p:nvPr>
-            <p:ph type="title"/>
-          </p:nvPr>
-        </p:nvSpPr>
-        <p:spPr/>
-        <p:txBody>
-          <a:bodyPr/>
-          <a:lstStyle/>
-          <a:p>
-            <a:r>
-              <a:rPr lang="en-US" dirty="0"/>
-              <a:t>Delivery Time &amp; Customer Reviews</a:t>
-            </a:r>
-          </a:p>
-        </p:txBody>
-      </p:sp>
-      <p:sp>
-        <p:nvSpPr>
-          <p:cNvPr id="3" name="Text Placeholder 2">
-            <a:extLst>
-              <a:ext uri="{FF2B5EF4-FFF2-40B4-BE49-F238E27FC236}">
-                <a16:creationId xmlns:a16="http://schemas.microsoft.com/office/drawing/2014/main" id="{3B5E2797-167C-8E8B-B485-E71790C6E69C}"/>
-              </a:ext>
-            </a:extLst>
-          </p:cNvPr>
-          <p:cNvSpPr>
-            <a:spLocks noGrp="1"/>
-          </p:cNvSpPr>
-          <p:nvPr>
-            <p:ph type="body" idx="1"/>
-          </p:nvPr>
-        </p:nvSpPr>
-        <p:spPr/>
-        <p:txBody>
-          <a:bodyPr/>
-          <a:lstStyle/>
-          <a:p>
-            <a:r>
-              <a:rPr lang="en-US" dirty="0"/>
-              <a:t>Q5</a:t>
+              <a:t>Q4</a:t>
             </a:r>
           </a:p>
         </p:txBody>
@@ -25575,7 +27241,7 @@
           <p:cNvPr id="4" name="Content Placeholder 3">
             <a:extLst>
               <a:ext uri="{FF2B5EF4-FFF2-40B4-BE49-F238E27FC236}">
-                <a16:creationId xmlns:a16="http://schemas.microsoft.com/office/drawing/2014/main" id="{E72F4CE0-5F18-E6DB-A60B-95D50722AD46}"/>
+                <a16:creationId xmlns:a16="http://schemas.microsoft.com/office/drawing/2014/main" id="{8E24BD4E-FA52-85CE-FEEF-1C194D4384F3}"/>
               </a:ext>
             </a:extLst>
           </p:cNvPr>
@@ -25592,242 +27258,89 @@
           <a:lstStyle/>
           <a:p>
             <a:r>
+              <a:rPr lang="en-US" b="1" dirty="0"/>
+              <a:t>Health &amp; beauty</a:t>
+            </a:r>
+            <a:br>
+              <a:rPr lang="en-US" b="1" dirty="0"/>
+            </a:br>
+            <a:r>
               <a:rPr lang="en-US" dirty="0"/>
-              <a:t>TODO</a:t>
+              <a:t>is #1 category</a:t>
+            </a:r>
+            <a:br>
+              <a:rPr lang="en-US" dirty="0"/>
+            </a:br>
+            <a:r>
+              <a:rPr lang="en-US" dirty="0"/>
+              <a:t>by revenue: R$1.44M</a:t>
+            </a:r>
+          </a:p>
+          <a:p>
+            <a:r>
+              <a:rPr lang="en-US" b="1" dirty="0"/>
+              <a:t>Watches &amp; gifts</a:t>
+            </a:r>
+            <a:r>
+              <a:rPr lang="en-US" dirty="0"/>
+              <a:t> #2</a:t>
+            </a:r>
+            <a:br>
+              <a:rPr lang="en-US" dirty="0"/>
+            </a:br>
+            <a:r>
+              <a:rPr lang="en-US" b="1" dirty="0"/>
+              <a:t>Bed/bath/table</a:t>
+            </a:r>
+            <a:r>
+              <a:rPr lang="en-US" dirty="0"/>
+              <a:t> #3</a:t>
+            </a:r>
+            <a:br>
+              <a:rPr lang="en-US" dirty="0"/>
+            </a:br>
+            <a:r>
+              <a:rPr lang="en-US" dirty="0"/>
+              <a:t>— lifestyle over electronics</a:t>
             </a:r>
           </a:p>
         </p:txBody>
       </p:sp>
-      <p:sp>
-        <p:nvSpPr>
-          <p:cNvPr id="5" name="Text Placeholder 4">
+      <p:graphicFrame>
+        <p:nvGraphicFramePr>
+          <p:cNvPr id="13" name="Content Placeholder 12">
             <a:extLst>
               <a:ext uri="{FF2B5EF4-FFF2-40B4-BE49-F238E27FC236}">
-                <a16:creationId xmlns:a16="http://schemas.microsoft.com/office/drawing/2014/main" id="{5F0F5418-56A8-AEE0-C231-11278121AA9D}"/>
+                <a16:creationId xmlns:a16="http://schemas.microsoft.com/office/drawing/2014/main" id="{22898495-DC58-D4FC-1810-A0C7A14816AE}"/>
               </a:ext>
             </a:extLst>
           </p:cNvPr>
-          <p:cNvSpPr>
-            <a:spLocks noGrp="1"/>
-          </p:cNvSpPr>
-          <p:nvPr>
-            <p:ph type="body" sz="quarter" idx="3"/>
-          </p:nvPr>
-        </p:nvSpPr>
-        <p:spPr/>
-        <p:txBody>
-          <a:bodyPr/>
-          <a:lstStyle/>
-          <a:p>
-            <a:r>
-              <a:rPr lang="en-US" dirty="0"/>
-              <a:t>Q6</a:t>
-            </a:r>
-          </a:p>
-        </p:txBody>
-      </p:sp>
-      <p:sp>
-        <p:nvSpPr>
-          <p:cNvPr id="6" name="Content Placeholder 5">
-            <a:extLst>
-              <a:ext uri="{FF2B5EF4-FFF2-40B4-BE49-F238E27FC236}">
-                <a16:creationId xmlns:a16="http://schemas.microsoft.com/office/drawing/2014/main" id="{2EF9F847-1D46-C17E-05CA-C013095844DE}"/>
-              </a:ext>
-            </a:extLst>
-          </p:cNvPr>
-          <p:cNvSpPr>
-            <a:spLocks noGrp="1"/>
-          </p:cNvSpPr>
+          <p:cNvGraphicFramePr>
+            <a:graphicFrameLocks noGrp="1"/>
+          </p:cNvGraphicFramePr>
           <p:nvPr>
             <p:ph sz="quarter" idx="4"/>
+            <p:extLst>
+              <p:ext uri="{D42A27DB-BD31-4B8C-83A1-F6EECF244321}">
+                <p14:modId xmlns:p14="http://schemas.microsoft.com/office/powerpoint/2010/main" val="3837129516"/>
+              </p:ext>
+            </p:extLst>
           </p:nvPr>
-        </p:nvSpPr>
-        <p:spPr/>
-        <p:txBody>
-          <a:bodyPr/>
-          <a:lstStyle/>
-          <a:p>
-            <a:r>
-              <a:rPr lang="en-US" dirty="0"/>
-              <a:t>TODO</a:t>
-            </a:r>
-          </a:p>
-        </p:txBody>
-      </p:sp>
+        </p:nvGraphicFramePr>
+        <p:xfrm>
+          <a:off x="5292991" y="1773236"/>
+          <a:ext cx="5874881" cy="4614864"/>
+        </p:xfrm>
+        <a:graphic>
+          <a:graphicData uri="http://schemas.openxmlformats.org/drawingml/2006/chart">
+            <c:chart xmlns:c="http://schemas.openxmlformats.org/drawingml/2006/chart" xmlns:r="http://schemas.openxmlformats.org/officeDocument/2006/relationships" r:id="rId2"/>
+          </a:graphicData>
+        </a:graphic>
+      </p:graphicFrame>
     </p:spTree>
     <p:extLst>
       <p:ext uri="{BB962C8B-B14F-4D97-AF65-F5344CB8AC3E}">
-        <p14:creationId xmlns:p14="http://schemas.microsoft.com/office/powerpoint/2010/main" val="296423964"/>
-      </p:ext>
-    </p:extLst>
-  </p:cSld>
-  <p:clrMapOvr>
-    <a:masterClrMapping/>
-  </p:clrMapOvr>
-</p:sld>
-</file>
-
-<file path=ppt/slides/slide9.xml><?xml version="1.0" encoding="utf-8"?>
-<p:sld xmlns:a="http://schemas.openxmlformats.org/drawingml/2006/main" xmlns:r="http://schemas.openxmlformats.org/officeDocument/2006/relationships" xmlns:p="http://schemas.openxmlformats.org/presentationml/2006/main">
-  <p:cSld>
-    <p:spTree>
-      <p:nvGrpSpPr>
-        <p:cNvPr id="1" name=""/>
-        <p:cNvGrpSpPr/>
-        <p:nvPr/>
-      </p:nvGrpSpPr>
-      <p:grpSpPr>
-        <a:xfrm>
-          <a:off x="0" y="0"/>
-          <a:ext cx="0" cy="0"/>
-          <a:chOff x="0" y="0"/>
-          <a:chExt cx="0" cy="0"/>
-        </a:xfrm>
-      </p:grpSpPr>
-      <p:sp>
-        <p:nvSpPr>
-          <p:cNvPr id="2" name="Title 1">
-            <a:extLst>
-              <a:ext uri="{FF2B5EF4-FFF2-40B4-BE49-F238E27FC236}">
-                <a16:creationId xmlns:a16="http://schemas.microsoft.com/office/drawing/2014/main" id="{F9406560-2801-DF72-748D-88EA669A4A43}"/>
-              </a:ext>
-            </a:extLst>
-          </p:cNvPr>
-          <p:cNvSpPr>
-            <a:spLocks noGrp="1"/>
-          </p:cNvSpPr>
-          <p:nvPr>
-            <p:ph type="title"/>
-          </p:nvPr>
-        </p:nvSpPr>
-        <p:spPr/>
-        <p:txBody>
-          <a:bodyPr/>
-          <a:lstStyle/>
-          <a:p>
-            <a:r>
-              <a:rPr lang="en-US" dirty="0"/>
-              <a:t>Order Insights</a:t>
-            </a:r>
-          </a:p>
-        </p:txBody>
-      </p:sp>
-      <p:sp>
-        <p:nvSpPr>
-          <p:cNvPr id="3" name="Text Placeholder 2">
-            <a:extLst>
-              <a:ext uri="{FF2B5EF4-FFF2-40B4-BE49-F238E27FC236}">
-                <a16:creationId xmlns:a16="http://schemas.microsoft.com/office/drawing/2014/main" id="{BF3F6C46-87BA-B4DA-4388-4B98932BFA35}"/>
-              </a:ext>
-            </a:extLst>
-          </p:cNvPr>
-          <p:cNvSpPr>
-            <a:spLocks noGrp="1"/>
-          </p:cNvSpPr>
-          <p:nvPr>
-            <p:ph type="body" idx="1"/>
-          </p:nvPr>
-        </p:nvSpPr>
-        <p:spPr/>
-        <p:txBody>
-          <a:bodyPr/>
-          <a:lstStyle/>
-          <a:p>
-            <a:r>
-              <a:rPr lang="en-US" dirty="0"/>
-              <a:t>Q7</a:t>
-            </a:r>
-          </a:p>
-        </p:txBody>
-      </p:sp>
-      <p:sp>
-        <p:nvSpPr>
-          <p:cNvPr id="4" name="Content Placeholder 3">
-            <a:extLst>
-              <a:ext uri="{FF2B5EF4-FFF2-40B4-BE49-F238E27FC236}">
-                <a16:creationId xmlns:a16="http://schemas.microsoft.com/office/drawing/2014/main" id="{3A9AED6A-86DC-694C-C636-2D6D387EEB7D}"/>
-              </a:ext>
-            </a:extLst>
-          </p:cNvPr>
-          <p:cNvSpPr>
-            <a:spLocks noGrp="1"/>
-          </p:cNvSpPr>
-          <p:nvPr>
-            <p:ph sz="half" idx="2"/>
-          </p:nvPr>
-        </p:nvSpPr>
-        <p:spPr/>
-        <p:txBody>
-          <a:bodyPr/>
-          <a:lstStyle/>
-          <a:p>
-            <a:r>
-              <a:rPr lang="en-US" dirty="0"/>
-              <a:t>TODO</a:t>
-            </a:r>
-          </a:p>
-        </p:txBody>
-      </p:sp>
-      <p:sp>
-        <p:nvSpPr>
-          <p:cNvPr id="5" name="Text Placeholder 4">
-            <a:extLst>
-              <a:ext uri="{FF2B5EF4-FFF2-40B4-BE49-F238E27FC236}">
-                <a16:creationId xmlns:a16="http://schemas.microsoft.com/office/drawing/2014/main" id="{5AFE4C2F-7FAD-2628-CE31-14ADE076AB8B}"/>
-              </a:ext>
-            </a:extLst>
-          </p:cNvPr>
-          <p:cNvSpPr>
-            <a:spLocks noGrp="1"/>
-          </p:cNvSpPr>
-          <p:nvPr>
-            <p:ph type="body" sz="quarter" idx="3"/>
-          </p:nvPr>
-        </p:nvSpPr>
-        <p:spPr/>
-        <p:txBody>
-          <a:bodyPr/>
-          <a:lstStyle/>
-          <a:p>
-            <a:r>
-              <a:rPr lang="en-US" dirty="0"/>
-              <a:t>Q8</a:t>
-            </a:r>
-          </a:p>
-        </p:txBody>
-      </p:sp>
-      <p:sp>
-        <p:nvSpPr>
-          <p:cNvPr id="6" name="Content Placeholder 5">
-            <a:extLst>
-              <a:ext uri="{FF2B5EF4-FFF2-40B4-BE49-F238E27FC236}">
-                <a16:creationId xmlns:a16="http://schemas.microsoft.com/office/drawing/2014/main" id="{86BFE0CA-2E02-792F-8BE4-233204DDE9A5}"/>
-              </a:ext>
-            </a:extLst>
-          </p:cNvPr>
-          <p:cNvSpPr>
-            <a:spLocks noGrp="1"/>
-          </p:cNvSpPr>
-          <p:nvPr>
-            <p:ph sz="quarter" idx="4"/>
-          </p:nvPr>
-        </p:nvSpPr>
-        <p:spPr/>
-        <p:txBody>
-          <a:bodyPr/>
-          <a:lstStyle/>
-          <a:p>
-            <a:r>
-              <a:rPr lang="en-US" dirty="0"/>
-              <a:t>TODO</a:t>
-            </a:r>
-          </a:p>
-        </p:txBody>
-      </p:sp>
-    </p:spTree>
-    <p:extLst>
-      <p:ext uri="{BB962C8B-B14F-4D97-AF65-F5344CB8AC3E}">
-        <p14:creationId xmlns:p14="http://schemas.microsoft.com/office/powerpoint/2010/main" val="3907987761"/>
+        <p14:creationId xmlns:p14="http://schemas.microsoft.com/office/powerpoint/2010/main" val="1186552766"/>
       </p:ext>
     </p:extLst>
   </p:cSld>

--- a/presentation/Olist E-Commerce Analysis.pptx
+++ b/presentation/Olist E-Commerce Analysis.pptx
@@ -27,8 +27,9 @@
     <p:sldId id="272" r:id="rId21"/>
     <p:sldId id="275" r:id="rId22"/>
     <p:sldId id="276" r:id="rId23"/>
-    <p:sldId id="273" r:id="rId24"/>
-    <p:sldId id="274" r:id="rId25"/>
+    <p:sldId id="281" r:id="rId24"/>
+    <p:sldId id="273" r:id="rId25"/>
+    <p:sldId id="274" r:id="rId26"/>
   </p:sldIdLst>
   <p:sldSz cx="12192000" cy="6858000"/>
   <p:notesSz cx="6858000" cy="9144000"/>
@@ -10601,7 +10602,7 @@
           <a:p>
             <a:fld id="{B2374077-9B34-4FA8-8422-634E903F67E1}" type="datetimeFigureOut">
               <a:rPr lang="en-US" smtClean="0"/>
-              <a:t>4/19/2026</a:t>
+              <a:t>4/23/2026</a:t>
             </a:fld>
             <a:endParaRPr lang="en-US"/>
           </a:p>
@@ -10808,7 +10809,7 @@
           <a:p>
             <a:fld id="{B2374077-9B34-4FA8-8422-634E903F67E1}" type="datetimeFigureOut">
               <a:rPr lang="en-US" smtClean="0"/>
-              <a:t>4/19/2026</a:t>
+              <a:t>4/23/2026</a:t>
             </a:fld>
             <a:endParaRPr lang="en-US"/>
           </a:p>
@@ -10988,7 +10989,7 @@
           <a:p>
             <a:fld id="{B2374077-9B34-4FA8-8422-634E903F67E1}" type="datetimeFigureOut">
               <a:rPr lang="en-US" smtClean="0"/>
-              <a:t>4/19/2026</a:t>
+              <a:t>4/23/2026</a:t>
             </a:fld>
             <a:endParaRPr lang="en-US"/>
           </a:p>
@@ -11193,7 +11194,7 @@
           <a:p>
             <a:fld id="{B2374077-9B34-4FA8-8422-634E903F67E1}" type="datetimeFigureOut">
               <a:rPr lang="en-US" smtClean="0"/>
-              <a:t>4/19/2026</a:t>
+              <a:t>4/23/2026</a:t>
             </a:fld>
             <a:endParaRPr lang="en-US"/>
           </a:p>
@@ -20105,7 +20106,7 @@
           <a:p>
             <a:fld id="{B2374077-9B34-4FA8-8422-634E903F67E1}" type="datetimeFigureOut">
               <a:rPr lang="en-US" smtClean="0"/>
-              <a:t>4/19/2026</a:t>
+              <a:t>4/23/2026</a:t>
             </a:fld>
             <a:endParaRPr lang="en-US"/>
           </a:p>
@@ -20379,7 +20380,7 @@
           <a:p>
             <a:fld id="{B2374077-9B34-4FA8-8422-634E903F67E1}" type="datetimeFigureOut">
               <a:rPr lang="en-US" smtClean="0"/>
-              <a:t>4/19/2026</a:t>
+              <a:t>4/23/2026</a:t>
             </a:fld>
             <a:endParaRPr lang="en-US"/>
           </a:p>
@@ -20777,7 +20778,7 @@
           <a:p>
             <a:fld id="{B2374077-9B34-4FA8-8422-634E903F67E1}" type="datetimeFigureOut">
               <a:rPr lang="en-US" smtClean="0"/>
-              <a:t>4/19/2026</a:t>
+              <a:t>4/23/2026</a:t>
             </a:fld>
             <a:endParaRPr lang="en-US"/>
           </a:p>
@@ -20895,7 +20896,7 @@
           <a:p>
             <a:fld id="{B2374077-9B34-4FA8-8422-634E903F67E1}" type="datetimeFigureOut">
               <a:rPr lang="en-US" smtClean="0"/>
-              <a:t>4/19/2026</a:t>
+              <a:t>4/23/2026</a:t>
             </a:fld>
             <a:endParaRPr lang="en-US"/>
           </a:p>
@@ -20990,7 +20991,7 @@
           <a:p>
             <a:fld id="{B2374077-9B34-4FA8-8422-634E903F67E1}" type="datetimeFigureOut">
               <a:rPr lang="en-US" smtClean="0"/>
-              <a:t>4/19/2026</a:t>
+              <a:t>4/23/2026</a:t>
             </a:fld>
             <a:endParaRPr lang="en-US"/>
           </a:p>
@@ -21280,7 +21281,7 @@
           <a:p>
             <a:fld id="{B2374077-9B34-4FA8-8422-634E903F67E1}" type="datetimeFigureOut">
               <a:rPr lang="en-US" smtClean="0"/>
-              <a:t>4/19/2026</a:t>
+              <a:t>4/23/2026</a:t>
             </a:fld>
             <a:endParaRPr lang="en-US"/>
           </a:p>
@@ -21560,7 +21561,7 @@
           <a:p>
             <a:fld id="{B2374077-9B34-4FA8-8422-634E903F67E1}" type="datetimeFigureOut">
               <a:rPr lang="en-US" smtClean="0"/>
-              <a:t>4/19/2026</a:t>
+              <a:t>4/23/2026</a:t>
             </a:fld>
             <a:endParaRPr lang="en-US"/>
           </a:p>
@@ -21810,7 +21811,7 @@
           <a:p>
             <a:fld id="{B2374077-9B34-4FA8-8422-634E903F67E1}" type="datetimeFigureOut">
               <a:rPr lang="en-US" smtClean="0"/>
-              <a:t>4/19/2026</a:t>
+              <a:t>4/23/2026</a:t>
             </a:fld>
             <a:endParaRPr lang="en-US"/>
           </a:p>
@@ -25683,6 +25684,102 @@
       </p:grpSpPr>
       <p:sp>
         <p:nvSpPr>
+          <p:cNvPr id="2" name="Title 1">
+            <a:extLst>
+              <a:ext uri="{FF2B5EF4-FFF2-40B4-BE49-F238E27FC236}">
+                <a16:creationId xmlns:a16="http://schemas.microsoft.com/office/drawing/2014/main" id="{09188226-AC94-9FAF-FD4C-1973CFA7526A}"/>
+              </a:ext>
+            </a:extLst>
+          </p:cNvPr>
+          <p:cNvSpPr>
+            <a:spLocks noGrp="1"/>
+          </p:cNvSpPr>
+          <p:nvPr>
+            <p:ph type="title"/>
+          </p:nvPr>
+        </p:nvSpPr>
+        <p:spPr/>
+        <p:txBody>
+          <a:bodyPr/>
+          <a:lstStyle/>
+          <a:p>
+            <a:r>
+              <a:rPr lang="en-US" dirty="0"/>
+              <a:t>Interactive MAP</a:t>
+            </a:r>
+          </a:p>
+        </p:txBody>
+      </p:sp>
+      <p:sp>
+        <p:nvSpPr>
+          <p:cNvPr id="3" name="Content Placeholder 2">
+            <a:extLst>
+              <a:ext uri="{FF2B5EF4-FFF2-40B4-BE49-F238E27FC236}">
+                <a16:creationId xmlns:a16="http://schemas.microsoft.com/office/drawing/2014/main" id="{CD6AFC73-E333-4AEC-00E1-2072804FC6FC}"/>
+              </a:ext>
+            </a:extLst>
+          </p:cNvPr>
+          <p:cNvSpPr>
+            <a:spLocks noGrp="1"/>
+          </p:cNvSpPr>
+          <p:nvPr>
+            <p:ph idx="1"/>
+          </p:nvPr>
+        </p:nvSpPr>
+        <p:spPr/>
+        <p:txBody>
+          <a:bodyPr>
+            <a:normAutofit/>
+          </a:bodyPr>
+          <a:lstStyle/>
+          <a:p>
+            <a:pPr algn="ctr"/>
+            <a:endParaRPr lang="en-US" sz="4400" dirty="0"/>
+          </a:p>
+          <a:p>
+            <a:pPr algn="ctr"/>
+            <a:r>
+              <a:rPr lang="en-US" sz="4400" dirty="0">
+                <a:hlinkClick r:id="rId2"/>
+              </a:rPr>
+              <a:t>https://olist-db.netlify.app/</a:t>
+            </a:r>
+            <a:endParaRPr lang="en-US" sz="4400" dirty="0"/>
+          </a:p>
+        </p:txBody>
+      </p:sp>
+    </p:spTree>
+    <p:extLst>
+      <p:ext uri="{BB962C8B-B14F-4D97-AF65-F5344CB8AC3E}">
+        <p14:creationId xmlns:p14="http://schemas.microsoft.com/office/powerpoint/2010/main" val="3520607905"/>
+      </p:ext>
+    </p:extLst>
+  </p:cSld>
+  <p:clrMapOvr>
+    <a:masterClrMapping/>
+  </p:clrMapOvr>
+</p:sld>
+</file>
+
+<file path=ppt/slides/slide24.xml><?xml version="1.0" encoding="utf-8"?>
+<p:sld xmlns:a="http://schemas.openxmlformats.org/drawingml/2006/main" xmlns:r="http://schemas.openxmlformats.org/officeDocument/2006/relationships" xmlns:p="http://schemas.openxmlformats.org/presentationml/2006/main">
+  <p:cSld>
+    <p:spTree>
+      <p:nvGrpSpPr>
+        <p:cNvPr id="1" name=""/>
+        <p:cNvGrpSpPr/>
+        <p:nvPr/>
+      </p:nvGrpSpPr>
+      <p:grpSpPr>
+        <a:xfrm>
+          <a:off x="0" y="0"/>
+          <a:ext cx="0" cy="0"/>
+          <a:chOff x="0" y="0"/>
+          <a:chExt cx="0" cy="0"/>
+        </a:xfrm>
+      </p:grpSpPr>
+      <p:sp>
+        <p:nvSpPr>
           <p:cNvPr id="3" name="Title 2">
             <a:extLst>
               <a:ext uri="{FF2B5EF4-FFF2-40B4-BE49-F238E27FC236}">
@@ -25777,7 +25874,7 @@
 </p:sld>
 </file>
 
-<file path=ppt/slides/slide24.xml><?xml version="1.0" encoding="utf-8"?>
+<file path=ppt/slides/slide25.xml><?xml version="1.0" encoding="utf-8"?>
 <p:sld xmlns:a="http://schemas.openxmlformats.org/drawingml/2006/main" xmlns:r="http://schemas.openxmlformats.org/officeDocument/2006/relationships" xmlns:p="http://schemas.openxmlformats.org/presentationml/2006/main">
   <p:cSld>
     <p:spTree>

--- a/presentation/Olist E-Commerce Analysis.pptx
+++ b/presentation/Olist E-Commerce Analysis.pptx
@@ -15,21 +15,19 @@
     <p:sldId id="261" r:id="rId9"/>
     <p:sldId id="278" r:id="rId10"/>
     <p:sldId id="264" r:id="rId11"/>
-    <p:sldId id="262" r:id="rId12"/>
-    <p:sldId id="263" r:id="rId13"/>
-    <p:sldId id="265" r:id="rId14"/>
-    <p:sldId id="266" r:id="rId15"/>
-    <p:sldId id="267" r:id="rId16"/>
-    <p:sldId id="268" r:id="rId17"/>
-    <p:sldId id="269" r:id="rId18"/>
-    <p:sldId id="270" r:id="rId19"/>
-    <p:sldId id="271" r:id="rId20"/>
-    <p:sldId id="272" r:id="rId21"/>
-    <p:sldId id="275" r:id="rId22"/>
-    <p:sldId id="276" r:id="rId23"/>
-    <p:sldId id="281" r:id="rId24"/>
-    <p:sldId id="273" r:id="rId25"/>
-    <p:sldId id="274" r:id="rId26"/>
+    <p:sldId id="282" r:id="rId12"/>
+    <p:sldId id="283" r:id="rId13"/>
+    <p:sldId id="284" r:id="rId14"/>
+    <p:sldId id="285" r:id="rId15"/>
+    <p:sldId id="265" r:id="rId16"/>
+    <p:sldId id="266" r:id="rId17"/>
+    <p:sldId id="286" r:id="rId18"/>
+    <p:sldId id="267" r:id="rId19"/>
+    <p:sldId id="275" r:id="rId20"/>
+    <p:sldId id="276" r:id="rId21"/>
+    <p:sldId id="281" r:id="rId22"/>
+    <p:sldId id="273" r:id="rId23"/>
+    <p:sldId id="274" r:id="rId24"/>
   </p:sldIdLst>
   <p:sldSz cx="12192000" cy="6858000"/>
   <p:notesSz cx="6858000" cy="9144000"/>
@@ -128,805 +126,16 @@
       </a:defRPr>
     </a:lvl9pPr>
   </p:defaultTextStyle>
-  <p:extLst>
-    <p:ext uri="{EFAFB233-063F-42B5-8137-9DF3F51BA10A}">
-      <p15:sldGuideLst xmlns:p15="http://schemas.microsoft.com/office/powerpoint/2012/main"/>
-    </p:ext>
-  </p:extLst>
 </p:presentation>
 </file>
 
 <file path=ppt/revisionInfo.xml><?xml version="1.0" encoding="utf-8"?>
 <p1510:revInfo xmlns:a="http://schemas.openxmlformats.org/drawingml/2006/main" xmlns:r="http://schemas.openxmlformats.org/officeDocument/2006/relationships" xmlns:p1510="http://schemas.microsoft.com/office/powerpoint/2015/10/main">
   <p1510:revLst>
-    <p1510:client id="{A4846889-8A4F-41AE-8BDF-B82845B35004}" v="46" dt="2026-04-10T05:17:49.813"/>
+    <p1510:client id="{46EE0AF7-D07D-4CD2-B71E-DB99C560702A}" v="253" dt="2026-04-23T21:59:38.225"/>
+    <p1510:client id="{6ADC6B02-4DAA-8289-B3CF-2F1CEBED77C8}" v="29" dt="2026-04-23T20:12:12.977"/>
   </p1510:revLst>
 </p1510:revInfo>
-</file>
-
-<file path=ppt/changesInfos/changesInfo1.xml><?xml version="1.0" encoding="utf-8"?>
-<pc:chgInfo xmlns:a="http://schemas.openxmlformats.org/drawingml/2006/main" xmlns:r="http://schemas.openxmlformats.org/officeDocument/2006/relationships" xmlns:ac="http://schemas.microsoft.com/office/drawing/2013/main/command" xmlns:pc="http://schemas.microsoft.com/office/powerpoint/2013/main/command">
-  <pc:docChgLst>
-    <pc:chgData name="Jan Zika" userId="4bf9b42c52853174" providerId="LiveId" clId="{46F8914C-66B5-40A6-B3C4-591741F6FD80}"/>
-    <pc:docChg chg="undo redo custSel addSld modSld sldOrd">
-      <pc:chgData name="Jan Zika" userId="4bf9b42c52853174" providerId="LiveId" clId="{46F8914C-66B5-40A6-B3C4-591741F6FD80}" dt="2026-04-10T05:17:52.827" v="828" actId="6549"/>
-      <pc:docMkLst>
-        <pc:docMk/>
-      </pc:docMkLst>
-      <pc:sldChg chg="modSp">
-        <pc:chgData name="Jan Zika" userId="4bf9b42c52853174" providerId="LiveId" clId="{46F8914C-66B5-40A6-B3C4-591741F6FD80}" dt="2026-04-10T02:34:13.334" v="64"/>
-        <pc:sldMkLst>
-          <pc:docMk/>
-          <pc:sldMk cId="764150786" sldId="256"/>
-        </pc:sldMkLst>
-        <pc:spChg chg="mod">
-          <ac:chgData name="Jan Zika" userId="4bf9b42c52853174" providerId="LiveId" clId="{46F8914C-66B5-40A6-B3C4-591741F6FD80}" dt="2026-04-10T02:34:13.334" v="64"/>
-          <ac:spMkLst>
-            <pc:docMk/>
-            <pc:sldMk cId="764150786" sldId="256"/>
-            <ac:spMk id="2" creationId="{A91D94A9-7D4E-08E8-2BC4-2E577C0376CA}"/>
-          </ac:spMkLst>
-        </pc:spChg>
-        <pc:spChg chg="mod">
-          <ac:chgData name="Jan Zika" userId="4bf9b42c52853174" providerId="LiveId" clId="{46F8914C-66B5-40A6-B3C4-591741F6FD80}" dt="2026-04-10T02:34:13.334" v="64"/>
-          <ac:spMkLst>
-            <pc:docMk/>
-            <pc:sldMk cId="764150786" sldId="256"/>
-            <ac:spMk id="3" creationId="{AB8B991C-977C-E566-2E84-577DEEE76A04}"/>
-          </ac:spMkLst>
-        </pc:spChg>
-      </pc:sldChg>
-      <pc:sldChg chg="modSp mod">
-        <pc:chgData name="Jan Zika" userId="4bf9b42c52853174" providerId="LiveId" clId="{46F8914C-66B5-40A6-B3C4-591741F6FD80}" dt="2026-04-10T05:17:52.827" v="828" actId="6549"/>
-        <pc:sldMkLst>
-          <pc:docMk/>
-          <pc:sldMk cId="486327789" sldId="257"/>
-        </pc:sldMkLst>
-        <pc:spChg chg="mod">
-          <ac:chgData name="Jan Zika" userId="4bf9b42c52853174" providerId="LiveId" clId="{46F8914C-66B5-40A6-B3C4-591741F6FD80}" dt="2026-04-10T02:34:13.334" v="64"/>
-          <ac:spMkLst>
-            <pc:docMk/>
-            <pc:sldMk cId="486327789" sldId="257"/>
-            <ac:spMk id="4" creationId="{B1BD08D1-A20C-8824-49BF-4AD31207C703}"/>
-          </ac:spMkLst>
-        </pc:spChg>
-        <pc:spChg chg="mod">
-          <ac:chgData name="Jan Zika" userId="4bf9b42c52853174" providerId="LiveId" clId="{46F8914C-66B5-40A6-B3C4-591741F6FD80}" dt="2026-04-10T02:34:13.334" v="64"/>
-          <ac:spMkLst>
-            <pc:docMk/>
-            <pc:sldMk cId="486327789" sldId="257"/>
-            <ac:spMk id="5" creationId="{24CF210F-1633-099E-EDC2-40945E14CCB4}"/>
-          </ac:spMkLst>
-        </pc:spChg>
-        <pc:spChg chg="mod">
-          <ac:chgData name="Jan Zika" userId="4bf9b42c52853174" providerId="LiveId" clId="{46F8914C-66B5-40A6-B3C4-591741F6FD80}" dt="2026-04-10T05:17:52.827" v="828" actId="6549"/>
-          <ac:spMkLst>
-            <pc:docMk/>
-            <pc:sldMk cId="486327789" sldId="257"/>
-            <ac:spMk id="6" creationId="{FD210212-EDE2-D982-0ED2-33A80E851551}"/>
-          </ac:spMkLst>
-        </pc:spChg>
-        <pc:spChg chg="mod">
-          <ac:chgData name="Jan Zika" userId="4bf9b42c52853174" providerId="LiveId" clId="{46F8914C-66B5-40A6-B3C4-591741F6FD80}" dt="2026-04-10T02:34:13.334" v="64"/>
-          <ac:spMkLst>
-            <pc:docMk/>
-            <pc:sldMk cId="486327789" sldId="257"/>
-            <ac:spMk id="7" creationId="{B469FF13-3531-629D-F396-B0DEF3786080}"/>
-          </ac:spMkLst>
-        </pc:spChg>
-        <pc:spChg chg="mod">
-          <ac:chgData name="Jan Zika" userId="4bf9b42c52853174" providerId="LiveId" clId="{46F8914C-66B5-40A6-B3C4-591741F6FD80}" dt="2026-04-10T02:34:13.334" v="64"/>
-          <ac:spMkLst>
-            <pc:docMk/>
-            <pc:sldMk cId="486327789" sldId="257"/>
-            <ac:spMk id="8" creationId="{191E1A53-C0C9-652E-D895-46D5E3F7287E}"/>
-          </ac:spMkLst>
-        </pc:spChg>
-      </pc:sldChg>
-      <pc:sldChg chg="addSp delSp modSp mod setBg modClrScheme delDesignElem chgLayout">
-        <pc:chgData name="Jan Zika" userId="4bf9b42c52853174" providerId="LiveId" clId="{46F8914C-66B5-40A6-B3C4-591741F6FD80}" dt="2026-04-10T03:57:18.829" v="186" actId="20577"/>
-        <pc:sldMkLst>
-          <pc:docMk/>
-          <pc:sldMk cId="3517948867" sldId="258"/>
-        </pc:sldMkLst>
-        <pc:spChg chg="add mod">
-          <ac:chgData name="Jan Zika" userId="4bf9b42c52853174" providerId="LiveId" clId="{46F8914C-66B5-40A6-B3C4-591741F6FD80}" dt="2026-04-10T03:49:06.956" v="134"/>
-          <ac:spMkLst>
-            <pc:docMk/>
-            <pc:sldMk cId="3517948867" sldId="258"/>
-            <ac:spMk id="4" creationId="{FD8B5BF1-ECAD-E2E9-B781-A53F7EF1CD70}"/>
-          </ac:spMkLst>
-        </pc:spChg>
-        <pc:spChg chg="del mod">
-          <ac:chgData name="Jan Zika" userId="4bf9b42c52853174" providerId="LiveId" clId="{46F8914C-66B5-40A6-B3C4-591741F6FD80}" dt="2026-04-10T03:49:33.477" v="140" actId="478"/>
-          <ac:spMkLst>
-            <pc:docMk/>
-            <pc:sldMk cId="3517948867" sldId="258"/>
-            <ac:spMk id="5" creationId="{02421600-00E2-56CA-F574-D89E9CB076C6}"/>
-          </ac:spMkLst>
-        </pc:spChg>
-        <pc:spChg chg="add del mod">
-          <ac:chgData name="Jan Zika" userId="4bf9b42c52853174" providerId="LiveId" clId="{46F8914C-66B5-40A6-B3C4-591741F6FD80}" dt="2026-04-10T03:50:17.353" v="143" actId="478"/>
-          <ac:spMkLst>
-            <pc:docMk/>
-            <pc:sldMk cId="3517948867" sldId="258"/>
-            <ac:spMk id="7" creationId="{602221AD-A896-4856-BF1D-34B1B51057B7}"/>
-          </ac:spMkLst>
-        </pc:spChg>
-        <pc:spChg chg="add del">
-          <ac:chgData name="Jan Zika" userId="4bf9b42c52853174" providerId="LiveId" clId="{46F8914C-66B5-40A6-B3C4-591741F6FD80}" dt="2026-04-10T03:50:30.038" v="145" actId="26606"/>
-          <ac:spMkLst>
-            <pc:docMk/>
-            <pc:sldMk cId="3517948867" sldId="258"/>
-            <ac:spMk id="8" creationId="{C61657BD-3333-446A-A16A-CBDC77C8E559}"/>
-          </ac:spMkLst>
-        </pc:spChg>
-        <pc:spChg chg="add del mod ord">
-          <ac:chgData name="Jan Zika" userId="4bf9b42c52853174" providerId="LiveId" clId="{46F8914C-66B5-40A6-B3C4-591741F6FD80}" dt="2026-04-10T03:50:51.216" v="150" actId="700"/>
-          <ac:spMkLst>
-            <pc:docMk/>
-            <pc:sldMk cId="3517948867" sldId="258"/>
-            <ac:spMk id="9" creationId="{3D82A32C-4081-5C6E-2166-05DC25E871F4}"/>
-          </ac:spMkLst>
-        </pc:spChg>
-        <pc:spChg chg="add del">
-          <ac:chgData name="Jan Zika" userId="4bf9b42c52853174" providerId="LiveId" clId="{46F8914C-66B5-40A6-B3C4-591741F6FD80}" dt="2026-04-10T03:50:30.038" v="145" actId="26606"/>
-          <ac:spMkLst>
-            <pc:docMk/>
-            <pc:sldMk cId="3517948867" sldId="258"/>
-            <ac:spMk id="10" creationId="{52CAFF06-4D3A-42A5-8614-B1FA47EA0F6D}"/>
-          </ac:spMkLst>
-        </pc:spChg>
-        <pc:spChg chg="add del mod ord">
-          <ac:chgData name="Jan Zika" userId="4bf9b42c52853174" providerId="LiveId" clId="{46F8914C-66B5-40A6-B3C4-591741F6FD80}" dt="2026-04-10T03:50:51.216" v="150" actId="700"/>
-          <ac:spMkLst>
-            <pc:docMk/>
-            <pc:sldMk cId="3517948867" sldId="258"/>
-            <ac:spMk id="11" creationId="{45BFC93B-1200-9DD4-465F-6FC634341F24}"/>
-          </ac:spMkLst>
-        </pc:spChg>
-        <pc:spChg chg="add del">
-          <ac:chgData name="Jan Zika" userId="4bf9b42c52853174" providerId="LiveId" clId="{46F8914C-66B5-40A6-B3C4-591741F6FD80}" dt="2026-04-10T03:50:12.867" v="142" actId="26606"/>
-          <ac:spMkLst>
-            <pc:docMk/>
-            <pc:sldMk cId="3517948867" sldId="258"/>
-            <ac:spMk id="12" creationId="{3A8EC506-B1DA-46A1-B44D-774E68468E13}"/>
-          </ac:spMkLst>
-        </pc:spChg>
-        <pc:spChg chg="add del">
-          <ac:chgData name="Jan Zika" userId="4bf9b42c52853174" providerId="LiveId" clId="{46F8914C-66B5-40A6-B3C4-591741F6FD80}" dt="2026-04-10T03:50:35.230" v="147" actId="26606"/>
-          <ac:spMkLst>
-            <pc:docMk/>
-            <pc:sldMk cId="3517948867" sldId="258"/>
-            <ac:spMk id="13" creationId="{904C0BC6-B04D-4459-B721-9C030C392739}"/>
-          </ac:spMkLst>
-        </pc:spChg>
-        <pc:spChg chg="add del">
-          <ac:chgData name="Jan Zika" userId="4bf9b42c52853174" providerId="LiveId" clId="{46F8914C-66B5-40A6-B3C4-591741F6FD80}" dt="2026-04-10T03:50:12.867" v="142" actId="26606"/>
-          <ac:spMkLst>
-            <pc:docMk/>
-            <pc:sldMk cId="3517948867" sldId="258"/>
-            <ac:spMk id="14" creationId="{BFF30785-305E-45D7-984F-5AA93D3CA561}"/>
-          </ac:spMkLst>
-        </pc:spChg>
-        <pc:spChg chg="add del">
-          <ac:chgData name="Jan Zika" userId="4bf9b42c52853174" providerId="LiveId" clId="{46F8914C-66B5-40A6-B3C4-591741F6FD80}" dt="2026-04-10T03:50:35.230" v="147" actId="26606"/>
-          <ac:spMkLst>
-            <pc:docMk/>
-            <pc:sldMk cId="3517948867" sldId="258"/>
-            <ac:spMk id="15" creationId="{CB2F024E-D853-479C-B5A9-08293A2D7212}"/>
-          </ac:spMkLst>
-        </pc:spChg>
-        <pc:spChg chg="add del">
-          <ac:chgData name="Jan Zika" userId="4bf9b42c52853174" providerId="LiveId" clId="{46F8914C-66B5-40A6-B3C4-591741F6FD80}" dt="2026-04-10T03:52:13.023" v="153" actId="700"/>
-          <ac:spMkLst>
-            <pc:docMk/>
-            <pc:sldMk cId="3517948867" sldId="258"/>
-            <ac:spMk id="17" creationId="{C61657BD-3333-446A-A16A-CBDC77C8E559}"/>
-          </ac:spMkLst>
-        </pc:spChg>
-        <pc:spChg chg="add del">
-          <ac:chgData name="Jan Zika" userId="4bf9b42c52853174" providerId="LiveId" clId="{46F8914C-66B5-40A6-B3C4-591741F6FD80}" dt="2026-04-10T03:50:12.867" v="142" actId="26606"/>
-          <ac:spMkLst>
-            <pc:docMk/>
-            <pc:sldMk cId="3517948867" sldId="258"/>
-            <ac:spMk id="18" creationId="{C6D18C07-B1F9-42F0-8956-B88FC37A674C}"/>
-          </ac:spMkLst>
-        </pc:spChg>
-        <pc:spChg chg="add del">
-          <ac:chgData name="Jan Zika" userId="4bf9b42c52853174" providerId="LiveId" clId="{46F8914C-66B5-40A6-B3C4-591741F6FD80}" dt="2026-04-10T03:52:13.023" v="153" actId="700"/>
-          <ac:spMkLst>
-            <pc:docMk/>
-            <pc:sldMk cId="3517948867" sldId="258"/>
-            <ac:spMk id="19" creationId="{52CAFF06-4D3A-42A5-8614-B1FA47EA0F6D}"/>
-          </ac:spMkLst>
-        </pc:spChg>
-        <pc:spChg chg="add mod">
-          <ac:chgData name="Jan Zika" userId="4bf9b42c52853174" providerId="LiveId" clId="{46F8914C-66B5-40A6-B3C4-591741F6FD80}" dt="2026-04-10T03:57:18.829" v="186" actId="20577"/>
-          <ac:spMkLst>
-            <pc:docMk/>
-            <pc:sldMk cId="3517948867" sldId="258"/>
-            <ac:spMk id="20" creationId="{151656F4-1C8F-3F0E-F632-9BECCFF6DEB1}"/>
-          </ac:spMkLst>
-        </pc:spChg>
-        <pc:picChg chg="add mod ord">
-          <ac:chgData name="Jan Zika" userId="4bf9b42c52853174" providerId="LiveId" clId="{46F8914C-66B5-40A6-B3C4-591741F6FD80}" dt="2026-04-10T03:52:59.097" v="155" actId="1076"/>
-          <ac:picMkLst>
-            <pc:docMk/>
-            <pc:sldMk cId="3517948867" sldId="258"/>
-            <ac:picMk id="3" creationId="{CE0EC26A-F3D0-935F-EDBC-05BD038434B6}"/>
-          </ac:picMkLst>
-        </pc:picChg>
-        <pc:cxnChg chg="add del">
-          <ac:chgData name="Jan Zika" userId="4bf9b42c52853174" providerId="LiveId" clId="{46F8914C-66B5-40A6-B3C4-591741F6FD80}" dt="2026-04-10T03:50:12.867" v="142" actId="26606"/>
-          <ac:cxnSpMkLst>
-            <pc:docMk/>
-            <pc:sldMk cId="3517948867" sldId="258"/>
-            <ac:cxnSpMk id="16" creationId="{15E01FA5-D766-43CA-A83D-E7CF3F04E96F}"/>
-          </ac:cxnSpMkLst>
-        </pc:cxnChg>
-      </pc:sldChg>
-      <pc:sldChg chg="modSp">
-        <pc:chgData name="Jan Zika" userId="4bf9b42c52853174" providerId="LiveId" clId="{46F8914C-66B5-40A6-B3C4-591741F6FD80}" dt="2026-04-10T02:34:13.334" v="64"/>
-        <pc:sldMkLst>
-          <pc:docMk/>
-          <pc:sldMk cId="2635400145" sldId="259"/>
-        </pc:sldMkLst>
-        <pc:spChg chg="mod">
-          <ac:chgData name="Jan Zika" userId="4bf9b42c52853174" providerId="LiveId" clId="{46F8914C-66B5-40A6-B3C4-591741F6FD80}" dt="2026-04-10T02:34:13.334" v="64"/>
-          <ac:spMkLst>
-            <pc:docMk/>
-            <pc:sldMk cId="2635400145" sldId="259"/>
-            <ac:spMk id="3" creationId="{64B84D43-880C-7775-EAB1-2F276321FDA8}"/>
-          </ac:spMkLst>
-        </pc:spChg>
-        <pc:spChg chg="mod">
-          <ac:chgData name="Jan Zika" userId="4bf9b42c52853174" providerId="LiveId" clId="{46F8914C-66B5-40A6-B3C4-591741F6FD80}" dt="2026-04-10T02:34:13.334" v="64"/>
-          <ac:spMkLst>
-            <pc:docMk/>
-            <pc:sldMk cId="2635400145" sldId="259"/>
-            <ac:spMk id="4" creationId="{B5F2A7EC-EE4D-EF78-1037-38E91823CC95}"/>
-          </ac:spMkLst>
-        </pc:spChg>
-      </pc:sldChg>
-      <pc:sldChg chg="modSp mod">
-        <pc:chgData name="Jan Zika" userId="4bf9b42c52853174" providerId="LiveId" clId="{46F8914C-66B5-40A6-B3C4-591741F6FD80}" dt="2026-04-10T02:34:37.683" v="69" actId="20577"/>
-        <pc:sldMkLst>
-          <pc:docMk/>
-          <pc:sldMk cId="1094190350" sldId="260"/>
-        </pc:sldMkLst>
-        <pc:spChg chg="mod">
-          <ac:chgData name="Jan Zika" userId="4bf9b42c52853174" providerId="LiveId" clId="{46F8914C-66B5-40A6-B3C4-591741F6FD80}" dt="2026-04-10T02:34:13.334" v="64"/>
-          <ac:spMkLst>
-            <pc:docMk/>
-            <pc:sldMk cId="1094190350" sldId="260"/>
-            <ac:spMk id="7" creationId="{0A6D65D7-B5F5-FCB8-B0B8-F168E34AB2D3}"/>
-          </ac:spMkLst>
-        </pc:spChg>
-        <pc:spChg chg="mod">
-          <ac:chgData name="Jan Zika" userId="4bf9b42c52853174" providerId="LiveId" clId="{46F8914C-66B5-40A6-B3C4-591741F6FD80}" dt="2026-04-10T02:34:13.334" v="64"/>
-          <ac:spMkLst>
-            <pc:docMk/>
-            <pc:sldMk cId="1094190350" sldId="260"/>
-            <ac:spMk id="8" creationId="{758807B4-729E-EBE5-8DE0-010A00FC1BA5}"/>
-          </ac:spMkLst>
-        </pc:spChg>
-        <pc:spChg chg="mod">
-          <ac:chgData name="Jan Zika" userId="4bf9b42c52853174" providerId="LiveId" clId="{46F8914C-66B5-40A6-B3C4-591741F6FD80}" dt="2026-04-10T02:34:37.683" v="69" actId="20577"/>
-          <ac:spMkLst>
-            <pc:docMk/>
-            <pc:sldMk cId="1094190350" sldId="260"/>
-            <ac:spMk id="9" creationId="{8C3FC8C0-C45C-7C45-0ECD-71350C396286}"/>
-          </ac:spMkLst>
-        </pc:spChg>
-        <pc:spChg chg="mod">
-          <ac:chgData name="Jan Zika" userId="4bf9b42c52853174" providerId="LiveId" clId="{46F8914C-66B5-40A6-B3C4-591741F6FD80}" dt="2026-04-10T02:34:13.334" v="64"/>
-          <ac:spMkLst>
-            <pc:docMk/>
-            <pc:sldMk cId="1094190350" sldId="260"/>
-            <ac:spMk id="10" creationId="{E88F7E96-7FEC-1CBA-B922-1799F1C24513}"/>
-          </ac:spMkLst>
-        </pc:spChg>
-        <pc:spChg chg="mod">
-          <ac:chgData name="Jan Zika" userId="4bf9b42c52853174" providerId="LiveId" clId="{46F8914C-66B5-40A6-B3C4-591741F6FD80}" dt="2026-04-10T02:34:13.334" v="64"/>
-          <ac:spMkLst>
-            <pc:docMk/>
-            <pc:sldMk cId="1094190350" sldId="260"/>
-            <ac:spMk id="11" creationId="{883DF136-3D88-B9A9-D241-011616964AF1}"/>
-          </ac:spMkLst>
-        </pc:spChg>
-      </pc:sldChg>
-      <pc:sldChg chg="modSp mod">
-        <pc:chgData name="Jan Zika" userId="4bf9b42c52853174" providerId="LiveId" clId="{46F8914C-66B5-40A6-B3C4-591741F6FD80}" dt="2026-04-10T02:36:18.854" v="84" actId="20577"/>
-        <pc:sldMkLst>
-          <pc:docMk/>
-          <pc:sldMk cId="2232768599" sldId="261"/>
-        </pc:sldMkLst>
-        <pc:spChg chg="mod">
-          <ac:chgData name="Jan Zika" userId="4bf9b42c52853174" providerId="LiveId" clId="{46F8914C-66B5-40A6-B3C4-591741F6FD80}" dt="2026-04-10T02:34:13.334" v="64"/>
-          <ac:spMkLst>
-            <pc:docMk/>
-            <pc:sldMk cId="2232768599" sldId="261"/>
-            <ac:spMk id="2" creationId="{6082E932-D46F-17DC-53ED-3EB96A5C18D5}"/>
-          </ac:spMkLst>
-        </pc:spChg>
-        <pc:spChg chg="mod">
-          <ac:chgData name="Jan Zika" userId="4bf9b42c52853174" providerId="LiveId" clId="{46F8914C-66B5-40A6-B3C4-591741F6FD80}" dt="2026-04-10T02:34:13.334" v="64"/>
-          <ac:spMkLst>
-            <pc:docMk/>
-            <pc:sldMk cId="2232768599" sldId="261"/>
-            <ac:spMk id="3" creationId="{5780D444-4BE3-B609-F7FE-149BE258C5F5}"/>
-          </ac:spMkLst>
-        </pc:spChg>
-        <pc:spChg chg="mod">
-          <ac:chgData name="Jan Zika" userId="4bf9b42c52853174" providerId="LiveId" clId="{46F8914C-66B5-40A6-B3C4-591741F6FD80}" dt="2026-04-10T02:35:38.294" v="77" actId="20577"/>
-          <ac:spMkLst>
-            <pc:docMk/>
-            <pc:sldMk cId="2232768599" sldId="261"/>
-            <ac:spMk id="4" creationId="{66A424AD-D3DA-8F50-7A94-780BBAD99CA7}"/>
-          </ac:spMkLst>
-        </pc:spChg>
-        <pc:spChg chg="mod">
-          <ac:chgData name="Jan Zika" userId="4bf9b42c52853174" providerId="LiveId" clId="{46F8914C-66B5-40A6-B3C4-591741F6FD80}" dt="2026-04-10T02:34:13.334" v="64"/>
-          <ac:spMkLst>
-            <pc:docMk/>
-            <pc:sldMk cId="2232768599" sldId="261"/>
-            <ac:spMk id="5" creationId="{3A56FE17-6551-BC43-8051-A9768FD2BEF9}"/>
-          </ac:spMkLst>
-        </pc:spChg>
-        <pc:spChg chg="mod">
-          <ac:chgData name="Jan Zika" userId="4bf9b42c52853174" providerId="LiveId" clId="{46F8914C-66B5-40A6-B3C4-591741F6FD80}" dt="2026-04-10T02:36:18.854" v="84" actId="20577"/>
-          <ac:spMkLst>
-            <pc:docMk/>
-            <pc:sldMk cId="2232768599" sldId="261"/>
-            <ac:spMk id="6" creationId="{6E53D4E1-B327-658E-E128-6C1D5838E760}"/>
-          </ac:spMkLst>
-        </pc:spChg>
-      </pc:sldChg>
-      <pc:sldChg chg="modSp">
-        <pc:chgData name="Jan Zika" userId="4bf9b42c52853174" providerId="LiveId" clId="{46F8914C-66B5-40A6-B3C4-591741F6FD80}" dt="2026-04-10T02:34:13.334" v="64"/>
-        <pc:sldMkLst>
-          <pc:docMk/>
-          <pc:sldMk cId="296423964" sldId="262"/>
-        </pc:sldMkLst>
-        <pc:spChg chg="mod">
-          <ac:chgData name="Jan Zika" userId="4bf9b42c52853174" providerId="LiveId" clId="{46F8914C-66B5-40A6-B3C4-591741F6FD80}" dt="2026-04-10T02:34:13.334" v="64"/>
-          <ac:spMkLst>
-            <pc:docMk/>
-            <pc:sldMk cId="296423964" sldId="262"/>
-            <ac:spMk id="2" creationId="{A7D68A88-CD02-E230-F679-81946D1CFA58}"/>
-          </ac:spMkLst>
-        </pc:spChg>
-        <pc:spChg chg="mod">
-          <ac:chgData name="Jan Zika" userId="4bf9b42c52853174" providerId="LiveId" clId="{46F8914C-66B5-40A6-B3C4-591741F6FD80}" dt="2026-04-10T02:34:13.334" v="64"/>
-          <ac:spMkLst>
-            <pc:docMk/>
-            <pc:sldMk cId="296423964" sldId="262"/>
-            <ac:spMk id="3" creationId="{3B5E2797-167C-8E8B-B485-E71790C6E69C}"/>
-          </ac:spMkLst>
-        </pc:spChg>
-        <pc:spChg chg="mod">
-          <ac:chgData name="Jan Zika" userId="4bf9b42c52853174" providerId="LiveId" clId="{46F8914C-66B5-40A6-B3C4-591741F6FD80}" dt="2026-04-10T02:34:13.334" v="64"/>
-          <ac:spMkLst>
-            <pc:docMk/>
-            <pc:sldMk cId="296423964" sldId="262"/>
-            <ac:spMk id="4" creationId="{E72F4CE0-5F18-E6DB-A60B-95D50722AD46}"/>
-          </ac:spMkLst>
-        </pc:spChg>
-        <pc:spChg chg="mod">
-          <ac:chgData name="Jan Zika" userId="4bf9b42c52853174" providerId="LiveId" clId="{46F8914C-66B5-40A6-B3C4-591741F6FD80}" dt="2026-04-10T02:34:13.334" v="64"/>
-          <ac:spMkLst>
-            <pc:docMk/>
-            <pc:sldMk cId="296423964" sldId="262"/>
-            <ac:spMk id="5" creationId="{5F0F5418-56A8-AEE0-C231-11278121AA9D}"/>
-          </ac:spMkLst>
-        </pc:spChg>
-        <pc:spChg chg="mod">
-          <ac:chgData name="Jan Zika" userId="4bf9b42c52853174" providerId="LiveId" clId="{46F8914C-66B5-40A6-B3C4-591741F6FD80}" dt="2026-04-10T02:34:13.334" v="64"/>
-          <ac:spMkLst>
-            <pc:docMk/>
-            <pc:sldMk cId="296423964" sldId="262"/>
-            <ac:spMk id="6" creationId="{2EF9F847-1D46-C17E-05CA-C013095844DE}"/>
-          </ac:spMkLst>
-        </pc:spChg>
-      </pc:sldChg>
-      <pc:sldChg chg="modSp">
-        <pc:chgData name="Jan Zika" userId="4bf9b42c52853174" providerId="LiveId" clId="{46F8914C-66B5-40A6-B3C4-591741F6FD80}" dt="2026-04-10T02:34:13.334" v="64"/>
-        <pc:sldMkLst>
-          <pc:docMk/>
-          <pc:sldMk cId="3907987761" sldId="263"/>
-        </pc:sldMkLst>
-        <pc:spChg chg="mod">
-          <ac:chgData name="Jan Zika" userId="4bf9b42c52853174" providerId="LiveId" clId="{46F8914C-66B5-40A6-B3C4-591741F6FD80}" dt="2026-04-10T02:34:13.334" v="64"/>
-          <ac:spMkLst>
-            <pc:docMk/>
-            <pc:sldMk cId="3907987761" sldId="263"/>
-            <ac:spMk id="2" creationId="{F9406560-2801-DF72-748D-88EA669A4A43}"/>
-          </ac:spMkLst>
-        </pc:spChg>
-        <pc:spChg chg="mod">
-          <ac:chgData name="Jan Zika" userId="4bf9b42c52853174" providerId="LiveId" clId="{46F8914C-66B5-40A6-B3C4-591741F6FD80}" dt="2026-04-10T02:34:13.334" v="64"/>
-          <ac:spMkLst>
-            <pc:docMk/>
-            <pc:sldMk cId="3907987761" sldId="263"/>
-            <ac:spMk id="3" creationId="{BF3F6C46-87BA-B4DA-4388-4B98932BFA35}"/>
-          </ac:spMkLst>
-        </pc:spChg>
-        <pc:spChg chg="mod">
-          <ac:chgData name="Jan Zika" userId="4bf9b42c52853174" providerId="LiveId" clId="{46F8914C-66B5-40A6-B3C4-591741F6FD80}" dt="2026-04-10T02:34:13.334" v="64"/>
-          <ac:spMkLst>
-            <pc:docMk/>
-            <pc:sldMk cId="3907987761" sldId="263"/>
-            <ac:spMk id="4" creationId="{3A9AED6A-86DC-694C-C636-2D6D387EEB7D}"/>
-          </ac:spMkLst>
-        </pc:spChg>
-        <pc:spChg chg="mod">
-          <ac:chgData name="Jan Zika" userId="4bf9b42c52853174" providerId="LiveId" clId="{46F8914C-66B5-40A6-B3C4-591741F6FD80}" dt="2026-04-10T02:34:13.334" v="64"/>
-          <ac:spMkLst>
-            <pc:docMk/>
-            <pc:sldMk cId="3907987761" sldId="263"/>
-            <ac:spMk id="5" creationId="{5AFE4C2F-7FAD-2628-CE31-14ADE076AB8B}"/>
-          </ac:spMkLst>
-        </pc:spChg>
-        <pc:spChg chg="mod">
-          <ac:chgData name="Jan Zika" userId="4bf9b42c52853174" providerId="LiveId" clId="{46F8914C-66B5-40A6-B3C4-591741F6FD80}" dt="2026-04-10T02:34:13.334" v="64"/>
-          <ac:spMkLst>
-            <pc:docMk/>
-            <pc:sldMk cId="3907987761" sldId="263"/>
-            <ac:spMk id="6" creationId="{86BFE0CA-2E02-792F-8BE4-233204DDE9A5}"/>
-          </ac:spMkLst>
-        </pc:spChg>
-      </pc:sldChg>
-      <pc:sldChg chg="modSp">
-        <pc:chgData name="Jan Zika" userId="4bf9b42c52853174" providerId="LiveId" clId="{46F8914C-66B5-40A6-B3C4-591741F6FD80}" dt="2026-04-10T02:34:13.334" v="64"/>
-        <pc:sldMkLst>
-          <pc:docMk/>
-          <pc:sldMk cId="2306582258" sldId="264"/>
-        </pc:sldMkLst>
-        <pc:spChg chg="mod">
-          <ac:chgData name="Jan Zika" userId="4bf9b42c52853174" providerId="LiveId" clId="{46F8914C-66B5-40A6-B3C4-591741F6FD80}" dt="2026-04-10T02:34:13.334" v="64"/>
-          <ac:spMkLst>
-            <pc:docMk/>
-            <pc:sldMk cId="2306582258" sldId="264"/>
-            <ac:spMk id="7" creationId="{5BD0FE1D-EE1D-CBA0-440A-FC5AF9D86BAB}"/>
-          </ac:spMkLst>
-        </pc:spChg>
-        <pc:spChg chg="mod">
-          <ac:chgData name="Jan Zika" userId="4bf9b42c52853174" providerId="LiveId" clId="{46F8914C-66B5-40A6-B3C4-591741F6FD80}" dt="2026-04-10T02:34:13.334" v="64"/>
-          <ac:spMkLst>
-            <pc:docMk/>
-            <pc:sldMk cId="2306582258" sldId="264"/>
-            <ac:spMk id="8" creationId="{B732DF04-1DE9-5BF9-6277-EF7309B44354}"/>
-          </ac:spMkLst>
-        </pc:spChg>
-      </pc:sldChg>
-      <pc:sldChg chg="modSp">
-        <pc:chgData name="Jan Zika" userId="4bf9b42c52853174" providerId="LiveId" clId="{46F8914C-66B5-40A6-B3C4-591741F6FD80}" dt="2026-04-10T02:34:13.334" v="64"/>
-        <pc:sldMkLst>
-          <pc:docMk/>
-          <pc:sldMk cId="1730064579" sldId="265"/>
-        </pc:sldMkLst>
-        <pc:spChg chg="mod">
-          <ac:chgData name="Jan Zika" userId="4bf9b42c52853174" providerId="LiveId" clId="{46F8914C-66B5-40A6-B3C4-591741F6FD80}" dt="2026-04-10T02:34:13.334" v="64"/>
-          <ac:spMkLst>
-            <pc:docMk/>
-            <pc:sldMk cId="1730064579" sldId="265"/>
-            <ac:spMk id="7" creationId="{E74A22A0-0AF8-E9C0-F208-9F50FC4247FA}"/>
-          </ac:spMkLst>
-        </pc:spChg>
-        <pc:spChg chg="mod">
-          <ac:chgData name="Jan Zika" userId="4bf9b42c52853174" providerId="LiveId" clId="{46F8914C-66B5-40A6-B3C4-591741F6FD80}" dt="2026-04-10T02:34:13.334" v="64"/>
-          <ac:spMkLst>
-            <pc:docMk/>
-            <pc:sldMk cId="1730064579" sldId="265"/>
-            <ac:spMk id="8" creationId="{509EF12B-DA68-D5D5-9C8A-7E7831979293}"/>
-          </ac:spMkLst>
-        </pc:spChg>
-      </pc:sldChg>
-      <pc:sldChg chg="modSp">
-        <pc:chgData name="Jan Zika" userId="4bf9b42c52853174" providerId="LiveId" clId="{46F8914C-66B5-40A6-B3C4-591741F6FD80}" dt="2026-04-10T02:34:13.334" v="64"/>
-        <pc:sldMkLst>
-          <pc:docMk/>
-          <pc:sldMk cId="3031109688" sldId="266"/>
-        </pc:sldMkLst>
-        <pc:spChg chg="mod">
-          <ac:chgData name="Jan Zika" userId="4bf9b42c52853174" providerId="LiveId" clId="{46F8914C-66B5-40A6-B3C4-591741F6FD80}" dt="2026-04-10T02:34:13.334" v="64"/>
-          <ac:spMkLst>
-            <pc:docMk/>
-            <pc:sldMk cId="3031109688" sldId="266"/>
-            <ac:spMk id="2" creationId="{DEB3BF00-1200-5270-AFAE-E18BC2224BDD}"/>
-          </ac:spMkLst>
-        </pc:spChg>
-        <pc:spChg chg="mod">
-          <ac:chgData name="Jan Zika" userId="4bf9b42c52853174" providerId="LiveId" clId="{46F8914C-66B5-40A6-B3C4-591741F6FD80}" dt="2026-04-10T02:34:13.334" v="64"/>
-          <ac:spMkLst>
-            <pc:docMk/>
-            <pc:sldMk cId="3031109688" sldId="266"/>
-            <ac:spMk id="3" creationId="{A316A906-C107-5E79-375D-60A95F89C0E0}"/>
-          </ac:spMkLst>
-        </pc:spChg>
-        <pc:spChg chg="mod">
-          <ac:chgData name="Jan Zika" userId="4bf9b42c52853174" providerId="LiveId" clId="{46F8914C-66B5-40A6-B3C4-591741F6FD80}" dt="2026-04-10T02:34:13.334" v="64"/>
-          <ac:spMkLst>
-            <pc:docMk/>
-            <pc:sldMk cId="3031109688" sldId="266"/>
-            <ac:spMk id="4" creationId="{0EE9E5AC-5528-DF1A-F54C-229D7FC4FA72}"/>
-          </ac:spMkLst>
-        </pc:spChg>
-        <pc:spChg chg="mod">
-          <ac:chgData name="Jan Zika" userId="4bf9b42c52853174" providerId="LiveId" clId="{46F8914C-66B5-40A6-B3C4-591741F6FD80}" dt="2026-04-10T02:34:13.334" v="64"/>
-          <ac:spMkLst>
-            <pc:docMk/>
-            <pc:sldMk cId="3031109688" sldId="266"/>
-            <ac:spMk id="5" creationId="{9A09FA61-C792-E35D-F69C-7B50C4B74D29}"/>
-          </ac:spMkLst>
-        </pc:spChg>
-        <pc:spChg chg="mod">
-          <ac:chgData name="Jan Zika" userId="4bf9b42c52853174" providerId="LiveId" clId="{46F8914C-66B5-40A6-B3C4-591741F6FD80}" dt="2026-04-10T02:34:13.334" v="64"/>
-          <ac:spMkLst>
-            <pc:docMk/>
-            <pc:sldMk cId="3031109688" sldId="266"/>
-            <ac:spMk id="6" creationId="{4142DFD2-B86D-13F1-78B2-C70BD72182A8}"/>
-          </ac:spMkLst>
-        </pc:spChg>
-      </pc:sldChg>
-      <pc:sldChg chg="modSp mod modClrScheme chgLayout">
-        <pc:chgData name="Jan Zika" userId="4bf9b42c52853174" providerId="LiveId" clId="{46F8914C-66B5-40A6-B3C4-591741F6FD80}" dt="2026-04-10T04:18:25.210" v="293" actId="700"/>
-        <pc:sldMkLst>
-          <pc:docMk/>
-          <pc:sldMk cId="915169219" sldId="267"/>
-        </pc:sldMkLst>
-        <pc:spChg chg="mod ord">
-          <ac:chgData name="Jan Zika" userId="4bf9b42c52853174" providerId="LiveId" clId="{46F8914C-66B5-40A6-B3C4-591741F6FD80}" dt="2026-04-10T04:18:25.210" v="293" actId="700"/>
-          <ac:spMkLst>
-            <pc:docMk/>
-            <pc:sldMk cId="915169219" sldId="267"/>
-            <ac:spMk id="2" creationId="{F21B4EDA-C1EA-695C-FFD0-C25A07CE61CB}"/>
-          </ac:spMkLst>
-        </pc:spChg>
-        <pc:spChg chg="mod ord">
-          <ac:chgData name="Jan Zika" userId="4bf9b42c52853174" providerId="LiveId" clId="{46F8914C-66B5-40A6-B3C4-591741F6FD80}" dt="2026-04-10T04:18:25.210" v="293" actId="700"/>
-          <ac:spMkLst>
-            <pc:docMk/>
-            <pc:sldMk cId="915169219" sldId="267"/>
-            <ac:spMk id="3" creationId="{E325C0FD-FFEE-F9D5-0E03-4CCDA55A2F1A}"/>
-          </ac:spMkLst>
-        </pc:spChg>
-        <pc:spChg chg="mod ord">
-          <ac:chgData name="Jan Zika" userId="4bf9b42c52853174" providerId="LiveId" clId="{46F8914C-66B5-40A6-B3C4-591741F6FD80}" dt="2026-04-10T04:18:25.210" v="293" actId="700"/>
-          <ac:spMkLst>
-            <pc:docMk/>
-            <pc:sldMk cId="915169219" sldId="267"/>
-            <ac:spMk id="4" creationId="{81D50559-27E9-F6F1-022B-CAFC3870B0D9}"/>
-          </ac:spMkLst>
-        </pc:spChg>
-        <pc:spChg chg="mod ord">
-          <ac:chgData name="Jan Zika" userId="4bf9b42c52853174" providerId="LiveId" clId="{46F8914C-66B5-40A6-B3C4-591741F6FD80}" dt="2026-04-10T04:18:25.210" v="293" actId="700"/>
-          <ac:spMkLst>
-            <pc:docMk/>
-            <pc:sldMk cId="915169219" sldId="267"/>
-            <ac:spMk id="5" creationId="{332385AA-8E43-D8B9-3D6D-85D1BB2CC62F}"/>
-          </ac:spMkLst>
-        </pc:spChg>
-        <pc:spChg chg="mod ord">
-          <ac:chgData name="Jan Zika" userId="4bf9b42c52853174" providerId="LiveId" clId="{46F8914C-66B5-40A6-B3C4-591741F6FD80}" dt="2026-04-10T04:18:25.210" v="293" actId="700"/>
-          <ac:spMkLst>
-            <pc:docMk/>
-            <pc:sldMk cId="915169219" sldId="267"/>
-            <ac:spMk id="6" creationId="{73BC68AF-D665-9D20-C827-0E822F0B32FF}"/>
-          </ac:spMkLst>
-        </pc:spChg>
-      </pc:sldChg>
-      <pc:sldChg chg="modSp mod">
-        <pc:chgData name="Jan Zika" userId="4bf9b42c52853174" providerId="LiveId" clId="{46F8914C-66B5-40A6-B3C4-591741F6FD80}" dt="2026-04-10T05:15:00.137" v="824" actId="27636"/>
-        <pc:sldMkLst>
-          <pc:docMk/>
-          <pc:sldMk cId="3371065868" sldId="268"/>
-        </pc:sldMkLst>
-        <pc:spChg chg="mod">
-          <ac:chgData name="Jan Zika" userId="4bf9b42c52853174" providerId="LiveId" clId="{46F8914C-66B5-40A6-B3C4-591741F6FD80}" dt="2026-04-10T05:13:43.247" v="799" actId="14100"/>
-          <ac:spMkLst>
-            <pc:docMk/>
-            <pc:sldMk cId="3371065868" sldId="268"/>
-            <ac:spMk id="7" creationId="{57D3EDD5-86F6-AC9C-E789-B8C864A9638B}"/>
-          </ac:spMkLst>
-        </pc:spChg>
-        <pc:spChg chg="mod">
-          <ac:chgData name="Jan Zika" userId="4bf9b42c52853174" providerId="LiveId" clId="{46F8914C-66B5-40A6-B3C4-591741F6FD80}" dt="2026-04-10T05:15:00.137" v="824" actId="27636"/>
-          <ac:spMkLst>
-            <pc:docMk/>
-            <pc:sldMk cId="3371065868" sldId="268"/>
-            <ac:spMk id="8" creationId="{6465E050-903F-A375-4DE4-3DA8DB8FB511}"/>
-          </ac:spMkLst>
-        </pc:spChg>
-      </pc:sldChg>
-      <pc:sldChg chg="modSp">
-        <pc:chgData name="Jan Zika" userId="4bf9b42c52853174" providerId="LiveId" clId="{46F8914C-66B5-40A6-B3C4-591741F6FD80}" dt="2026-04-10T02:34:13.334" v="64"/>
-        <pc:sldMkLst>
-          <pc:docMk/>
-          <pc:sldMk cId="3228971427" sldId="269"/>
-        </pc:sldMkLst>
-        <pc:spChg chg="mod">
-          <ac:chgData name="Jan Zika" userId="4bf9b42c52853174" providerId="LiveId" clId="{46F8914C-66B5-40A6-B3C4-591741F6FD80}" dt="2026-04-10T02:34:13.334" v="64"/>
-          <ac:spMkLst>
-            <pc:docMk/>
-            <pc:sldMk cId="3228971427" sldId="269"/>
-            <ac:spMk id="4" creationId="{974E829A-0EC9-10B0-FA03-6FA5D809EC6C}"/>
-          </ac:spMkLst>
-        </pc:spChg>
-      </pc:sldChg>
-      <pc:sldChg chg="modSp">
-        <pc:chgData name="Jan Zika" userId="4bf9b42c52853174" providerId="LiveId" clId="{46F8914C-66B5-40A6-B3C4-591741F6FD80}" dt="2026-04-10T02:34:13.334" v="64"/>
-        <pc:sldMkLst>
-          <pc:docMk/>
-          <pc:sldMk cId="1211680046" sldId="270"/>
-        </pc:sldMkLst>
-        <pc:spChg chg="mod">
-          <ac:chgData name="Jan Zika" userId="4bf9b42c52853174" providerId="LiveId" clId="{46F8914C-66B5-40A6-B3C4-591741F6FD80}" dt="2026-04-10T02:34:13.334" v="64"/>
-          <ac:spMkLst>
-            <pc:docMk/>
-            <pc:sldMk cId="1211680046" sldId="270"/>
-            <ac:spMk id="2" creationId="{28A8A83B-522F-F02C-EC7E-24EE632BD737}"/>
-          </ac:spMkLst>
-        </pc:spChg>
-      </pc:sldChg>
-      <pc:sldChg chg="modSp">
-        <pc:chgData name="Jan Zika" userId="4bf9b42c52853174" providerId="LiveId" clId="{46F8914C-66B5-40A6-B3C4-591741F6FD80}" dt="2026-04-10T02:34:13.334" v="64"/>
-        <pc:sldMkLst>
-          <pc:docMk/>
-          <pc:sldMk cId="2094397836" sldId="271"/>
-        </pc:sldMkLst>
-        <pc:spChg chg="mod">
-          <ac:chgData name="Jan Zika" userId="4bf9b42c52853174" providerId="LiveId" clId="{46F8914C-66B5-40A6-B3C4-591741F6FD80}" dt="2026-04-10T02:34:13.334" v="64"/>
-          <ac:spMkLst>
-            <pc:docMk/>
-            <pc:sldMk cId="2094397836" sldId="271"/>
-            <ac:spMk id="2" creationId="{C7C7E857-A13C-FD8A-0A01-C6E88D2B3E4D}"/>
-          </ac:spMkLst>
-        </pc:spChg>
-      </pc:sldChg>
-      <pc:sldChg chg="modSp">
-        <pc:chgData name="Jan Zika" userId="4bf9b42c52853174" providerId="LiveId" clId="{46F8914C-66B5-40A6-B3C4-591741F6FD80}" dt="2026-04-10T02:34:13.334" v="64"/>
-        <pc:sldMkLst>
-          <pc:docMk/>
-          <pc:sldMk cId="258549684" sldId="272"/>
-        </pc:sldMkLst>
-        <pc:spChg chg="mod">
-          <ac:chgData name="Jan Zika" userId="4bf9b42c52853174" providerId="LiveId" clId="{46F8914C-66B5-40A6-B3C4-591741F6FD80}" dt="2026-04-10T02:34:13.334" v="64"/>
-          <ac:spMkLst>
-            <pc:docMk/>
-            <pc:sldMk cId="258549684" sldId="272"/>
-            <ac:spMk id="2" creationId="{E59CF250-143D-5BE4-40F4-02D2CB3F7DF9}"/>
-          </ac:spMkLst>
-        </pc:spChg>
-      </pc:sldChg>
-      <pc:sldChg chg="modSp mod">
-        <pc:chgData name="Jan Zika" userId="4bf9b42c52853174" providerId="LiveId" clId="{46F8914C-66B5-40A6-B3C4-591741F6FD80}" dt="2026-04-10T05:10:54.172" v="781" actId="20577"/>
-        <pc:sldMkLst>
-          <pc:docMk/>
-          <pc:sldMk cId="2709810271" sldId="273"/>
-        </pc:sldMkLst>
-        <pc:spChg chg="mod">
-          <ac:chgData name="Jan Zika" userId="4bf9b42c52853174" providerId="LiveId" clId="{46F8914C-66B5-40A6-B3C4-591741F6FD80}" dt="2026-04-10T02:34:13.334" v="64"/>
-          <ac:spMkLst>
-            <pc:docMk/>
-            <pc:sldMk cId="2709810271" sldId="273"/>
-            <ac:spMk id="3" creationId="{32880FEB-BE65-21ED-4792-B04C7B6D5578}"/>
-          </ac:spMkLst>
-        </pc:spChg>
-        <pc:spChg chg="mod">
-          <ac:chgData name="Jan Zika" userId="4bf9b42c52853174" providerId="LiveId" clId="{46F8914C-66B5-40A6-B3C4-591741F6FD80}" dt="2026-04-10T05:10:54.172" v="781" actId="20577"/>
-          <ac:spMkLst>
-            <pc:docMk/>
-            <pc:sldMk cId="2709810271" sldId="273"/>
-            <ac:spMk id="4" creationId="{A742890E-BD76-D024-7C7E-B366CAE968C1}"/>
-          </ac:spMkLst>
-        </pc:spChg>
-      </pc:sldChg>
-      <pc:sldChg chg="modSp">
-        <pc:chgData name="Jan Zika" userId="4bf9b42c52853174" providerId="LiveId" clId="{46F8914C-66B5-40A6-B3C4-591741F6FD80}" dt="2026-04-10T02:34:13.334" v="64"/>
-        <pc:sldMkLst>
-          <pc:docMk/>
-          <pc:sldMk cId="3665320167" sldId="274"/>
-        </pc:sldMkLst>
-        <pc:spChg chg="mod">
-          <ac:chgData name="Jan Zika" userId="4bf9b42c52853174" providerId="LiveId" clId="{46F8914C-66B5-40A6-B3C4-591741F6FD80}" dt="2026-04-10T02:34:13.334" v="64"/>
-          <ac:spMkLst>
-            <pc:docMk/>
-            <pc:sldMk cId="3665320167" sldId="274"/>
-            <ac:spMk id="2" creationId="{EB1651C2-62F0-FE7B-AE38-04A33B9D81AB}"/>
-          </ac:spMkLst>
-        </pc:spChg>
-        <pc:spChg chg="mod">
-          <ac:chgData name="Jan Zika" userId="4bf9b42c52853174" providerId="LiveId" clId="{46F8914C-66B5-40A6-B3C4-591741F6FD80}" dt="2026-04-10T02:34:13.334" v="64"/>
-          <ac:spMkLst>
-            <pc:docMk/>
-            <pc:sldMk cId="3665320167" sldId="274"/>
-            <ac:spMk id="4" creationId="{ECDEFD25-0CC8-1D64-F10B-29AB5EF1C9EE}"/>
-          </ac:spMkLst>
-        </pc:spChg>
-      </pc:sldChg>
-      <pc:sldChg chg="modSp add mod ord">
-        <pc:chgData name="Jan Zika" userId="4bf9b42c52853174" providerId="LiveId" clId="{46F8914C-66B5-40A6-B3C4-591741F6FD80}" dt="2026-04-10T04:17:56.551" v="291"/>
-        <pc:sldMkLst>
-          <pc:docMk/>
-          <pc:sldMk cId="3389112081" sldId="275"/>
-        </pc:sldMkLst>
-        <pc:spChg chg="mod">
-          <ac:chgData name="Jan Zika" userId="4bf9b42c52853174" providerId="LiveId" clId="{46F8914C-66B5-40A6-B3C4-591741F6FD80}" dt="2026-04-10T04:16:09.614" v="229" actId="20577"/>
-          <ac:spMkLst>
-            <pc:docMk/>
-            <pc:sldMk cId="3389112081" sldId="275"/>
-            <ac:spMk id="3" creationId="{0B53A1A9-7387-5881-0778-6DA5664FE725}"/>
-          </ac:spMkLst>
-        </pc:spChg>
-        <pc:spChg chg="mod">
-          <ac:chgData name="Jan Zika" userId="4bf9b42c52853174" providerId="LiveId" clId="{46F8914C-66B5-40A6-B3C4-591741F6FD80}" dt="2026-04-10T04:17:33.743" v="289" actId="20577"/>
-          <ac:spMkLst>
-            <pc:docMk/>
-            <pc:sldMk cId="3389112081" sldId="275"/>
-            <ac:spMk id="4" creationId="{9431A33B-773B-E7D4-BA25-45D0180E31F9}"/>
-          </ac:spMkLst>
-        </pc:spChg>
-      </pc:sldChg>
-      <pc:sldChg chg="addSp delSp modSp new mod modClrScheme chgLayout">
-        <pc:chgData name="Jan Zika" userId="4bf9b42c52853174" providerId="LiveId" clId="{46F8914C-66B5-40A6-B3C4-591741F6FD80}" dt="2026-04-10T05:09:39.027" v="776" actId="1076"/>
-        <pc:sldMkLst>
-          <pc:docMk/>
-          <pc:sldMk cId="548087130" sldId="276"/>
-        </pc:sldMkLst>
-        <pc:spChg chg="del mod ord">
-          <ac:chgData name="Jan Zika" userId="4bf9b42c52853174" providerId="LiveId" clId="{46F8914C-66B5-40A6-B3C4-591741F6FD80}" dt="2026-04-10T04:18:49.333" v="295" actId="700"/>
-          <ac:spMkLst>
-            <pc:docMk/>
-            <pc:sldMk cId="548087130" sldId="276"/>
-            <ac:spMk id="2" creationId="{365F9687-0DCE-DA2E-0F66-5458F215B6B5}"/>
-          </ac:spMkLst>
-        </pc:spChg>
-        <pc:spChg chg="del mod ord">
-          <ac:chgData name="Jan Zika" userId="4bf9b42c52853174" providerId="LiveId" clId="{46F8914C-66B5-40A6-B3C4-591741F6FD80}" dt="2026-04-10T04:18:49.333" v="295" actId="700"/>
-          <ac:spMkLst>
-            <pc:docMk/>
-            <pc:sldMk cId="548087130" sldId="276"/>
-            <ac:spMk id="3" creationId="{61AA3141-EB8D-214B-08A3-7E766E40F039}"/>
-          </ac:spMkLst>
-        </pc:spChg>
-        <pc:spChg chg="add mod ord">
-          <ac:chgData name="Jan Zika" userId="4bf9b42c52853174" providerId="LiveId" clId="{46F8914C-66B5-40A6-B3C4-591741F6FD80}" dt="2026-04-10T04:36:52.692" v="357" actId="700"/>
-          <ac:spMkLst>
-            <pc:docMk/>
-            <pc:sldMk cId="548087130" sldId="276"/>
-            <ac:spMk id="4" creationId="{89F10180-2EC4-B2DC-F3C4-0427C506362D}"/>
-          </ac:spMkLst>
-        </pc:spChg>
-        <pc:spChg chg="add del mod ord">
-          <ac:chgData name="Jan Zika" userId="4bf9b42c52853174" providerId="LiveId" clId="{46F8914C-66B5-40A6-B3C4-591741F6FD80}" dt="2026-04-10T04:47:01.070" v="468" actId="3680"/>
-          <ac:spMkLst>
-            <pc:docMk/>
-            <pc:sldMk cId="548087130" sldId="276"/>
-            <ac:spMk id="5" creationId="{B55F36CB-5A1F-8F25-A219-6EB3E042A158}"/>
-          </ac:spMkLst>
-        </pc:spChg>
-        <pc:spChg chg="add mod ord">
-          <ac:chgData name="Jan Zika" userId="4bf9b42c52853174" providerId="LiveId" clId="{46F8914C-66B5-40A6-B3C4-591741F6FD80}" dt="2026-04-10T05:09:39.027" v="776" actId="1076"/>
-          <ac:spMkLst>
-            <pc:docMk/>
-            <pc:sldMk cId="548087130" sldId="276"/>
-            <ac:spMk id="6" creationId="{EF938AF4-F309-C5C4-0432-B8956E5C9ED9}"/>
-          </ac:spMkLst>
-        </pc:spChg>
-        <pc:graphicFrameChg chg="add mod ord modGraphic">
-          <ac:chgData name="Jan Zika" userId="4bf9b42c52853174" providerId="LiveId" clId="{46F8914C-66B5-40A6-B3C4-591741F6FD80}" dt="2026-04-10T05:09:00.587" v="774" actId="1076"/>
-          <ac:graphicFrameMkLst>
-            <pc:docMk/>
-            <pc:sldMk cId="548087130" sldId="276"/>
-            <ac:graphicFrameMk id="7" creationId="{3FEAFD7E-7479-AB71-8199-6899553B2D42}"/>
-          </ac:graphicFrameMkLst>
-        </pc:graphicFrameChg>
-      </pc:sldChg>
-    </pc:docChg>
-  </pc:docChgLst>
-</pc:chgInfo>
 </file>
 
 <file path=ppt/charts/chart1.xml><?xml version="1.0" encoding="utf-8"?>
@@ -10497,7 +9706,6 @@
               <a:rPr lang="en-US"/>
               <a:t>Click to edit Master title style</a:t>
             </a:r>
-            <a:endParaRPr lang="en-US" dirty="0"/>
           </a:p>
         </p:txBody>
       </p:sp>
@@ -10577,7 +9785,6 @@
               <a:rPr lang="en-US"/>
               <a:t>Click to edit Master subtitle style</a:t>
             </a:r>
-            <a:endParaRPr lang="en-US" dirty="0"/>
           </a:p>
         </p:txBody>
       </p:sp>
@@ -10736,7 +9943,6 @@
               <a:rPr lang="en-US"/>
               <a:t>Click to edit Master title style</a:t>
             </a:r>
-            <a:endParaRPr lang="en-US" dirty="0"/>
           </a:p>
         </p:txBody>
       </p:sp>
@@ -10788,7 +9994,6 @@
               <a:rPr lang="en-US"/>
               <a:t>Fifth level</a:t>
             </a:r>
-            <a:endParaRPr lang="en-US" dirty="0"/>
           </a:p>
         </p:txBody>
       </p:sp>
@@ -10911,7 +10116,6 @@
               <a:rPr lang="en-US"/>
               <a:t>Click to edit Master title style</a:t>
             </a:r>
-            <a:endParaRPr lang="en-US" dirty="0"/>
           </a:p>
         </p:txBody>
       </p:sp>
@@ -10968,7 +10172,6 @@
               <a:rPr lang="en-US"/>
               <a:t>Fifth level</a:t>
             </a:r>
-            <a:endParaRPr lang="en-US" dirty="0"/>
           </a:p>
         </p:txBody>
       </p:sp>
@@ -11121,7 +10324,6 @@
               <a:rPr lang="en-US"/>
               <a:t>Click to edit Master title style</a:t>
             </a:r>
-            <a:endParaRPr lang="en-US" dirty="0"/>
           </a:p>
         </p:txBody>
       </p:sp>
@@ -11173,7 +10375,6 @@
               <a:rPr lang="en-US"/>
               <a:t>Fifth level</a:t>
             </a:r>
-            <a:endParaRPr lang="en-US" dirty="0"/>
           </a:p>
         </p:txBody>
       </p:sp>
@@ -19957,7 +19158,6 @@
               <a:rPr lang="en-US"/>
               <a:t>Click to edit Master title style</a:t>
             </a:r>
-            <a:endParaRPr lang="en-US" dirty="0"/>
           </a:p>
         </p:txBody>
       </p:sp>
@@ -20245,7 +19445,6 @@
               <a:rPr lang="en-US"/>
               <a:t>Click to edit Master title style</a:t>
             </a:r>
-            <a:endParaRPr lang="en-US" dirty="0"/>
           </a:p>
         </p:txBody>
       </p:sp>
@@ -20302,7 +19501,6 @@
               <a:rPr lang="en-US"/>
               <a:t>Fifth level</a:t>
             </a:r>
-            <a:endParaRPr lang="en-US" dirty="0"/>
           </a:p>
         </p:txBody>
       </p:sp>
@@ -20359,7 +19557,6 @@
               <a:rPr lang="en-US"/>
               <a:t>Fifth level</a:t>
             </a:r>
-            <a:endParaRPr lang="en-US" dirty="0"/>
           </a:p>
         </p:txBody>
       </p:sp>
@@ -20477,7 +19674,6 @@
               <a:rPr lang="en-US"/>
               <a:t>Click to edit Master title style</a:t>
             </a:r>
-            <a:endParaRPr lang="en-US" dirty="0"/>
           </a:p>
         </p:txBody>
       </p:sp>
@@ -20612,7 +19808,6 @@
               <a:rPr lang="en-US"/>
               <a:t>Fifth level</a:t>
             </a:r>
-            <a:endParaRPr lang="en-US" dirty="0"/>
           </a:p>
         </p:txBody>
       </p:sp>
@@ -20757,7 +19952,6 @@
               <a:rPr lang="en-US"/>
               <a:t>Fifth level</a:t>
             </a:r>
-            <a:endParaRPr lang="en-US" dirty="0"/>
           </a:p>
         </p:txBody>
       </p:sp>
@@ -20875,7 +20069,6 @@
               <a:rPr lang="en-US"/>
               <a:t>Click to edit Master title style</a:t>
             </a:r>
-            <a:endParaRPr lang="en-US" dirty="0"/>
           </a:p>
         </p:txBody>
       </p:sp>
@@ -21102,7 +20295,6 @@
               <a:rPr lang="en-US"/>
               <a:t>Click to edit Master title style</a:t>
             </a:r>
-            <a:endParaRPr lang="en-US" dirty="0"/>
           </a:p>
         </p:txBody>
       </p:sp>
@@ -21187,7 +20379,6 @@
               <a:rPr lang="en-US"/>
               <a:t>Fifth level</a:t>
             </a:r>
-            <a:endParaRPr lang="en-US" dirty="0"/>
           </a:p>
         </p:txBody>
       </p:sp>
@@ -21389,7 +20580,6 @@
               <a:rPr lang="en-US"/>
               <a:t>Click to edit Master title style</a:t>
             </a:r>
-            <a:endParaRPr lang="en-US" dirty="0"/>
           </a:p>
         </p:txBody>
       </p:sp>
@@ -21460,7 +20650,6 @@
               <a:rPr lang="en-US"/>
               <a:t>Click icon to add picture</a:t>
             </a:r>
-            <a:endParaRPr lang="en-US" dirty="0"/>
           </a:p>
         </p:txBody>
       </p:sp>
@@ -21708,7 +20897,6 @@
               <a:rPr lang="en-US"/>
               <a:t>Click to edit Master title style</a:t>
             </a:r>
-            <a:endParaRPr lang="en-US" dirty="0"/>
           </a:p>
         </p:txBody>
       </p:sp>
@@ -21770,7 +20958,6 @@
               <a:rPr lang="en-US"/>
               <a:t>Fifth level</a:t>
             </a:r>
-            <a:endParaRPr lang="en-US" dirty="0"/>
           </a:p>
         </p:txBody>
       </p:sp>
@@ -22335,11 +21522,11 @@
           <a:lstStyle/>
           <a:p>
             <a:r>
-              <a:rPr lang="en-US" dirty="0" err="1"/>
+              <a:rPr lang="en-US" err="1"/>
               <a:t>Olist</a:t>
             </a:r>
             <a:r>
-              <a:rPr lang="en-US" dirty="0"/>
+              <a:rPr lang="en-US"/>
               <a:t> E-Commerce Analysis</a:t>
             </a:r>
           </a:p>
@@ -22369,13 +21556,13 @@
           <a:lstStyle/>
           <a:p>
             <a:r>
-              <a:rPr lang="en-US" dirty="0"/>
+              <a:rPr lang="en-US"/>
               <a:t>Azure SQL + T-SQL Database Analysis</a:t>
             </a:r>
           </a:p>
           <a:p>
             <a:r>
-              <a:rPr lang="en-US" dirty="0"/>
+              <a:rPr lang="en-US"/>
               <a:t>Michael Amaya | Vanessa Quiroz | Jan Zika</a:t>
             </a:r>
           </a:p>
@@ -22433,7 +21620,7 @@
           <a:lstStyle/>
           <a:p>
             <a:r>
-              <a:rPr lang="en-US" dirty="0"/>
+              <a:rPr lang="en-US"/>
               <a:t>Customer &amp; Delivery Behavior</a:t>
             </a:r>
           </a:p>
@@ -22461,7 +21648,7 @@
           <a:lstStyle/>
           <a:p>
             <a:r>
-              <a:rPr lang="en-US" dirty="0"/>
+              <a:rPr lang="en-US"/>
               <a:t>Michael Amaya | Q5–Q8</a:t>
             </a:r>
           </a:p>
@@ -22519,8 +21706,8 @@
           <a:lstStyle/>
           <a:p>
             <a:r>
-              <a:rPr lang="en-US" dirty="0"/>
-              <a:t>Delivery Time &amp; Customer Reviews</a:t>
+              <a:rPr lang="en-US"/>
+              <a:t>Delivery Time</a:t>
             </a:r>
           </a:p>
         </p:txBody>
@@ -22547,7 +21734,7 @@
           <a:lstStyle/>
           <a:p>
             <a:r>
-              <a:rPr lang="en-US" dirty="0"/>
+              <a:rPr lang="en-US"/>
               <a:t>Q5</a:t>
             </a:r>
           </a:p>
@@ -22569,78 +21756,93 @@
             <p:ph sz="half" idx="2"/>
           </p:nvPr>
         </p:nvSpPr>
-        <p:spPr/>
+        <p:spPr>
+          <a:xfrm>
+            <a:off x="1003598" y="3002596"/>
+            <a:ext cx="4754880" cy="3028261"/>
+          </a:xfrm>
+        </p:spPr>
         <p:txBody>
-          <a:bodyPr/>
+          <a:bodyPr>
+            <a:normAutofit/>
+          </a:bodyPr>
           <a:lstStyle/>
           <a:p>
+            <a:pPr marL="91440" lvl="1" indent="-91440">
+              <a:spcBef>
+                <a:spcPts val="1200"/>
+              </a:spcBef>
+              <a:spcAft>
+                <a:spcPts val="200"/>
+              </a:spcAft>
+              <a:buSzPct val="100000"/>
+              <a:buFont typeface="Tw Cen MT" panose="020B0602020104020603" pitchFamily="34" charset="0"/>
+              <a:buChar char=" "/>
+            </a:pPr>
             <a:r>
-              <a:rPr lang="en-US" dirty="0"/>
-              <a:t>TODO</a:t>
+              <a:rPr lang="en-US" sz="2200"/>
+              <a:t>91.88% On-Time Rate — High operational reliability.</a:t>
+            </a:r>
+          </a:p>
+          <a:p>
+            <a:pPr marL="91440" lvl="1" indent="-91440">
+              <a:spcBef>
+                <a:spcPts val="1200"/>
+              </a:spcBef>
+              <a:spcAft>
+                <a:spcPts val="200"/>
+              </a:spcAft>
+              <a:buSzPct val="100000"/>
+              <a:buFont typeface="Tw Cen MT" panose="020B0602020104020603" pitchFamily="34" charset="0"/>
+              <a:buChar char=" "/>
+            </a:pPr>
+            <a:r>
+              <a:rPr lang="en-US" sz="2200"/>
+              <a:t>1 in 12 Orders Late — 7,826 orders; significant service failure.</a:t>
             </a:r>
           </a:p>
         </p:txBody>
       </p:sp>
-      <p:sp>
-        <p:nvSpPr>
-          <p:cNvPr id="5" name="Text Placeholder 4">
+      <p:pic>
+        <p:nvPicPr>
+          <p:cNvPr id="12" name="Picture 11">
             <a:extLst>
               <a:ext uri="{FF2B5EF4-FFF2-40B4-BE49-F238E27FC236}">
-                <a16:creationId xmlns:a16="http://schemas.microsoft.com/office/drawing/2014/main" id="{5F0F5418-56A8-AEE0-C231-11278121AA9D}"/>
+                <a16:creationId xmlns:a16="http://schemas.microsoft.com/office/drawing/2014/main" id="{4C90502B-ACC9-BF04-B716-2D145AC663E8}"/>
               </a:ext>
             </a:extLst>
           </p:cNvPr>
-          <p:cNvSpPr>
-            <a:spLocks noGrp="1"/>
-          </p:cNvSpPr>
-          <p:nvPr>
-            <p:ph type="body" sz="quarter" idx="3"/>
-          </p:nvPr>
-        </p:nvSpPr>
-        <p:spPr/>
-        <p:txBody>
-          <a:bodyPr/>
-          <a:lstStyle/>
-          <a:p>
-            <a:r>
-              <a:rPr lang="en-US" dirty="0"/>
-              <a:t>Q6</a:t>
-            </a:r>
-          </a:p>
-        </p:txBody>
-      </p:sp>
-      <p:sp>
-        <p:nvSpPr>
-          <p:cNvPr id="6" name="Content Placeholder 5">
+          <p:cNvPicPr>
+            <a:picLocks noChangeAspect="1"/>
+          </p:cNvPicPr>
+          <p:nvPr/>
+        </p:nvPicPr>
+        <p:blipFill>
+          <a:blip r:embed="rId2">
             <a:extLst>
-              <a:ext uri="{FF2B5EF4-FFF2-40B4-BE49-F238E27FC236}">
-                <a16:creationId xmlns:a16="http://schemas.microsoft.com/office/drawing/2014/main" id="{2EF9F847-1D46-C17E-05CA-C013095844DE}"/>
+              <a:ext uri="{28A0092B-C50C-407E-A947-70E740481C1C}">
+                <a14:useLocalDpi xmlns:a14="http://schemas.microsoft.com/office/drawing/2010/main" val="0"/>
               </a:ext>
             </a:extLst>
-          </p:cNvPr>
-          <p:cNvSpPr>
-            <a:spLocks noGrp="1"/>
-          </p:cNvSpPr>
-          <p:nvPr>
-            <p:ph sz="quarter" idx="4"/>
-          </p:nvPr>
-        </p:nvSpPr>
-        <p:spPr/>
-        <p:txBody>
-          <a:bodyPr/>
-          <a:lstStyle/>
-          <a:p>
-            <a:r>
-              <a:rPr lang="en-US" dirty="0"/>
-              <a:t>TODO</a:t>
-            </a:r>
-          </a:p>
-        </p:txBody>
-      </p:sp>
+          </a:blip>
+          <a:stretch>
+            <a:fillRect/>
+          </a:stretch>
+        </p:blipFill>
+        <p:spPr>
+          <a:xfrm>
+            <a:off x="6096000" y="2179636"/>
+            <a:ext cx="5331124" cy="3453413"/>
+          </a:xfrm>
+          <a:prstGeom prst="rect">
+            <a:avLst/>
+          </a:prstGeom>
+        </p:spPr>
+      </p:pic>
     </p:spTree>
     <p:extLst>
       <p:ext uri="{BB962C8B-B14F-4D97-AF65-F5344CB8AC3E}">
-        <p14:creationId xmlns:p14="http://schemas.microsoft.com/office/powerpoint/2010/main" val="296423964"/>
+        <p14:creationId xmlns:p14="http://schemas.microsoft.com/office/powerpoint/2010/main" val="4055776411"/>
       </p:ext>
     </p:extLst>
   </p:cSld>
@@ -22651,6 +21853,665 @@
 </file>
 
 <file path=ppt/slides/slide12.xml><?xml version="1.0" encoding="utf-8"?>
+<p:sld xmlns:a="http://schemas.openxmlformats.org/drawingml/2006/main" xmlns:r="http://schemas.openxmlformats.org/officeDocument/2006/relationships" xmlns:p="http://schemas.openxmlformats.org/presentationml/2006/main">
+  <p:cSld>
+    <p:spTree>
+      <p:nvGrpSpPr>
+        <p:cNvPr id="1" name=""/>
+        <p:cNvGrpSpPr/>
+        <p:nvPr/>
+      </p:nvGrpSpPr>
+      <p:grpSpPr>
+        <a:xfrm>
+          <a:off x="0" y="0"/>
+          <a:ext cx="0" cy="0"/>
+          <a:chOff x="0" y="0"/>
+          <a:chExt cx="0" cy="0"/>
+        </a:xfrm>
+      </p:grpSpPr>
+      <p:sp>
+        <p:nvSpPr>
+          <p:cNvPr id="8" name="Title 1">
+            <a:extLst>
+              <a:ext uri="{FF2B5EF4-FFF2-40B4-BE49-F238E27FC236}">
+                <a16:creationId xmlns:a16="http://schemas.microsoft.com/office/drawing/2014/main" id="{C61C3193-7B08-9831-3254-C379A2178BCD}"/>
+              </a:ext>
+            </a:extLst>
+          </p:cNvPr>
+          <p:cNvSpPr txBox="1">
+            <a:spLocks/>
+          </p:cNvSpPr>
+          <p:nvPr/>
+        </p:nvSpPr>
+        <p:spPr>
+          <a:xfrm>
+            <a:off x="1024128" y="585216"/>
+            <a:ext cx="9720072" cy="1499616"/>
+          </a:xfrm>
+          <a:prstGeom prst="rect">
+            <a:avLst/>
+          </a:prstGeom>
+        </p:spPr>
+        <p:txBody>
+          <a:bodyPr vert="horz" lIns="91440" tIns="45720" rIns="91440" bIns="45720" rtlCol="0" anchor="ctr">
+            <a:normAutofit/>
+          </a:bodyPr>
+          <a:lstStyle>
+            <a:lvl1pPr algn="l" defTabSz="914400" rtl="0" eaLnBrk="1" latinLnBrk="0" hangingPunct="1">
+              <a:lnSpc>
+                <a:spcPct val="80000"/>
+              </a:lnSpc>
+              <a:spcBef>
+                <a:spcPct val="0"/>
+              </a:spcBef>
+              <a:buNone/>
+              <a:defRPr sz="5000" kern="1200" cap="all" spc="100" baseline="0">
+                <a:solidFill>
+                  <a:schemeClr val="tx1">
+                    <a:lumMod val="95000"/>
+                    <a:lumOff val="5000"/>
+                  </a:schemeClr>
+                </a:solidFill>
+                <a:latin typeface="+mj-lt"/>
+                <a:ea typeface="+mj-ea"/>
+                <a:cs typeface="+mj-cs"/>
+              </a:defRPr>
+            </a:lvl1pPr>
+          </a:lstStyle>
+          <a:p>
+            <a:r>
+              <a:rPr lang="en-US"/>
+              <a:t>Customer Reviews</a:t>
+            </a:r>
+          </a:p>
+        </p:txBody>
+      </p:sp>
+      <p:sp>
+        <p:nvSpPr>
+          <p:cNvPr id="10" name="Text Placeholder 4">
+            <a:extLst>
+              <a:ext uri="{FF2B5EF4-FFF2-40B4-BE49-F238E27FC236}">
+                <a16:creationId xmlns:a16="http://schemas.microsoft.com/office/drawing/2014/main" id="{00D39DAF-CA56-905C-25C5-09F008A51478}"/>
+              </a:ext>
+            </a:extLst>
+          </p:cNvPr>
+          <p:cNvSpPr txBox="1">
+            <a:spLocks/>
+          </p:cNvSpPr>
+          <p:nvPr/>
+        </p:nvSpPr>
+        <p:spPr>
+          <a:xfrm>
+            <a:off x="1024128" y="2149831"/>
+            <a:ext cx="4754880" cy="822960"/>
+          </a:xfrm>
+          <a:prstGeom prst="rect">
+            <a:avLst/>
+          </a:prstGeom>
+        </p:spPr>
+        <p:txBody>
+          <a:bodyPr vert="horz" lIns="137160" tIns="45720" rIns="137160" bIns="45720" rtlCol="0" anchor="ctr">
+            <a:normAutofit/>
+          </a:bodyPr>
+          <a:lstStyle>
+            <a:lvl1pPr marL="0" indent="0" algn="l" defTabSz="914400" rtl="0" eaLnBrk="1" latinLnBrk="0" hangingPunct="1">
+              <a:lnSpc>
+                <a:spcPct val="90000"/>
+              </a:lnSpc>
+              <a:spcBef>
+                <a:spcPts val="0"/>
+              </a:spcBef>
+              <a:spcAft>
+                <a:spcPts val="0"/>
+              </a:spcAft>
+              <a:buClr>
+                <a:schemeClr val="accent1"/>
+              </a:buClr>
+              <a:buSzPct val="100000"/>
+              <a:buFont typeface="Tw Cen MT" panose="020B0602020104020603" pitchFamily="34" charset="0"/>
+              <a:buNone/>
+              <a:defRPr lang="en-US" sz="2300" b="0" kern="1200" cap="none" baseline="0" dirty="0">
+                <a:solidFill>
+                  <a:schemeClr val="accent1"/>
+                </a:solidFill>
+                <a:latin typeface="+mn-lt"/>
+                <a:ea typeface="+mn-ea"/>
+                <a:cs typeface="+mn-cs"/>
+              </a:defRPr>
+            </a:lvl1pPr>
+            <a:lvl2pPr marL="457200" indent="0" algn="l" defTabSz="914400" rtl="0" eaLnBrk="1" latinLnBrk="0" hangingPunct="1">
+              <a:lnSpc>
+                <a:spcPct val="90000"/>
+              </a:lnSpc>
+              <a:spcBef>
+                <a:spcPts val="200"/>
+              </a:spcBef>
+              <a:spcAft>
+                <a:spcPts val="400"/>
+              </a:spcAft>
+              <a:buClr>
+                <a:schemeClr val="accent1"/>
+              </a:buClr>
+              <a:buFont typeface="Wingdings 3" pitchFamily="18" charset="2"/>
+              <a:buNone/>
+              <a:defRPr sz="2000" b="1" kern="1200">
+                <a:solidFill>
+                  <a:schemeClr val="tx1"/>
+                </a:solidFill>
+                <a:latin typeface="+mn-lt"/>
+                <a:ea typeface="+mn-ea"/>
+                <a:cs typeface="+mn-cs"/>
+              </a:defRPr>
+            </a:lvl2pPr>
+            <a:lvl3pPr marL="914400" indent="0" algn="l" defTabSz="914400" rtl="0" eaLnBrk="1" latinLnBrk="0" hangingPunct="1">
+              <a:lnSpc>
+                <a:spcPct val="90000"/>
+              </a:lnSpc>
+              <a:spcBef>
+                <a:spcPts val="200"/>
+              </a:spcBef>
+              <a:spcAft>
+                <a:spcPts val="400"/>
+              </a:spcAft>
+              <a:buClr>
+                <a:schemeClr val="accent1"/>
+              </a:buClr>
+              <a:buFont typeface="Wingdings 3" pitchFamily="18" charset="2"/>
+              <a:buNone/>
+              <a:defRPr sz="1800" b="1" kern="1200">
+                <a:solidFill>
+                  <a:schemeClr val="tx1"/>
+                </a:solidFill>
+                <a:latin typeface="+mn-lt"/>
+                <a:ea typeface="+mn-ea"/>
+                <a:cs typeface="+mn-cs"/>
+              </a:defRPr>
+            </a:lvl3pPr>
+            <a:lvl4pPr marL="1371600" indent="0" algn="l" defTabSz="914400" rtl="0" eaLnBrk="1" latinLnBrk="0" hangingPunct="1">
+              <a:lnSpc>
+                <a:spcPct val="90000"/>
+              </a:lnSpc>
+              <a:spcBef>
+                <a:spcPts val="200"/>
+              </a:spcBef>
+              <a:spcAft>
+                <a:spcPts val="400"/>
+              </a:spcAft>
+              <a:buClr>
+                <a:schemeClr val="accent1"/>
+              </a:buClr>
+              <a:buFont typeface="Wingdings 3" pitchFamily="18" charset="2"/>
+              <a:buNone/>
+              <a:defRPr sz="1600" b="1" kern="1200">
+                <a:solidFill>
+                  <a:schemeClr val="tx1"/>
+                </a:solidFill>
+                <a:latin typeface="+mn-lt"/>
+                <a:ea typeface="+mn-ea"/>
+                <a:cs typeface="+mn-cs"/>
+              </a:defRPr>
+            </a:lvl4pPr>
+            <a:lvl5pPr marL="1828800" indent="0" algn="l" defTabSz="914400" rtl="0" eaLnBrk="1" latinLnBrk="0" hangingPunct="1">
+              <a:lnSpc>
+                <a:spcPct val="90000"/>
+              </a:lnSpc>
+              <a:spcBef>
+                <a:spcPts val="200"/>
+              </a:spcBef>
+              <a:spcAft>
+                <a:spcPts val="400"/>
+              </a:spcAft>
+              <a:buClr>
+                <a:schemeClr val="accent1"/>
+              </a:buClr>
+              <a:buFont typeface="Wingdings 3" pitchFamily="18" charset="2"/>
+              <a:buNone/>
+              <a:defRPr sz="1600" b="1" kern="1200">
+                <a:solidFill>
+                  <a:schemeClr val="tx1"/>
+                </a:solidFill>
+                <a:latin typeface="+mn-lt"/>
+                <a:ea typeface="+mn-ea"/>
+                <a:cs typeface="+mn-cs"/>
+              </a:defRPr>
+            </a:lvl5pPr>
+            <a:lvl6pPr marL="2286000" indent="0" algn="l" defTabSz="914400" rtl="0" eaLnBrk="1" latinLnBrk="0" hangingPunct="1">
+              <a:lnSpc>
+                <a:spcPct val="90000"/>
+              </a:lnSpc>
+              <a:spcBef>
+                <a:spcPts val="200"/>
+              </a:spcBef>
+              <a:spcAft>
+                <a:spcPts val="400"/>
+              </a:spcAft>
+              <a:buClr>
+                <a:schemeClr val="accent1"/>
+              </a:buClr>
+              <a:buFont typeface="Wingdings 3" pitchFamily="18" charset="2"/>
+              <a:buNone/>
+              <a:defRPr sz="1600" b="1" kern="1200">
+                <a:solidFill>
+                  <a:schemeClr val="tx1"/>
+                </a:solidFill>
+                <a:latin typeface="+mn-lt"/>
+                <a:ea typeface="+mn-ea"/>
+                <a:cs typeface="+mn-cs"/>
+              </a:defRPr>
+            </a:lvl6pPr>
+            <a:lvl7pPr marL="2743200" indent="0" algn="l" defTabSz="914400" rtl="0" eaLnBrk="1" latinLnBrk="0" hangingPunct="1">
+              <a:lnSpc>
+                <a:spcPct val="90000"/>
+              </a:lnSpc>
+              <a:spcBef>
+                <a:spcPts val="200"/>
+              </a:spcBef>
+              <a:spcAft>
+                <a:spcPts val="400"/>
+              </a:spcAft>
+              <a:buClr>
+                <a:schemeClr val="accent1"/>
+              </a:buClr>
+              <a:buFont typeface="Wingdings 3" pitchFamily="18" charset="2"/>
+              <a:buNone/>
+              <a:defRPr sz="1600" b="1" kern="1200">
+                <a:solidFill>
+                  <a:schemeClr val="tx1"/>
+                </a:solidFill>
+                <a:latin typeface="+mn-lt"/>
+                <a:ea typeface="+mn-ea"/>
+                <a:cs typeface="+mn-cs"/>
+              </a:defRPr>
+            </a:lvl7pPr>
+            <a:lvl8pPr marL="3200400" indent="0" algn="l" defTabSz="914400" rtl="0" eaLnBrk="1" latinLnBrk="0" hangingPunct="1">
+              <a:lnSpc>
+                <a:spcPct val="90000"/>
+              </a:lnSpc>
+              <a:spcBef>
+                <a:spcPts val="200"/>
+              </a:spcBef>
+              <a:spcAft>
+                <a:spcPts val="400"/>
+              </a:spcAft>
+              <a:buClr>
+                <a:schemeClr val="accent1"/>
+              </a:buClr>
+              <a:buFont typeface="Wingdings 3" pitchFamily="18" charset="2"/>
+              <a:buNone/>
+              <a:defRPr sz="1600" b="1" kern="1200">
+                <a:solidFill>
+                  <a:schemeClr val="tx1"/>
+                </a:solidFill>
+                <a:latin typeface="+mn-lt"/>
+                <a:ea typeface="+mn-ea"/>
+                <a:cs typeface="+mn-cs"/>
+              </a:defRPr>
+            </a:lvl8pPr>
+            <a:lvl9pPr marL="3657600" indent="0" algn="l" defTabSz="914400" rtl="0" eaLnBrk="1" latinLnBrk="0" hangingPunct="1">
+              <a:lnSpc>
+                <a:spcPct val="90000"/>
+              </a:lnSpc>
+              <a:spcBef>
+                <a:spcPts val="200"/>
+              </a:spcBef>
+              <a:spcAft>
+                <a:spcPts val="400"/>
+              </a:spcAft>
+              <a:buClr>
+                <a:schemeClr val="accent1"/>
+              </a:buClr>
+              <a:buFont typeface="Wingdings 3" pitchFamily="18" charset="2"/>
+              <a:buNone/>
+              <a:defRPr sz="1600" b="1" kern="1200">
+                <a:solidFill>
+                  <a:schemeClr val="tx1"/>
+                </a:solidFill>
+                <a:latin typeface="+mn-lt"/>
+                <a:ea typeface="+mn-ea"/>
+                <a:cs typeface="+mn-cs"/>
+              </a:defRPr>
+            </a:lvl9pPr>
+          </a:lstStyle>
+          <a:p>
+            <a:r>
+              <a:rPr lang="en-US"/>
+              <a:t>Q6</a:t>
+            </a:r>
+          </a:p>
+        </p:txBody>
+      </p:sp>
+      <p:sp>
+        <p:nvSpPr>
+          <p:cNvPr id="11" name="Content Placeholder 5">
+            <a:extLst>
+              <a:ext uri="{FF2B5EF4-FFF2-40B4-BE49-F238E27FC236}">
+                <a16:creationId xmlns:a16="http://schemas.microsoft.com/office/drawing/2014/main" id="{2F055CA9-6B76-8E2A-D017-D0EDB7704AC8}"/>
+              </a:ext>
+            </a:extLst>
+          </p:cNvPr>
+          <p:cNvSpPr txBox="1">
+            <a:spLocks/>
+          </p:cNvSpPr>
+          <p:nvPr/>
+        </p:nvSpPr>
+        <p:spPr>
+          <a:xfrm>
+            <a:off x="955117" y="3037790"/>
+            <a:ext cx="4754880" cy="3009327"/>
+          </a:xfrm>
+          <a:prstGeom prst="rect">
+            <a:avLst/>
+          </a:prstGeom>
+        </p:spPr>
+        <p:txBody>
+          <a:bodyPr vert="horz" lIns="45720" tIns="45720" rIns="45720" bIns="45720" rtlCol="0">
+            <a:normAutofit/>
+          </a:bodyPr>
+          <a:lstStyle>
+            <a:lvl1pPr marL="91440" indent="-91440" algn="l" defTabSz="914400" rtl="0" eaLnBrk="1" latinLnBrk="0" hangingPunct="1">
+              <a:lnSpc>
+                <a:spcPct val="90000"/>
+              </a:lnSpc>
+              <a:spcBef>
+                <a:spcPts val="1200"/>
+              </a:spcBef>
+              <a:spcAft>
+                <a:spcPts val="200"/>
+              </a:spcAft>
+              <a:buClr>
+                <a:schemeClr val="accent1"/>
+              </a:buClr>
+              <a:buSzPct val="100000"/>
+              <a:buFont typeface="Tw Cen MT" panose="020B0602020104020603" pitchFamily="34" charset="0"/>
+              <a:buChar char=" "/>
+              <a:defRPr sz="2200" kern="1200">
+                <a:solidFill>
+                  <a:schemeClr val="tx1"/>
+                </a:solidFill>
+                <a:latin typeface="+mn-lt"/>
+                <a:ea typeface="+mn-ea"/>
+                <a:cs typeface="+mn-cs"/>
+              </a:defRPr>
+            </a:lvl1pPr>
+            <a:lvl2pPr marL="265176" indent="-137160" algn="l" defTabSz="914400" rtl="0" eaLnBrk="1" latinLnBrk="0" hangingPunct="1">
+              <a:lnSpc>
+                <a:spcPct val="90000"/>
+              </a:lnSpc>
+              <a:spcBef>
+                <a:spcPts val="200"/>
+              </a:spcBef>
+              <a:spcAft>
+                <a:spcPts val="400"/>
+              </a:spcAft>
+              <a:buClr>
+                <a:schemeClr val="accent1"/>
+              </a:buClr>
+              <a:buFont typeface="Wingdings 3" pitchFamily="18" charset="2"/>
+              <a:buChar char=""/>
+              <a:defRPr sz="1800" kern="1200">
+                <a:solidFill>
+                  <a:schemeClr val="tx1"/>
+                </a:solidFill>
+                <a:latin typeface="+mn-lt"/>
+                <a:ea typeface="+mn-ea"/>
+                <a:cs typeface="+mn-cs"/>
+              </a:defRPr>
+            </a:lvl2pPr>
+            <a:lvl3pPr marL="448056" indent="-137160" algn="l" defTabSz="914400" rtl="0" eaLnBrk="1" latinLnBrk="0" hangingPunct="1">
+              <a:lnSpc>
+                <a:spcPct val="90000"/>
+              </a:lnSpc>
+              <a:spcBef>
+                <a:spcPts val="200"/>
+              </a:spcBef>
+              <a:spcAft>
+                <a:spcPts val="400"/>
+              </a:spcAft>
+              <a:buClr>
+                <a:schemeClr val="accent1"/>
+              </a:buClr>
+              <a:buFont typeface="Wingdings 3" pitchFamily="18" charset="2"/>
+              <a:buChar char=""/>
+              <a:defRPr sz="1400" kern="1200">
+                <a:solidFill>
+                  <a:schemeClr val="tx1"/>
+                </a:solidFill>
+                <a:latin typeface="+mn-lt"/>
+                <a:ea typeface="+mn-ea"/>
+                <a:cs typeface="+mn-cs"/>
+              </a:defRPr>
+            </a:lvl3pPr>
+            <a:lvl4pPr marL="594360" indent="-137160" algn="l" defTabSz="914400" rtl="0" eaLnBrk="1" latinLnBrk="0" hangingPunct="1">
+              <a:lnSpc>
+                <a:spcPct val="90000"/>
+              </a:lnSpc>
+              <a:spcBef>
+                <a:spcPts val="200"/>
+              </a:spcBef>
+              <a:spcAft>
+                <a:spcPts val="400"/>
+              </a:spcAft>
+              <a:buClr>
+                <a:schemeClr val="accent1"/>
+              </a:buClr>
+              <a:buFont typeface="Wingdings 3" pitchFamily="18" charset="2"/>
+              <a:buChar char=""/>
+              <a:defRPr sz="1400" kern="1200">
+                <a:solidFill>
+                  <a:schemeClr val="tx1"/>
+                </a:solidFill>
+                <a:latin typeface="+mn-lt"/>
+                <a:ea typeface="+mn-ea"/>
+                <a:cs typeface="+mn-cs"/>
+              </a:defRPr>
+            </a:lvl4pPr>
+            <a:lvl5pPr marL="777240" indent="-137160" algn="l" defTabSz="914400" rtl="0" eaLnBrk="1" latinLnBrk="0" hangingPunct="1">
+              <a:lnSpc>
+                <a:spcPct val="90000"/>
+              </a:lnSpc>
+              <a:spcBef>
+                <a:spcPts val="200"/>
+              </a:spcBef>
+              <a:spcAft>
+                <a:spcPts val="400"/>
+              </a:spcAft>
+              <a:buClr>
+                <a:schemeClr val="accent1"/>
+              </a:buClr>
+              <a:buFont typeface="Wingdings 3" pitchFamily="18" charset="2"/>
+              <a:buChar char=""/>
+              <a:defRPr sz="1400" kern="1200">
+                <a:solidFill>
+                  <a:schemeClr val="tx1"/>
+                </a:solidFill>
+                <a:latin typeface="+mn-lt"/>
+                <a:ea typeface="+mn-ea"/>
+                <a:cs typeface="+mn-cs"/>
+              </a:defRPr>
+            </a:lvl5pPr>
+            <a:lvl6pPr marL="914400" indent="-137160" algn="l" defTabSz="914400" rtl="0" eaLnBrk="1" latinLnBrk="0" hangingPunct="1">
+              <a:lnSpc>
+                <a:spcPct val="90000"/>
+              </a:lnSpc>
+              <a:spcBef>
+                <a:spcPts val="200"/>
+              </a:spcBef>
+              <a:spcAft>
+                <a:spcPts val="400"/>
+              </a:spcAft>
+              <a:buClr>
+                <a:schemeClr val="accent1"/>
+              </a:buClr>
+              <a:buFont typeface="Wingdings 3" pitchFamily="18" charset="2"/>
+              <a:buChar char=""/>
+              <a:defRPr sz="1400" kern="1200">
+                <a:solidFill>
+                  <a:schemeClr val="tx1"/>
+                </a:solidFill>
+                <a:latin typeface="+mn-lt"/>
+                <a:ea typeface="+mn-ea"/>
+                <a:cs typeface="+mn-cs"/>
+              </a:defRPr>
+            </a:lvl6pPr>
+            <a:lvl7pPr marL="1060704" indent="-137160" algn="l" defTabSz="914400" rtl="0" eaLnBrk="1" latinLnBrk="0" hangingPunct="1">
+              <a:lnSpc>
+                <a:spcPct val="90000"/>
+              </a:lnSpc>
+              <a:spcBef>
+                <a:spcPts val="200"/>
+              </a:spcBef>
+              <a:spcAft>
+                <a:spcPts val="400"/>
+              </a:spcAft>
+              <a:buClr>
+                <a:schemeClr val="accent1"/>
+              </a:buClr>
+              <a:buFont typeface="Wingdings 3" pitchFamily="18" charset="2"/>
+              <a:buChar char=""/>
+              <a:defRPr sz="1400" kern="1200">
+                <a:solidFill>
+                  <a:schemeClr val="tx1"/>
+                </a:solidFill>
+                <a:latin typeface="+mn-lt"/>
+                <a:ea typeface="+mn-ea"/>
+                <a:cs typeface="+mn-cs"/>
+              </a:defRPr>
+            </a:lvl7pPr>
+            <a:lvl8pPr marL="1216152" indent="-137160" algn="l" defTabSz="914400" rtl="0" eaLnBrk="1" latinLnBrk="0" hangingPunct="1">
+              <a:lnSpc>
+                <a:spcPct val="90000"/>
+              </a:lnSpc>
+              <a:spcBef>
+                <a:spcPts val="200"/>
+              </a:spcBef>
+              <a:spcAft>
+                <a:spcPts val="400"/>
+              </a:spcAft>
+              <a:buClr>
+                <a:schemeClr val="accent1"/>
+              </a:buClr>
+              <a:buFont typeface="Wingdings 3" pitchFamily="18" charset="2"/>
+              <a:buChar char=""/>
+              <a:defRPr sz="1400" kern="1200">
+                <a:solidFill>
+                  <a:schemeClr val="tx1"/>
+                </a:solidFill>
+                <a:latin typeface="+mn-lt"/>
+                <a:ea typeface="+mn-ea"/>
+                <a:cs typeface="+mn-cs"/>
+              </a:defRPr>
+            </a:lvl8pPr>
+            <a:lvl9pPr marL="1362456" indent="-137160" algn="l" defTabSz="914400" rtl="0" eaLnBrk="1" latinLnBrk="0" hangingPunct="1">
+              <a:lnSpc>
+                <a:spcPct val="90000"/>
+              </a:lnSpc>
+              <a:spcBef>
+                <a:spcPts val="200"/>
+              </a:spcBef>
+              <a:spcAft>
+                <a:spcPts val="400"/>
+              </a:spcAft>
+              <a:buClr>
+                <a:schemeClr val="accent1"/>
+              </a:buClr>
+              <a:buFont typeface="Wingdings 3" pitchFamily="18" charset="2"/>
+              <a:buChar char=""/>
+              <a:defRPr sz="1400" kern="1200">
+                <a:solidFill>
+                  <a:schemeClr val="tx1"/>
+                </a:solidFill>
+                <a:latin typeface="+mn-lt"/>
+                <a:ea typeface="+mn-ea"/>
+                <a:cs typeface="+mn-cs"/>
+              </a:defRPr>
+            </a:lvl9pPr>
+          </a:lstStyle>
+          <a:p>
+            <a:pPr marL="91440" lvl="1" indent="-91440">
+              <a:spcBef>
+                <a:spcPts val="1200"/>
+              </a:spcBef>
+              <a:spcAft>
+                <a:spcPts val="200"/>
+              </a:spcAft>
+              <a:buSzPct val="100000"/>
+              <a:buFont typeface="Tw Cen MT" panose="020B0602020104020603" pitchFamily="34" charset="0"/>
+              <a:buChar char=" "/>
+            </a:pPr>
+            <a:r>
+              <a:rPr lang="en-US" sz="2200"/>
+              <a:t>57.78% 5-Star Reviews — Majority customer satisfaction.</a:t>
+            </a:r>
+          </a:p>
+          <a:p>
+            <a:pPr marL="91440" lvl="1" indent="-91440">
+              <a:spcBef>
+                <a:spcPts val="1200"/>
+              </a:spcBef>
+              <a:spcAft>
+                <a:spcPts val="200"/>
+              </a:spcAft>
+              <a:buSzPct val="100000"/>
+              <a:buFont typeface="Tw Cen MT" panose="020B0602020104020603" pitchFamily="34" charset="0"/>
+              <a:buChar char=" "/>
+            </a:pPr>
+            <a:r>
+              <a:rPr lang="en-US" sz="2200"/>
+              <a:t>11.51% 1-Star Reviews — Critical failure rate.</a:t>
+            </a:r>
+          </a:p>
+        </p:txBody>
+      </p:sp>
+      <p:pic>
+        <p:nvPicPr>
+          <p:cNvPr id="3" name="Picture 2">
+            <a:extLst>
+              <a:ext uri="{FF2B5EF4-FFF2-40B4-BE49-F238E27FC236}">
+                <a16:creationId xmlns:a16="http://schemas.microsoft.com/office/drawing/2014/main" id="{2F53C0F1-C870-7F9E-18C1-BBE00385AFA7}"/>
+              </a:ext>
+            </a:extLst>
+          </p:cNvPr>
+          <p:cNvPicPr>
+            <a:picLocks noChangeAspect="1"/>
+          </p:cNvPicPr>
+          <p:nvPr/>
+        </p:nvPicPr>
+        <p:blipFill>
+          <a:blip r:embed="rId2">
+            <a:extLst>
+              <a:ext uri="{28A0092B-C50C-407E-A947-70E740481C1C}">
+                <a14:useLocalDpi xmlns:a14="http://schemas.microsoft.com/office/drawing/2010/main" val="0"/>
+              </a:ext>
+            </a:extLst>
+          </a:blip>
+          <a:stretch>
+            <a:fillRect/>
+          </a:stretch>
+        </p:blipFill>
+        <p:spPr>
+          <a:xfrm>
+            <a:off x="6096000" y="2084832"/>
+            <a:ext cx="5572125" cy="3800475"/>
+          </a:xfrm>
+          <a:prstGeom prst="rect">
+            <a:avLst/>
+          </a:prstGeom>
+        </p:spPr>
+      </p:pic>
+    </p:spTree>
+    <p:extLst>
+      <p:ext uri="{BB962C8B-B14F-4D97-AF65-F5344CB8AC3E}">
+        <p14:creationId xmlns:p14="http://schemas.microsoft.com/office/powerpoint/2010/main" val="941279303"/>
+      </p:ext>
+    </p:extLst>
+  </p:cSld>
+  <p:clrMapOvr>
+    <a:masterClrMapping/>
+  </p:clrMapOvr>
+</p:sld>
+</file>
+
+<file path=ppt/slides/slide13.xml><?xml version="1.0" encoding="utf-8"?>
 <p:sld xmlns:a="http://schemas.openxmlformats.org/drawingml/2006/main" xmlns:r="http://schemas.openxmlformats.org/officeDocument/2006/relationships" xmlns:p="http://schemas.openxmlformats.org/presentationml/2006/main">
   <p:cSld>
     <p:spTree>
@@ -22689,7 +22550,7 @@
           <a:lstStyle/>
           <a:p>
             <a:r>
-              <a:rPr lang="en-US" dirty="0"/>
+              <a:rPr lang="en-US"/>
               <a:t>Order Insights</a:t>
             </a:r>
           </a:p>
@@ -22717,7 +22578,7 @@
           <a:lstStyle/>
           <a:p>
             <a:r>
-              <a:rPr lang="en-US" dirty="0"/>
+              <a:rPr lang="en-US"/>
               <a:t>Q7</a:t>
             </a:r>
           </a:p>
@@ -22739,14 +22600,149 @@
             <p:ph sz="half" idx="2"/>
           </p:nvPr>
         </p:nvSpPr>
+        <p:spPr>
+          <a:xfrm>
+            <a:off x="1024128" y="3002596"/>
+            <a:ext cx="4754880" cy="2941004"/>
+          </a:xfrm>
+        </p:spPr>
+        <p:txBody>
+          <a:bodyPr>
+            <a:normAutofit/>
+          </a:bodyPr>
+          <a:lstStyle/>
+          <a:p>
+            <a:pPr marL="91440" lvl="1" indent="-91440">
+              <a:spcBef>
+                <a:spcPts val="1200"/>
+              </a:spcBef>
+              <a:spcAft>
+                <a:spcPts val="200"/>
+              </a:spcAft>
+              <a:buSzPct val="100000"/>
+              <a:buFont typeface="Tw Cen MT" panose="020B0602020104020603" pitchFamily="34" charset="0"/>
+              <a:buChar char=" "/>
+            </a:pPr>
+            <a:r>
+              <a:rPr lang="en-US" sz="2200"/>
+              <a:t>3% Retention Rate — High dependency on new customer acquisition.</a:t>
+            </a:r>
+          </a:p>
+          <a:p>
+            <a:pPr marL="91440" lvl="1" indent="-91440">
+              <a:spcBef>
+                <a:spcPts val="1200"/>
+              </a:spcBef>
+              <a:spcAft>
+                <a:spcPts val="200"/>
+              </a:spcAft>
+              <a:buSzPct val="100000"/>
+              <a:buFont typeface="Tw Cen MT" panose="020B0602020104020603" pitchFamily="34" charset="0"/>
+              <a:buChar char=" "/>
+            </a:pPr>
+            <a:r>
+              <a:rPr lang="en-US" sz="2200"/>
+              <a:t>2,840 Repeat Customers — Minimal loyalty out of a 95k customer base.</a:t>
+            </a:r>
+          </a:p>
+        </p:txBody>
+      </p:sp>
+      <p:pic>
+        <p:nvPicPr>
+          <p:cNvPr id="6" name="Picture 5">
+            <a:extLst>
+              <a:ext uri="{FF2B5EF4-FFF2-40B4-BE49-F238E27FC236}">
+                <a16:creationId xmlns:a16="http://schemas.microsoft.com/office/drawing/2014/main" id="{EBEF3BAE-996C-3B2B-BE79-8762F740EDA8}"/>
+              </a:ext>
+            </a:extLst>
+          </p:cNvPr>
+          <p:cNvPicPr>
+            <a:picLocks noChangeAspect="1"/>
+          </p:cNvPicPr>
+          <p:nvPr/>
+        </p:nvPicPr>
+        <p:blipFill>
+          <a:blip r:embed="rId2">
+            <a:extLst>
+              <a:ext uri="{28A0092B-C50C-407E-A947-70E740481C1C}">
+                <a14:useLocalDpi xmlns:a14="http://schemas.microsoft.com/office/drawing/2010/main" val="0"/>
+              </a:ext>
+            </a:extLst>
+          </a:blip>
+          <a:stretch>
+            <a:fillRect/>
+          </a:stretch>
+        </p:blipFill>
+        <p:spPr>
+          <a:xfrm>
+            <a:off x="6096000" y="2084832"/>
+            <a:ext cx="5601419" cy="3829050"/>
+          </a:xfrm>
+          <a:prstGeom prst="rect">
+            <a:avLst/>
+          </a:prstGeom>
+        </p:spPr>
+      </p:pic>
+    </p:spTree>
+    <p:extLst>
+      <p:ext uri="{BB962C8B-B14F-4D97-AF65-F5344CB8AC3E}">
+        <p14:creationId xmlns:p14="http://schemas.microsoft.com/office/powerpoint/2010/main" val="3872746574"/>
+      </p:ext>
+    </p:extLst>
+  </p:cSld>
+  <p:clrMapOvr>
+    <a:masterClrMapping/>
+  </p:clrMapOvr>
+</p:sld>
+</file>
+
+<file path=ppt/slides/slide14.xml><?xml version="1.0" encoding="utf-8"?>
+<p:sld xmlns:a="http://schemas.openxmlformats.org/drawingml/2006/main" xmlns:r="http://schemas.openxmlformats.org/officeDocument/2006/relationships" xmlns:p="http://schemas.openxmlformats.org/presentationml/2006/main">
+  <p:cSld>
+    <p:spTree>
+      <p:nvGrpSpPr>
+        <p:cNvPr id="1" name="">
+          <a:extLst>
+            <a:ext uri="{FF2B5EF4-FFF2-40B4-BE49-F238E27FC236}">
+              <a16:creationId xmlns:a16="http://schemas.microsoft.com/office/drawing/2014/main" id="{73E4E41C-5668-E7EA-EBB3-7AD5BE5FE854}"/>
+            </a:ext>
+          </a:extLst>
+        </p:cNvPr>
+        <p:cNvGrpSpPr/>
+        <p:nvPr/>
+      </p:nvGrpSpPr>
+      <p:grpSpPr>
+        <a:xfrm>
+          <a:off x="0" y="0"/>
+          <a:ext cx="0" cy="0"/>
+          <a:chOff x="0" y="0"/>
+          <a:chExt cx="0" cy="0"/>
+        </a:xfrm>
+      </p:grpSpPr>
+      <p:sp>
+        <p:nvSpPr>
+          <p:cNvPr id="2" name="Title 1">
+            <a:extLst>
+              <a:ext uri="{FF2B5EF4-FFF2-40B4-BE49-F238E27FC236}">
+                <a16:creationId xmlns:a16="http://schemas.microsoft.com/office/drawing/2014/main" id="{8D0221CE-E2EF-AD9D-6AF2-4B49A62DE73E}"/>
+              </a:ext>
+            </a:extLst>
+          </p:cNvPr>
+          <p:cNvSpPr>
+            <a:spLocks noGrp="1"/>
+          </p:cNvSpPr>
+          <p:nvPr>
+            <p:ph type="title"/>
+          </p:nvPr>
+        </p:nvSpPr>
         <p:spPr/>
         <p:txBody>
           <a:bodyPr/>
           <a:lstStyle/>
           <a:p>
             <a:r>
-              <a:rPr lang="en-US" dirty="0"/>
-              <a:t>TODO</a:t>
+              <a:rPr lang="en-US"/>
+              <a:t>Order Insights</a:t>
             </a:r>
           </a:p>
         </p:txBody>
@@ -22756,7 +22752,7 @@
           <p:cNvPr id="5" name="Text Placeholder 4">
             <a:extLst>
               <a:ext uri="{FF2B5EF4-FFF2-40B4-BE49-F238E27FC236}">
-                <a16:creationId xmlns:a16="http://schemas.microsoft.com/office/drawing/2014/main" id="{5AFE4C2F-7FAD-2628-CE31-14ADE076AB8B}"/>
+                <a16:creationId xmlns:a16="http://schemas.microsoft.com/office/drawing/2014/main" id="{BB3C0572-3B29-2F3F-51E2-BD33B505EFB4}"/>
               </a:ext>
             </a:extLst>
           </p:cNvPr>
@@ -22767,13 +22763,18 @@
             <p:ph type="body" sz="quarter" idx="3"/>
           </p:nvPr>
         </p:nvSpPr>
-        <p:spPr/>
+        <p:spPr>
+          <a:xfrm>
+            <a:off x="1024128" y="2184898"/>
+            <a:ext cx="4754880" cy="822960"/>
+          </a:xfrm>
+        </p:spPr>
         <p:txBody>
           <a:bodyPr/>
           <a:lstStyle/>
           <a:p>
             <a:r>
-              <a:rPr lang="en-US" dirty="0"/>
+              <a:rPr lang="en-US"/>
               <a:t>Q8</a:t>
             </a:r>
           </a:p>
@@ -22784,7 +22785,7 @@
           <p:cNvPr id="6" name="Content Placeholder 5">
             <a:extLst>
               <a:ext uri="{FF2B5EF4-FFF2-40B4-BE49-F238E27FC236}">
-                <a16:creationId xmlns:a16="http://schemas.microsoft.com/office/drawing/2014/main" id="{86BFE0CA-2E02-792F-8BE4-233204DDE9A5}"/>
+                <a16:creationId xmlns:a16="http://schemas.microsoft.com/office/drawing/2014/main" id="{691C1823-A207-96D2-2AA5-C6ED1726C914}"/>
               </a:ext>
             </a:extLst>
           </p:cNvPr>
@@ -22795,22 +22796,110 @@
             <p:ph sz="quarter" idx="4"/>
           </p:nvPr>
         </p:nvSpPr>
-        <p:spPr/>
+        <p:spPr>
+          <a:xfrm>
+            <a:off x="1024128" y="3007858"/>
+            <a:ext cx="4754880" cy="3264926"/>
+          </a:xfrm>
+        </p:spPr>
         <p:txBody>
-          <a:bodyPr/>
+          <a:bodyPr vert="horz" lIns="45720" tIns="45720" rIns="45720" bIns="45720" rtlCol="0" anchor="t">
+            <a:normAutofit/>
+          </a:bodyPr>
           <a:lstStyle/>
           <a:p>
+            <a:pPr marL="91440" lvl="1" indent="-91440">
+              <a:spcBef>
+                <a:spcPts val="1200"/>
+              </a:spcBef>
+              <a:spcAft>
+                <a:spcPts val="200"/>
+              </a:spcAft>
+              <a:buSzPct val="100000"/>
+              <a:buFont typeface="Tw Cen MT" panose="020B0602020104020603" pitchFamily="34" charset="0"/>
+              <a:buChar char=" "/>
+            </a:pPr>
             <a:r>
-              <a:rPr lang="en-US" dirty="0"/>
-              <a:t>TODO</a:t>
+              <a:rPr lang="en-US" sz="2200"/>
+              <a:t>96,000+ Delivered — Successful large-scale distribution.</a:t>
+            </a:r>
+          </a:p>
+          <a:p>
+            <a:pPr marL="91440" lvl="1" indent="-91440">
+              <a:spcBef>
+                <a:spcPts val="1200"/>
+              </a:spcBef>
+              <a:spcAft>
+                <a:spcPts val="200"/>
+              </a:spcAft>
+              <a:buSzPct val="100000"/>
+              <a:buFont typeface="Tw Cen MT" panose="020B0602020104020603" pitchFamily="34" charset="0"/>
+              <a:buChar char=" "/>
+            </a:pPr>
+            <a:r>
+              <a:rPr lang="en-US" sz="2200"/>
+              <a:t>1,100 In-Flight — Active orders currently in processing or transit.</a:t>
+            </a:r>
+          </a:p>
+          <a:p>
+            <a:pPr marL="91440" lvl="1" indent="-91440">
+              <a:spcBef>
+                <a:spcPts val="1200"/>
+              </a:spcBef>
+              <a:spcAft>
+                <a:spcPts val="200"/>
+              </a:spcAft>
+              <a:buSzPct val="100000"/>
+              <a:buFont typeface="Tw Cen MT" panose="020B0602020104020603" pitchFamily="34" charset="0"/>
+              <a:buChar char=" "/>
+            </a:pPr>
+            <a:r>
+              <a:rPr lang="en-US" sz="2200"/>
+              <a:t>1,200 Lost Sales — Revenue lost to cancellations and inventory unavailability.</a:t>
             </a:r>
           </a:p>
         </p:txBody>
       </p:sp>
+      <p:pic>
+        <p:nvPicPr>
+          <p:cNvPr id="10" name="Picture 9">
+            <a:extLst>
+              <a:ext uri="{FF2B5EF4-FFF2-40B4-BE49-F238E27FC236}">
+                <a16:creationId xmlns:a16="http://schemas.microsoft.com/office/drawing/2014/main" id="{7543AD53-C0BD-D749-0645-E600526B80F6}"/>
+              </a:ext>
+            </a:extLst>
+          </p:cNvPr>
+          <p:cNvPicPr>
+            <a:picLocks noChangeAspect="1"/>
+          </p:cNvPicPr>
+          <p:nvPr/>
+        </p:nvPicPr>
+        <p:blipFill>
+          <a:blip r:embed="rId2">
+            <a:extLst>
+              <a:ext uri="{28A0092B-C50C-407E-A947-70E740481C1C}">
+                <a14:useLocalDpi xmlns:a14="http://schemas.microsoft.com/office/drawing/2010/main" val="0"/>
+              </a:ext>
+            </a:extLst>
+          </a:blip>
+          <a:stretch>
+            <a:fillRect/>
+          </a:stretch>
+        </p:blipFill>
+        <p:spPr>
+          <a:xfrm>
+            <a:off x="5884164" y="2084832"/>
+            <a:ext cx="5701111" cy="3800475"/>
+          </a:xfrm>
+          <a:prstGeom prst="rect">
+            <a:avLst/>
+          </a:prstGeom>
+        </p:spPr>
+      </p:pic>
     </p:spTree>
     <p:extLst>
       <p:ext uri="{BB962C8B-B14F-4D97-AF65-F5344CB8AC3E}">
-        <p14:creationId xmlns:p14="http://schemas.microsoft.com/office/powerpoint/2010/main" val="3907987761"/>
+        <p14:creationId xmlns:p14="http://schemas.microsoft.com/office/powerpoint/2010/main" val="995788191"/>
       </p:ext>
     </p:extLst>
   </p:cSld>
@@ -22820,7 +22909,7 @@
 </p:sld>
 </file>
 
-<file path=ppt/slides/slide13.xml><?xml version="1.0" encoding="utf-8"?>
+<file path=ppt/slides/slide15.xml><?xml version="1.0" encoding="utf-8"?>
 <p:sld xmlns:a="http://schemas.openxmlformats.org/drawingml/2006/main" xmlns:r="http://schemas.openxmlformats.org/officeDocument/2006/relationships" xmlns:p="http://schemas.openxmlformats.org/presentationml/2006/main">
   <p:cSld>
     <p:spTree>
@@ -22865,7 +22954,7 @@
           <a:lstStyle/>
           <a:p>
             <a:r>
-              <a:rPr lang="en-US" dirty="0"/>
+              <a:rPr lang="en-US"/>
               <a:t>Seller &amp; Product Performance</a:t>
             </a:r>
           </a:p>
@@ -22893,7 +22982,7 @@
           <a:lstStyle/>
           <a:p>
             <a:r>
-              <a:rPr lang="en-US" dirty="0"/>
+              <a:rPr lang="en-US"/>
               <a:t>Vanessa Quiroz | Q9–Q12</a:t>
             </a:r>
           </a:p>
@@ -22912,7 +23001,7 @@
 </p:sld>
 </file>
 
-<file path=ppt/slides/slide14.xml><?xml version="1.0" encoding="utf-8"?>
+<file path=ppt/slides/slide16.xml><?xml version="1.0" encoding="utf-8"?>
 <p:sld xmlns:a="http://schemas.openxmlformats.org/drawingml/2006/main" xmlns:r="http://schemas.openxmlformats.org/officeDocument/2006/relationships" xmlns:p="http://schemas.openxmlformats.org/presentationml/2006/main">
   <p:cSld>
     <p:spTree>
@@ -22953,41 +23042,21 @@
         </p:nvSpPr>
         <p:spPr/>
         <p:txBody>
-          <a:bodyPr/>
+          <a:bodyPr>
+            <a:normAutofit fontScale="90000"/>
+          </a:bodyPr>
           <a:lstStyle/>
           <a:p>
+            <a:br>
+              <a:rPr lang="en-US"/>
+            </a:br>
             <a:r>
-              <a:rPr lang="en-US" dirty="0"/>
-              <a:t>Top Seller &amp; Product Categories</a:t>
+              <a:rPr lang="en-US"/>
+              <a:t>Top Sellers by Revenue: Performance and Order Volume Comparison</a:t>
             </a:r>
           </a:p>
-        </p:txBody>
-      </p:sp>
-      <p:sp>
-        <p:nvSpPr>
-          <p:cNvPr id="3" name="Text Placeholder 2">
-            <a:extLst>
-              <a:ext uri="{FF2B5EF4-FFF2-40B4-BE49-F238E27FC236}">
-                <a16:creationId xmlns:a16="http://schemas.microsoft.com/office/drawing/2014/main" id="{A316A906-C107-5E79-375D-60A95F89C0E0}"/>
-              </a:ext>
-            </a:extLst>
-          </p:cNvPr>
-          <p:cNvSpPr>
-            <a:spLocks noGrp="1"/>
-          </p:cNvSpPr>
-          <p:nvPr>
-            <p:ph type="body" idx="1"/>
-          </p:nvPr>
-        </p:nvSpPr>
-        <p:spPr/>
-        <p:txBody>
-          <a:bodyPr/>
-          <a:lstStyle/>
           <a:p>
-            <a:r>
-              <a:rPr lang="en-US" dirty="0"/>
-              <a:t>Q9</a:t>
-            </a:r>
+            <a:endParaRPr lang="en-US"/>
           </a:p>
         </p:txBody>
       </p:sp>
@@ -23007,74 +23076,193 @@
             <p:ph sz="half" idx="2"/>
           </p:nvPr>
         </p:nvSpPr>
-        <p:spPr/>
+        <p:spPr>
+          <a:xfrm>
+            <a:off x="908943" y="2179207"/>
+            <a:ext cx="4887786" cy="4644059"/>
+          </a:xfrm>
+        </p:spPr>
         <p:txBody>
-          <a:bodyPr/>
+          <a:bodyPr vert="horz" lIns="45720" tIns="45720" rIns="45720" bIns="45720" rtlCol="0" anchor="t">
+            <a:normAutofit/>
+          </a:bodyPr>
           <a:lstStyle/>
           <a:p>
             <a:r>
-              <a:rPr lang="en-US" dirty="0"/>
-              <a:t>TODO</a:t>
+              <a:rPr lang="en-US" b="1">
+                <a:ea typeface="+mn-lt"/>
+                <a:cs typeface="+mn-lt"/>
+              </a:rPr>
+              <a:t>Key Insights: </a:t>
             </a:r>
+            <a:endParaRPr lang="en-US"/>
+          </a:p>
+          <a:p>
+            <a:r>
+              <a:rPr lang="en-US">
+                <a:ea typeface="+mn-lt"/>
+                <a:cs typeface="+mn-lt"/>
+              </a:rPr>
+              <a:t>Performance is not one-dimensional. </a:t>
+            </a:r>
+          </a:p>
+          <a:p>
+            <a:r>
+              <a:rPr lang="en-US" b="1">
+                <a:ea typeface="+mn-lt"/>
+                <a:cs typeface="+mn-lt"/>
+              </a:rPr>
+              <a:t>High volume - Lower Value sellers: </a:t>
+            </a:r>
+            <a:endParaRPr lang="en-US"/>
+          </a:p>
+          <a:p>
+            <a:pPr marL="264795" lvl="1">
+              <a:buFont typeface="Wingdings 3" panose="020B0602020104020603" pitchFamily="34" charset="0"/>
+              <a:buChar char=""/>
+            </a:pPr>
+            <a:r>
+              <a:rPr lang="en-US">
+                <a:ea typeface="+mn-lt"/>
+                <a:cs typeface="+mn-lt"/>
+              </a:rPr>
+              <a:t>Seller #3 - 1,806 orders, avg value $111</a:t>
+            </a:r>
+            <a:endParaRPr lang="en-US"/>
+          </a:p>
+          <a:p>
+            <a:pPr marL="264795" lvl="1">
+              <a:buFont typeface="Wingdings 3" panose="020B0602020104020603" pitchFamily="34" charset="0"/>
+              <a:buChar char=""/>
+            </a:pPr>
+            <a:r>
+              <a:rPr lang="en-US">
+                <a:ea typeface="+mn-lt"/>
+                <a:cs typeface="+mn-lt"/>
+              </a:rPr>
+              <a:t>Seller #7 - 1,314 orders, avg value $122</a:t>
+            </a:r>
+            <a:endParaRPr lang="en-US"/>
+          </a:p>
+          <a:p>
+            <a:r>
+              <a:rPr lang="en-US" b="1">
+                <a:ea typeface="+mn-lt"/>
+                <a:cs typeface="+mn-lt"/>
+              </a:rPr>
+              <a:t>Low volume - Higher value Sellers: </a:t>
+            </a:r>
+            <a:endParaRPr lang="en-US"/>
+          </a:p>
+          <a:p>
+            <a:pPr marL="264795" lvl="1">
+              <a:buFont typeface="Wingdings 3" panose="020B0602020104020603" pitchFamily="34" charset="0"/>
+              <a:buChar char=""/>
+            </a:pPr>
+            <a:r>
+              <a:rPr lang="en-US">
+                <a:ea typeface="+mn-lt"/>
+                <a:cs typeface="+mn-lt"/>
+              </a:rPr>
+              <a:t>Seller #2 - 358 orders, Avg value $622</a:t>
+            </a:r>
+            <a:endParaRPr lang="en-US"/>
+          </a:p>
+          <a:p>
+            <a:pPr marL="264795" lvl="1">
+              <a:buFont typeface="Wingdings 3" panose="020B0602020104020603" pitchFamily="34" charset="0"/>
+              <a:buChar char=""/>
+            </a:pPr>
+            <a:r>
+              <a:rPr lang="en-US">
+                <a:ea typeface="+mn-lt"/>
+                <a:cs typeface="+mn-lt"/>
+              </a:rPr>
+              <a:t>Seller #6 - 336 orders, avg value $525</a:t>
+            </a:r>
+            <a:endParaRPr lang="en-US"/>
+          </a:p>
+          <a:p>
+            <a:r>
+              <a:rPr lang="en-US" b="1">
+                <a:ea typeface="+mn-lt"/>
+                <a:cs typeface="+mn-lt"/>
+              </a:rPr>
+              <a:t>#1 seller is not the most efficient. </a:t>
+            </a:r>
+            <a:endParaRPr lang="en-US"/>
+          </a:p>
+          <a:p>
+            <a:pPr marL="264795" lvl="1">
+              <a:buFont typeface="Wingdings 3" panose="020B0602020104020603" pitchFamily="34" charset="0"/>
+              <a:buChar char=""/>
+            </a:pPr>
+            <a:r>
+              <a:rPr lang="en-US">
+                <a:ea typeface="+mn-lt"/>
+                <a:cs typeface="+mn-lt"/>
+              </a:rPr>
+              <a:t>Highest total revenue=$229K</a:t>
+            </a:r>
+            <a:endParaRPr lang="en-US"/>
+          </a:p>
+          <a:p>
+            <a:pPr marL="264795" lvl="1">
+              <a:buFont typeface="Wingdings 3" panose="020B0602020104020603" pitchFamily="34" charset="0"/>
+              <a:buChar char=""/>
+            </a:pPr>
+            <a:r>
+              <a:rPr lang="en-US">
+                <a:ea typeface="+mn-lt"/>
+                <a:cs typeface="+mn-lt"/>
+              </a:rPr>
+              <a:t>1,132 orders, avg value $203</a:t>
+            </a:r>
+            <a:endParaRPr lang="en-US"/>
+          </a:p>
+          <a:p>
+            <a:endParaRPr lang="en-US"/>
           </a:p>
         </p:txBody>
       </p:sp>
-      <p:sp>
-        <p:nvSpPr>
-          <p:cNvPr id="5" name="Text Placeholder 4">
+      <p:pic>
+        <p:nvPicPr>
+          <p:cNvPr id="9" name="Content Placeholder 8">
             <a:extLst>
               <a:ext uri="{FF2B5EF4-FFF2-40B4-BE49-F238E27FC236}">
-                <a16:creationId xmlns:a16="http://schemas.microsoft.com/office/drawing/2014/main" id="{9A09FA61-C792-E35D-F69C-7B50C4B74D29}"/>
+                <a16:creationId xmlns:a16="http://schemas.microsoft.com/office/drawing/2014/main" id="{2A5DA880-24F5-C1F5-0943-2B1317ADBD75}"/>
               </a:ext>
             </a:extLst>
           </p:cNvPr>
-          <p:cNvSpPr>
-            <a:spLocks noGrp="1"/>
-          </p:cNvSpPr>
-          <p:nvPr>
-            <p:ph type="body" sz="quarter" idx="3"/>
-          </p:nvPr>
-        </p:nvSpPr>
-        <p:spPr/>
-        <p:txBody>
-          <a:bodyPr/>
-          <a:lstStyle/>
-          <a:p>
-            <a:r>
-              <a:rPr lang="en-US" dirty="0"/>
-              <a:t>Q10</a:t>
-            </a:r>
-          </a:p>
-        </p:txBody>
-      </p:sp>
-      <p:sp>
-        <p:nvSpPr>
-          <p:cNvPr id="6" name="Content Placeholder 5">
-            <a:extLst>
-              <a:ext uri="{FF2B5EF4-FFF2-40B4-BE49-F238E27FC236}">
-                <a16:creationId xmlns:a16="http://schemas.microsoft.com/office/drawing/2014/main" id="{4142DFD2-B86D-13F1-78B2-C70BD72182A8}"/>
-              </a:ext>
-            </a:extLst>
-          </p:cNvPr>
-          <p:cNvSpPr>
-            <a:spLocks noGrp="1"/>
-          </p:cNvSpPr>
+          <p:cNvPicPr>
+            <a:picLocks noGrp="1" noChangeAspect="1"/>
+          </p:cNvPicPr>
           <p:nvPr>
             <p:ph sz="quarter" idx="4"/>
           </p:nvPr>
-        </p:nvSpPr>
-        <p:spPr/>
-        <p:txBody>
-          <a:bodyPr/>
-          <a:lstStyle/>
-          <a:p>
-            <a:r>
-              <a:rPr lang="en-US" dirty="0"/>
-              <a:t>TODO</a:t>
-            </a:r>
-          </a:p>
-        </p:txBody>
-      </p:sp>
+        </p:nvPicPr>
+        <p:blipFill>
+          <a:blip r:embed="rId2">
+            <a:extLst>
+              <a:ext uri="{28A0092B-C50C-407E-A947-70E740481C1C}">
+                <a14:useLocalDpi xmlns:a14="http://schemas.microsoft.com/office/drawing/2010/main" val="0"/>
+              </a:ext>
+            </a:extLst>
+          </a:blip>
+          <a:stretch>
+            <a:fillRect/>
+          </a:stretch>
+        </p:blipFill>
+        <p:spPr>
+          <a:xfrm>
+            <a:off x="5205683" y="2661929"/>
+            <a:ext cx="6784924" cy="3445256"/>
+          </a:xfrm>
+          <a:prstGeom prst="rect">
+            <a:avLst/>
+          </a:prstGeom>
+        </p:spPr>
+      </p:pic>
     </p:spTree>
     <p:extLst>
       <p:ext uri="{BB962C8B-B14F-4D97-AF65-F5344CB8AC3E}">
@@ -23088,7 +23276,175 @@
 </p:sld>
 </file>
 
-<file path=ppt/slides/slide15.xml><?xml version="1.0" encoding="utf-8"?>
+<file path=ppt/slides/slide17.xml><?xml version="1.0" encoding="utf-8"?>
+<p:sld xmlns:a="http://schemas.openxmlformats.org/drawingml/2006/main" xmlns:r="http://schemas.openxmlformats.org/officeDocument/2006/relationships" xmlns:p="http://schemas.openxmlformats.org/presentationml/2006/main">
+  <p:cSld>
+    <p:spTree>
+      <p:nvGrpSpPr>
+        <p:cNvPr id="1" name="">
+          <a:extLst>
+            <a:ext uri="{FF2B5EF4-FFF2-40B4-BE49-F238E27FC236}">
+              <a16:creationId xmlns:a16="http://schemas.microsoft.com/office/drawing/2014/main" id="{9556DBD7-B02A-859D-259A-DEFCECA2CC6F}"/>
+            </a:ext>
+          </a:extLst>
+        </p:cNvPr>
+        <p:cNvGrpSpPr/>
+        <p:nvPr/>
+      </p:nvGrpSpPr>
+      <p:grpSpPr>
+        <a:xfrm>
+          <a:off x="0" y="0"/>
+          <a:ext cx="0" cy="0"/>
+          <a:chOff x="0" y="0"/>
+          <a:chExt cx="0" cy="0"/>
+        </a:xfrm>
+      </p:grpSpPr>
+      <p:sp>
+        <p:nvSpPr>
+          <p:cNvPr id="2" name="Title 1">
+            <a:extLst>
+              <a:ext uri="{FF2B5EF4-FFF2-40B4-BE49-F238E27FC236}">
+                <a16:creationId xmlns:a16="http://schemas.microsoft.com/office/drawing/2014/main" id="{DB9A8932-EDCF-DE39-93DC-F93CCE10DBF7}"/>
+              </a:ext>
+            </a:extLst>
+          </p:cNvPr>
+          <p:cNvSpPr>
+            <a:spLocks noGrp="1"/>
+          </p:cNvSpPr>
+          <p:nvPr>
+            <p:ph type="title"/>
+          </p:nvPr>
+        </p:nvSpPr>
+        <p:spPr/>
+        <p:txBody>
+          <a:bodyPr/>
+          <a:lstStyle/>
+          <a:p>
+            <a:r>
+              <a:rPr lang="en-US"/>
+              <a:t>Most Popular Product Categories by Volume</a:t>
+            </a:r>
+          </a:p>
+        </p:txBody>
+      </p:sp>
+      <p:sp>
+        <p:nvSpPr>
+          <p:cNvPr id="4" name="Content Placeholder 3">
+            <a:extLst>
+              <a:ext uri="{FF2B5EF4-FFF2-40B4-BE49-F238E27FC236}">
+                <a16:creationId xmlns:a16="http://schemas.microsoft.com/office/drawing/2014/main" id="{CB9C271C-DCA5-3F32-A461-427150EF338D}"/>
+              </a:ext>
+            </a:extLst>
+          </p:cNvPr>
+          <p:cNvSpPr>
+            <a:spLocks noGrp="1"/>
+          </p:cNvSpPr>
+          <p:nvPr>
+            <p:ph sz="half" idx="2"/>
+          </p:nvPr>
+        </p:nvSpPr>
+        <p:spPr/>
+        <p:txBody>
+          <a:bodyPr/>
+          <a:lstStyle/>
+          <a:p>
+            <a:r>
+              <a:rPr lang="en-US"/>
+              <a:t>Key Insights:</a:t>
+            </a:r>
+          </a:p>
+          <a:p>
+            <a:pPr lvl="1">
+              <a:buClr>
+                <a:schemeClr val="tx1"/>
+              </a:buClr>
+              <a:buFont typeface="Arial" panose="020B0604020202020204" pitchFamily="34" charset="0"/>
+              <a:buChar char="•"/>
+            </a:pPr>
+            <a:r>
+              <a:rPr lang="en-US"/>
+              <a:t>Home-related products dominate demand.</a:t>
+            </a:r>
+          </a:p>
+          <a:p>
+            <a:pPr lvl="1">
+              <a:buClr>
+                <a:schemeClr val="tx1"/>
+              </a:buClr>
+              <a:buFont typeface="Arial" panose="020B0604020202020204" pitchFamily="34" charset="0"/>
+              <a:buChar char="•"/>
+            </a:pPr>
+            <a:r>
+              <a:rPr lang="en-US"/>
+              <a:t>Demand is relatively concentrated at the top</a:t>
+            </a:r>
+          </a:p>
+          <a:p>
+            <a:pPr marL="128016" lvl="1" indent="0">
+              <a:buClr>
+                <a:schemeClr val="tx1"/>
+              </a:buClr>
+              <a:buNone/>
+            </a:pPr>
+            <a:r>
+              <a:rPr lang="en-US"/>
+              <a:t>* Category names were translated from Portuguese to English to improve clarity and interpretability.</a:t>
+            </a:r>
+          </a:p>
+        </p:txBody>
+      </p:sp>
+      <p:pic>
+        <p:nvPicPr>
+          <p:cNvPr id="8" name="Content Placeholder 7">
+            <a:extLst>
+              <a:ext uri="{FF2B5EF4-FFF2-40B4-BE49-F238E27FC236}">
+                <a16:creationId xmlns:a16="http://schemas.microsoft.com/office/drawing/2014/main" id="{0418AE5F-2FDD-4E03-D4F5-A66B967731E4}"/>
+              </a:ext>
+            </a:extLst>
+          </p:cNvPr>
+          <p:cNvPicPr>
+            <a:picLocks noGrp="1" noChangeAspect="1"/>
+          </p:cNvPicPr>
+          <p:nvPr>
+            <p:ph sz="quarter" idx="4"/>
+          </p:nvPr>
+        </p:nvPicPr>
+        <p:blipFill>
+          <a:blip r:embed="rId2">
+            <a:extLst>
+              <a:ext uri="{28A0092B-C50C-407E-A947-70E740481C1C}">
+                <a14:useLocalDpi xmlns:a14="http://schemas.microsoft.com/office/drawing/2010/main" val="0"/>
+              </a:ext>
+            </a:extLst>
+          </a:blip>
+          <a:stretch>
+            <a:fillRect/>
+          </a:stretch>
+        </p:blipFill>
+        <p:spPr>
+          <a:xfrm>
+            <a:off x="5671201" y="2797730"/>
+            <a:ext cx="6228074" cy="2331692"/>
+          </a:xfrm>
+          <a:prstGeom prst="rect">
+            <a:avLst/>
+          </a:prstGeom>
+        </p:spPr>
+      </p:pic>
+    </p:spTree>
+    <p:extLst>
+      <p:ext uri="{BB962C8B-B14F-4D97-AF65-F5344CB8AC3E}">
+        <p14:creationId xmlns:p14="http://schemas.microsoft.com/office/powerpoint/2010/main" val="959580799"/>
+      </p:ext>
+    </p:extLst>
+  </p:cSld>
+  <p:clrMapOvr>
+    <a:masterClrMapping/>
+  </p:clrMapOvr>
+</p:sld>
+</file>
+
+<file path=ppt/slides/slide18.xml><?xml version="1.0" encoding="utf-8"?>
 <p:sld xmlns:a="http://schemas.openxmlformats.org/drawingml/2006/main" xmlns:r="http://schemas.openxmlformats.org/officeDocument/2006/relationships" xmlns:p="http://schemas.openxmlformats.org/presentationml/2006/main">
   <p:cSld>
     <p:spTree>
@@ -23127,42 +23483,19 @@
             <p:ph type="title"/>
           </p:nvPr>
         </p:nvSpPr>
-        <p:spPr/>
+        <p:spPr>
+          <a:xfrm>
+            <a:off x="1024128" y="585216"/>
+            <a:ext cx="10115540" cy="1499616"/>
+          </a:xfrm>
+        </p:spPr>
         <p:txBody>
           <a:bodyPr/>
           <a:lstStyle/>
           <a:p>
             <a:r>
-              <a:rPr lang="en-US" dirty="0"/>
-              <a:t>Lead Sources &amp; Freight Cost</a:t>
-            </a:r>
-          </a:p>
-        </p:txBody>
-      </p:sp>
-      <p:sp>
-        <p:nvSpPr>
-          <p:cNvPr id="5" name="Text Placeholder 4">
-            <a:extLst>
-              <a:ext uri="{FF2B5EF4-FFF2-40B4-BE49-F238E27FC236}">
-                <a16:creationId xmlns:a16="http://schemas.microsoft.com/office/drawing/2014/main" id="{332385AA-8E43-D8B9-3D6D-85D1BB2CC62F}"/>
-              </a:ext>
-            </a:extLst>
-          </p:cNvPr>
-          <p:cNvSpPr>
-            <a:spLocks noGrp="1"/>
-          </p:cNvSpPr>
-          <p:nvPr>
-            <p:ph type="body" sz="quarter" idx="3"/>
-          </p:nvPr>
-        </p:nvSpPr>
-        <p:spPr/>
-        <p:txBody>
-          <a:bodyPr/>
-          <a:lstStyle/>
-          <a:p>
-            <a:r>
-              <a:rPr lang="en-US" dirty="0"/>
-              <a:t>Q12</a:t>
+              <a:rPr lang="en-US"/>
+              <a:t>Relationship Between Product Weight and Freight Cost</a:t>
             </a:r>
           </a:p>
         </p:txBody>
@@ -23183,149 +23516,12 @@
             <p:ph type="body" idx="1"/>
           </p:nvPr>
         </p:nvSpPr>
-        <p:spPr/>
-        <p:txBody>
-          <a:bodyPr/>
-          <a:lstStyle/>
-          <a:p>
-            <a:r>
-              <a:rPr lang="en-US" dirty="0"/>
-              <a:t>Q11</a:t>
-            </a:r>
-          </a:p>
-        </p:txBody>
-      </p:sp>
-      <p:sp>
-        <p:nvSpPr>
-          <p:cNvPr id="4" name="Content Placeholder 3">
-            <a:extLst>
-              <a:ext uri="{FF2B5EF4-FFF2-40B4-BE49-F238E27FC236}">
-                <a16:creationId xmlns:a16="http://schemas.microsoft.com/office/drawing/2014/main" id="{81D50559-27E9-F6F1-022B-CAFC3870B0D9}"/>
-              </a:ext>
-            </a:extLst>
-          </p:cNvPr>
-          <p:cNvSpPr>
-            <a:spLocks noGrp="1"/>
-          </p:cNvSpPr>
-          <p:nvPr>
-            <p:ph sz="half" idx="2"/>
-          </p:nvPr>
-        </p:nvSpPr>
-        <p:spPr/>
-        <p:txBody>
-          <a:bodyPr/>
-          <a:lstStyle/>
-          <a:p>
-            <a:r>
-              <a:rPr lang="en-US" dirty="0"/>
-              <a:t>TODO</a:t>
-            </a:r>
-          </a:p>
-        </p:txBody>
-      </p:sp>
-      <p:sp>
-        <p:nvSpPr>
-          <p:cNvPr id="6" name="Content Placeholder 5">
-            <a:extLst>
-              <a:ext uri="{FF2B5EF4-FFF2-40B4-BE49-F238E27FC236}">
-                <a16:creationId xmlns:a16="http://schemas.microsoft.com/office/drawing/2014/main" id="{73BC68AF-D665-9D20-C827-0E822F0B32FF}"/>
-              </a:ext>
-            </a:extLst>
-          </p:cNvPr>
-          <p:cNvSpPr>
-            <a:spLocks noGrp="1"/>
-          </p:cNvSpPr>
-          <p:nvPr>
-            <p:ph sz="quarter" idx="4"/>
-          </p:nvPr>
-        </p:nvSpPr>
-        <p:spPr/>
-        <p:txBody>
-          <a:bodyPr/>
-          <a:lstStyle/>
-          <a:p>
-            <a:r>
-              <a:rPr lang="en-US" dirty="0"/>
-              <a:t>TODO</a:t>
-            </a:r>
-          </a:p>
-        </p:txBody>
-      </p:sp>
-    </p:spTree>
-    <p:extLst>
-      <p:ext uri="{BB962C8B-B14F-4D97-AF65-F5344CB8AC3E}">
-        <p14:creationId xmlns:p14="http://schemas.microsoft.com/office/powerpoint/2010/main" val="915169219"/>
-      </p:ext>
-    </p:extLst>
-  </p:cSld>
-  <p:clrMapOvr>
-    <a:masterClrMapping/>
-  </p:clrMapOvr>
-</p:sld>
-</file>
-
-<file path=ppt/slides/slide16.xml><?xml version="1.0" encoding="utf-8"?>
-<p:sld xmlns:a="http://schemas.openxmlformats.org/drawingml/2006/main" xmlns:r="http://schemas.openxmlformats.org/officeDocument/2006/relationships" xmlns:p="http://schemas.openxmlformats.org/presentationml/2006/main">
-  <p:cSld>
-    <p:spTree>
-      <p:nvGrpSpPr>
-        <p:cNvPr id="1" name=""/>
-        <p:cNvGrpSpPr/>
-        <p:nvPr/>
-      </p:nvGrpSpPr>
-      <p:grpSpPr>
-        <a:xfrm>
-          <a:off x="0" y="0"/>
-          <a:ext cx="0" cy="0"/>
-          <a:chOff x="0" y="0"/>
-          <a:chExt cx="0" cy="0"/>
-        </a:xfrm>
-      </p:grpSpPr>
-      <p:sp>
-        <p:nvSpPr>
-          <p:cNvPr id="7" name="Title 6">
-            <a:extLst>
-              <a:ext uri="{FF2B5EF4-FFF2-40B4-BE49-F238E27FC236}">
-                <a16:creationId xmlns:a16="http://schemas.microsoft.com/office/drawing/2014/main" id="{57D3EDD5-86F6-AC9C-E789-B8C864A9638B}"/>
-              </a:ext>
-            </a:extLst>
-          </p:cNvPr>
-          <p:cNvSpPr>
-            <a:spLocks noGrp="1"/>
-          </p:cNvSpPr>
-          <p:nvPr>
-            <p:ph type="title"/>
-          </p:nvPr>
-        </p:nvSpPr>
-        <p:spPr/>
-        <p:txBody>
-          <a:bodyPr/>
-          <a:lstStyle/>
-          <a:p>
-            <a:r>
-              <a:rPr lang="en-US" dirty="0"/>
-              <a:t>Visualizations</a:t>
-            </a:r>
-          </a:p>
-        </p:txBody>
-      </p:sp>
-      <p:sp>
-        <p:nvSpPr>
-          <p:cNvPr id="8" name="Text Placeholder 7">
-            <a:extLst>
-              <a:ext uri="{FF2B5EF4-FFF2-40B4-BE49-F238E27FC236}">
-                <a16:creationId xmlns:a16="http://schemas.microsoft.com/office/drawing/2014/main" id="{6465E050-903F-A375-4DE4-3DA8DB8FB511}"/>
-              </a:ext>
-            </a:extLst>
-          </p:cNvPr>
-          <p:cNvSpPr>
-            <a:spLocks noGrp="1"/>
-          </p:cNvSpPr>
-          <p:nvPr>
-            <p:ph type="body" idx="1"/>
-          </p:nvPr>
-        </p:nvSpPr>
-        <p:spPr/>
+        <p:spPr>
+          <a:xfrm>
+            <a:off x="579510" y="2084832"/>
+            <a:ext cx="10375115" cy="1075293"/>
+          </a:xfrm>
+        </p:spPr>
         <p:txBody>
           <a:bodyPr>
             <a:normAutofit/>
@@ -23333,158 +23529,95 @@
           <a:lstStyle/>
           <a:p>
             <a:r>
-              <a:rPr lang="en-US" dirty="0"/>
-              <a:t>Revenue | Jan Zika</a:t>
+              <a:rPr lang="en-US">
+                <a:solidFill>
+                  <a:schemeClr val="tx1"/>
+                </a:solidFill>
+              </a:rPr>
+              <a:t>Key Insights:</a:t>
             </a:r>
           </a:p>
           <a:p>
+            <a:pPr marL="342900" indent="-342900">
+              <a:buClr>
+                <a:schemeClr val="tx1"/>
+              </a:buClr>
+              <a:buFont typeface="Arial" panose="020B0604020202020204" pitchFamily="34" charset="0"/>
+              <a:buChar char="•"/>
+            </a:pPr>
             <a:r>
-              <a:rPr lang="en-US" dirty="0"/>
-              <a:t>Payment Methods | Jan</a:t>
-            </a:r>
-            <a:r>
-              <a:rPr lang="cs-CZ" dirty="0"/>
-              <a:t> </a:t>
-            </a:r>
-            <a:r>
-              <a:rPr lang="en-US" dirty="0"/>
-              <a:t>Zika</a:t>
+              <a:rPr lang="en-US">
+                <a:solidFill>
+                  <a:schemeClr val="tx1"/>
+                </a:solidFill>
+              </a:rPr>
+              <a:t>Weight influences cost, but it’s not the only driver.</a:t>
             </a:r>
           </a:p>
           <a:p>
+            <a:pPr marL="342900" indent="-342900">
+              <a:buClr>
+                <a:schemeClr val="tx1"/>
+              </a:buClr>
+              <a:buFont typeface="Arial" panose="020B0604020202020204" pitchFamily="34" charset="0"/>
+              <a:buChar char="•"/>
+            </a:pPr>
             <a:r>
-              <a:rPr lang="en-US" dirty="0"/>
-              <a:t>Review Score | Michael Amaya </a:t>
+              <a:rPr lang="en-US">
+                <a:solidFill>
+                  <a:schemeClr val="tx1"/>
+                </a:solidFill>
+              </a:rPr>
+              <a:t>Clustering suggests pricing constraints</a:t>
             </a:r>
           </a:p>
           <a:p>
-            <a:r>
-              <a:rPr lang="en-US" dirty="0"/>
-              <a:t>Freight Cost | Vanessa Quiroz </a:t>
-            </a:r>
+            <a:endParaRPr lang="en-US"/>
           </a:p>
         </p:txBody>
       </p:sp>
+      <p:pic>
+        <p:nvPicPr>
+          <p:cNvPr id="8" name="Content Placeholder 7">
+            <a:extLst>
+              <a:ext uri="{FF2B5EF4-FFF2-40B4-BE49-F238E27FC236}">
+                <a16:creationId xmlns:a16="http://schemas.microsoft.com/office/drawing/2014/main" id="{AFCD48EF-9EF2-6570-3902-D453799A7061}"/>
+              </a:ext>
+            </a:extLst>
+          </p:cNvPr>
+          <p:cNvPicPr>
+            <a:picLocks noGrp="1" noChangeAspect="1"/>
+          </p:cNvPicPr>
+          <p:nvPr>
+            <p:ph sz="quarter" idx="4"/>
+          </p:nvPr>
+        </p:nvPicPr>
+        <p:blipFill>
+          <a:blip r:embed="rId2">
+            <a:extLst>
+              <a:ext uri="{28A0092B-C50C-407E-A947-70E740481C1C}">
+                <a14:useLocalDpi xmlns:a14="http://schemas.microsoft.com/office/drawing/2010/main" val="0"/>
+              </a:ext>
+            </a:extLst>
+          </a:blip>
+          <a:stretch>
+            <a:fillRect/>
+          </a:stretch>
+        </p:blipFill>
+        <p:spPr>
+          <a:xfrm>
+            <a:off x="1237375" y="3053592"/>
+            <a:ext cx="9836092" cy="3840715"/>
+          </a:xfrm>
+          <a:prstGeom prst="rect">
+            <a:avLst/>
+          </a:prstGeom>
+        </p:spPr>
+      </p:pic>
     </p:spTree>
     <p:extLst>
       <p:ext uri="{BB962C8B-B14F-4D97-AF65-F5344CB8AC3E}">
-        <p14:creationId xmlns:p14="http://schemas.microsoft.com/office/powerpoint/2010/main" val="3371065868"/>
-      </p:ext>
-    </p:extLst>
-  </p:cSld>
-  <p:clrMapOvr>
-    <a:masterClrMapping/>
-  </p:clrMapOvr>
-</p:sld>
-</file>
-
-<file path=ppt/slides/slide17.xml><?xml version="1.0" encoding="utf-8"?>
-<p:sld xmlns:a="http://schemas.openxmlformats.org/drawingml/2006/main" xmlns:r="http://schemas.openxmlformats.org/officeDocument/2006/relationships" xmlns:p="http://schemas.openxmlformats.org/presentationml/2006/main">
-  <p:cSld>
-    <p:spTree>
-      <p:nvGrpSpPr>
-        <p:cNvPr id="1" name=""/>
-        <p:cNvGrpSpPr/>
-        <p:nvPr/>
-      </p:nvGrpSpPr>
-      <p:grpSpPr>
-        <a:xfrm>
-          <a:off x="0" y="0"/>
-          <a:ext cx="0" cy="0"/>
-          <a:chOff x="0" y="0"/>
-          <a:chExt cx="0" cy="0"/>
-        </a:xfrm>
-      </p:grpSpPr>
-      <p:sp>
-        <p:nvSpPr>
-          <p:cNvPr id="4" name="Title 3">
-            <a:extLst>
-              <a:ext uri="{FF2B5EF4-FFF2-40B4-BE49-F238E27FC236}">
-                <a16:creationId xmlns:a16="http://schemas.microsoft.com/office/drawing/2014/main" id="{974E829A-0EC9-10B0-FA03-6FA5D809EC6C}"/>
-              </a:ext>
-            </a:extLst>
-          </p:cNvPr>
-          <p:cNvSpPr>
-            <a:spLocks noGrp="1"/>
-          </p:cNvSpPr>
-          <p:nvPr>
-            <p:ph type="title"/>
-          </p:nvPr>
-        </p:nvSpPr>
-        <p:spPr/>
-        <p:txBody>
-          <a:bodyPr/>
-          <a:lstStyle/>
-          <a:p>
-            <a:r>
-              <a:rPr lang="en-US" dirty="0"/>
-              <a:t>Revenue by Month</a:t>
-            </a:r>
-          </a:p>
-        </p:txBody>
-      </p:sp>
-    </p:spTree>
-    <p:extLst>
-      <p:ext uri="{BB962C8B-B14F-4D97-AF65-F5344CB8AC3E}">
-        <p14:creationId xmlns:p14="http://schemas.microsoft.com/office/powerpoint/2010/main" val="3228971427"/>
-      </p:ext>
-    </p:extLst>
-  </p:cSld>
-  <p:clrMapOvr>
-    <a:masterClrMapping/>
-  </p:clrMapOvr>
-</p:sld>
-</file>
-
-<file path=ppt/slides/slide18.xml><?xml version="1.0" encoding="utf-8"?>
-<p:sld xmlns:a="http://schemas.openxmlformats.org/drawingml/2006/main" xmlns:r="http://schemas.openxmlformats.org/officeDocument/2006/relationships" xmlns:p="http://schemas.openxmlformats.org/presentationml/2006/main">
-  <p:cSld>
-    <p:spTree>
-      <p:nvGrpSpPr>
-        <p:cNvPr id="1" name=""/>
-        <p:cNvGrpSpPr/>
-        <p:nvPr/>
-      </p:nvGrpSpPr>
-      <p:grpSpPr>
-        <a:xfrm>
-          <a:off x="0" y="0"/>
-          <a:ext cx="0" cy="0"/>
-          <a:chOff x="0" y="0"/>
-          <a:chExt cx="0" cy="0"/>
-        </a:xfrm>
-      </p:grpSpPr>
-      <p:sp>
-        <p:nvSpPr>
-          <p:cNvPr id="2" name="Title 1">
-            <a:extLst>
-              <a:ext uri="{FF2B5EF4-FFF2-40B4-BE49-F238E27FC236}">
-                <a16:creationId xmlns:a16="http://schemas.microsoft.com/office/drawing/2014/main" id="{28A8A83B-522F-F02C-EC7E-24EE632BD737}"/>
-              </a:ext>
-            </a:extLst>
-          </p:cNvPr>
-          <p:cNvSpPr>
-            <a:spLocks noGrp="1"/>
-          </p:cNvSpPr>
-          <p:nvPr>
-            <p:ph type="title"/>
-          </p:nvPr>
-        </p:nvSpPr>
-        <p:spPr/>
-        <p:txBody>
-          <a:bodyPr/>
-          <a:lstStyle/>
-          <a:p>
-            <a:r>
-              <a:rPr lang="en-US" dirty="0"/>
-              <a:t>Payment Methods Breakdown</a:t>
-            </a:r>
-          </a:p>
-        </p:txBody>
-      </p:sp>
-    </p:spTree>
-    <p:extLst>
-      <p:ext uri="{BB962C8B-B14F-4D97-AF65-F5344CB8AC3E}">
-        <p14:creationId xmlns:p14="http://schemas.microsoft.com/office/powerpoint/2010/main" val="1211680046"/>
+        <p14:creationId xmlns:p14="http://schemas.microsoft.com/office/powerpoint/2010/main" val="915169219"/>
       </p:ext>
     </p:extLst>
   </p:cSld>
@@ -23502,7 +23635,7 @@
         <p:cNvPr id="1" name="">
           <a:extLst>
             <a:ext uri="{FF2B5EF4-FFF2-40B4-BE49-F238E27FC236}">
-              <a16:creationId xmlns:a16="http://schemas.microsoft.com/office/drawing/2014/main" id="{D513F4FA-0360-976A-080B-DCE4CCFEC443}"/>
+              <a16:creationId xmlns:a16="http://schemas.microsoft.com/office/drawing/2014/main" id="{455C4093-53D8-5CA1-F8E6-EE3783800D4B}"/>
             </a:ext>
           </a:extLst>
         </p:cNvPr>
@@ -23519,10 +23652,10 @@
       </p:grpSpPr>
       <p:sp>
         <p:nvSpPr>
-          <p:cNvPr id="2" name="Title 1">
+          <p:cNvPr id="3" name="Title 2">
             <a:extLst>
               <a:ext uri="{FF2B5EF4-FFF2-40B4-BE49-F238E27FC236}">
-                <a16:creationId xmlns:a16="http://schemas.microsoft.com/office/drawing/2014/main" id="{C7C7E857-A13C-FD8A-0A01-C6E88D2B3E4D}"/>
+                <a16:creationId xmlns:a16="http://schemas.microsoft.com/office/drawing/2014/main" id="{0B53A1A9-7387-5881-0778-6DA5664FE725}"/>
               </a:ext>
             </a:extLst>
           </p:cNvPr>
@@ -23539,8 +23672,36 @@
           <a:lstStyle/>
           <a:p>
             <a:r>
-              <a:rPr lang="en-US" dirty="0"/>
-              <a:t>Review Score Distribution</a:t>
+              <a:rPr lang="en-US"/>
+              <a:t>Bonus: Geolocation</a:t>
+            </a:r>
+          </a:p>
+        </p:txBody>
+      </p:sp>
+      <p:sp>
+        <p:nvSpPr>
+          <p:cNvPr id="4" name="Text Placeholder 3">
+            <a:extLst>
+              <a:ext uri="{FF2B5EF4-FFF2-40B4-BE49-F238E27FC236}">
+                <a16:creationId xmlns:a16="http://schemas.microsoft.com/office/drawing/2014/main" id="{9431A33B-773B-E7D4-BA25-45D0180E31F9}"/>
+              </a:ext>
+            </a:extLst>
+          </p:cNvPr>
+          <p:cNvSpPr>
+            <a:spLocks noGrp="1"/>
+          </p:cNvSpPr>
+          <p:nvPr>
+            <p:ph type="body" idx="1"/>
+          </p:nvPr>
+        </p:nvSpPr>
+        <p:spPr/>
+        <p:txBody>
+          <a:bodyPr/>
+          <a:lstStyle/>
+          <a:p>
+            <a:r>
+              <a:rPr lang="en-US"/>
+              <a:t>Jan Zika | View + Q13</a:t>
             </a:r>
           </a:p>
         </p:txBody>
@@ -23548,7 +23709,7 @@
     </p:spTree>
     <p:extLst>
       <p:ext uri="{BB962C8B-B14F-4D97-AF65-F5344CB8AC3E}">
-        <p14:creationId xmlns:p14="http://schemas.microsoft.com/office/powerpoint/2010/main" val="2094397836"/>
+        <p14:creationId xmlns:p14="http://schemas.microsoft.com/office/powerpoint/2010/main" val="3389112081"/>
       </p:ext>
     </p:extLst>
   </p:cSld>
@@ -23597,7 +23758,7 @@
           <a:lstStyle/>
           <a:p>
             <a:r>
-              <a:rPr lang="en-US" dirty="0"/>
+              <a:rPr lang="en-US"/>
               <a:t>Overview</a:t>
             </a:r>
           </a:p>
@@ -23625,7 +23786,7 @@
           <a:lstStyle/>
           <a:p>
             <a:r>
-              <a:rPr lang="en-US" dirty="0"/>
+              <a:rPr lang="en-US"/>
               <a:t>About the Dataset</a:t>
             </a:r>
           </a:p>
@@ -23655,23 +23816,23 @@
           <a:lstStyle/>
           <a:p>
             <a:r>
-              <a:rPr lang="en-US" b="1" dirty="0"/>
+              <a:rPr lang="en-US" b="1"/>
               <a:t>Brazilian e-commerce marketplace</a:t>
             </a:r>
             <a:r>
-              <a:rPr lang="en-US" dirty="0"/>
+              <a:rPr lang="en-US"/>
               <a:t>, data collected January 2017 – August 2018</a:t>
             </a:r>
           </a:p>
           <a:p>
             <a:r>
-              <a:rPr lang="en-US" dirty="0"/>
+              <a:rPr lang="en-US"/>
               <a:t>11 tables | ~1.56 million rows</a:t>
             </a:r>
           </a:p>
           <a:p>
             <a:r>
-              <a:rPr lang="en-US" dirty="0"/>
+              <a:rPr lang="en-US"/>
               <a:t>Orders, customers, sellers, products, payments, reviews, marketing leads</a:t>
             </a:r>
           </a:p>
@@ -23699,7 +23860,7 @@
           <a:lstStyle/>
           <a:p>
             <a:r>
-              <a:rPr lang="en-US" dirty="0"/>
+              <a:rPr lang="en-US"/>
               <a:t>Goal</a:t>
             </a:r>
           </a:p>
@@ -23729,33 +23890,33 @@
           <a:lstStyle/>
           <a:p>
             <a:r>
-              <a:rPr lang="en-US" dirty="0"/>
+              <a:rPr lang="en-US"/>
               <a:t>Analyze </a:t>
             </a:r>
             <a:r>
-              <a:rPr lang="en-US" b="1" dirty="0"/>
+              <a:rPr lang="en-US" b="1"/>
               <a:t>sales performance and customer behavior</a:t>
             </a:r>
             <a:r>
-              <a:rPr lang="en-US" dirty="0"/>
+              <a:rPr lang="en-US"/>
               <a:t> in a large e‑commerce marketplace</a:t>
             </a:r>
           </a:p>
           <a:p>
             <a:r>
-              <a:rPr lang="en-US" dirty="0"/>
+              <a:rPr lang="en-US"/>
               <a:t>Jan: Sales &amp; Revenue (Q01–Q04)</a:t>
             </a:r>
           </a:p>
           <a:p>
             <a:r>
-              <a:rPr lang="en-US" dirty="0"/>
+              <a:rPr lang="en-US"/>
               <a:t>Michael: Customer &amp; Delivery Behavior (Q05–Q08)</a:t>
             </a:r>
           </a:p>
           <a:p>
             <a:r>
-              <a:rPr lang="en-US" dirty="0"/>
+              <a:rPr lang="en-US"/>
               <a:t>Vanessa: Seller &amp; Product Performance (Q09–Q12)</a:t>
             </a:r>
           </a:p>
@@ -23775,156 +23936,6 @@
 </file>
 
 <file path=ppt/slides/slide20.xml><?xml version="1.0" encoding="utf-8"?>
-<p:sld xmlns:a="http://schemas.openxmlformats.org/drawingml/2006/main" xmlns:r="http://schemas.openxmlformats.org/officeDocument/2006/relationships" xmlns:p="http://schemas.openxmlformats.org/presentationml/2006/main">
-  <p:cSld>
-    <p:spTree>
-      <p:nvGrpSpPr>
-        <p:cNvPr id="1" name=""/>
-        <p:cNvGrpSpPr/>
-        <p:nvPr/>
-      </p:nvGrpSpPr>
-      <p:grpSpPr>
-        <a:xfrm>
-          <a:off x="0" y="0"/>
-          <a:ext cx="0" cy="0"/>
-          <a:chOff x="0" y="0"/>
-          <a:chExt cx="0" cy="0"/>
-        </a:xfrm>
-      </p:grpSpPr>
-      <p:sp>
-        <p:nvSpPr>
-          <p:cNvPr id="2" name="Title 1">
-            <a:extLst>
-              <a:ext uri="{FF2B5EF4-FFF2-40B4-BE49-F238E27FC236}">
-                <a16:creationId xmlns:a16="http://schemas.microsoft.com/office/drawing/2014/main" id="{E59CF250-143D-5BE4-40F4-02D2CB3F7DF9}"/>
-              </a:ext>
-            </a:extLst>
-          </p:cNvPr>
-          <p:cNvSpPr>
-            <a:spLocks noGrp="1"/>
-          </p:cNvSpPr>
-          <p:nvPr>
-            <p:ph type="title"/>
-          </p:nvPr>
-        </p:nvSpPr>
-        <p:spPr/>
-        <p:txBody>
-          <a:bodyPr/>
-          <a:lstStyle/>
-          <a:p>
-            <a:r>
-              <a:rPr lang="en-US" dirty="0"/>
-              <a:t>Freight Cost vs Product Weight</a:t>
-            </a:r>
-          </a:p>
-        </p:txBody>
-      </p:sp>
-    </p:spTree>
-    <p:extLst>
-      <p:ext uri="{BB962C8B-B14F-4D97-AF65-F5344CB8AC3E}">
-        <p14:creationId xmlns:p14="http://schemas.microsoft.com/office/powerpoint/2010/main" val="258549684"/>
-      </p:ext>
-    </p:extLst>
-  </p:cSld>
-  <p:clrMapOvr>
-    <a:masterClrMapping/>
-  </p:clrMapOvr>
-</p:sld>
-</file>
-
-<file path=ppt/slides/slide21.xml><?xml version="1.0" encoding="utf-8"?>
-<p:sld xmlns:a="http://schemas.openxmlformats.org/drawingml/2006/main" xmlns:r="http://schemas.openxmlformats.org/officeDocument/2006/relationships" xmlns:p="http://schemas.openxmlformats.org/presentationml/2006/main">
-  <p:cSld>
-    <p:spTree>
-      <p:nvGrpSpPr>
-        <p:cNvPr id="1" name="">
-          <a:extLst>
-            <a:ext uri="{FF2B5EF4-FFF2-40B4-BE49-F238E27FC236}">
-              <a16:creationId xmlns:a16="http://schemas.microsoft.com/office/drawing/2014/main" id="{455C4093-53D8-5CA1-F8E6-EE3783800D4B}"/>
-            </a:ext>
-          </a:extLst>
-        </p:cNvPr>
-        <p:cNvGrpSpPr/>
-        <p:nvPr/>
-      </p:nvGrpSpPr>
-      <p:grpSpPr>
-        <a:xfrm>
-          <a:off x="0" y="0"/>
-          <a:ext cx="0" cy="0"/>
-          <a:chOff x="0" y="0"/>
-          <a:chExt cx="0" cy="0"/>
-        </a:xfrm>
-      </p:grpSpPr>
-      <p:sp>
-        <p:nvSpPr>
-          <p:cNvPr id="3" name="Title 2">
-            <a:extLst>
-              <a:ext uri="{FF2B5EF4-FFF2-40B4-BE49-F238E27FC236}">
-                <a16:creationId xmlns:a16="http://schemas.microsoft.com/office/drawing/2014/main" id="{0B53A1A9-7387-5881-0778-6DA5664FE725}"/>
-              </a:ext>
-            </a:extLst>
-          </p:cNvPr>
-          <p:cNvSpPr>
-            <a:spLocks noGrp="1"/>
-          </p:cNvSpPr>
-          <p:nvPr>
-            <p:ph type="title"/>
-          </p:nvPr>
-        </p:nvSpPr>
-        <p:spPr/>
-        <p:txBody>
-          <a:bodyPr/>
-          <a:lstStyle/>
-          <a:p>
-            <a:r>
-              <a:rPr lang="en-US" dirty="0"/>
-              <a:t>Bonus: Geolocation</a:t>
-            </a:r>
-          </a:p>
-        </p:txBody>
-      </p:sp>
-      <p:sp>
-        <p:nvSpPr>
-          <p:cNvPr id="4" name="Text Placeholder 3">
-            <a:extLst>
-              <a:ext uri="{FF2B5EF4-FFF2-40B4-BE49-F238E27FC236}">
-                <a16:creationId xmlns:a16="http://schemas.microsoft.com/office/drawing/2014/main" id="{9431A33B-773B-E7D4-BA25-45D0180E31F9}"/>
-              </a:ext>
-            </a:extLst>
-          </p:cNvPr>
-          <p:cNvSpPr>
-            <a:spLocks noGrp="1"/>
-          </p:cNvSpPr>
-          <p:nvPr>
-            <p:ph type="body" idx="1"/>
-          </p:nvPr>
-        </p:nvSpPr>
-        <p:spPr/>
-        <p:txBody>
-          <a:bodyPr/>
-          <a:lstStyle/>
-          <a:p>
-            <a:r>
-              <a:rPr lang="en-US" dirty="0"/>
-              <a:t>Jan Zika | View + Q13</a:t>
-            </a:r>
-          </a:p>
-        </p:txBody>
-      </p:sp>
-    </p:spTree>
-    <p:extLst>
-      <p:ext uri="{BB962C8B-B14F-4D97-AF65-F5344CB8AC3E}">
-        <p14:creationId xmlns:p14="http://schemas.microsoft.com/office/powerpoint/2010/main" val="3389112081"/>
-      </p:ext>
-    </p:extLst>
-  </p:cSld>
-  <p:clrMapOvr>
-    <a:masterClrMapping/>
-  </p:clrMapOvr>
-</p:sld>
-</file>
-
-<file path=ppt/slides/slide22.xml><?xml version="1.0" encoding="utf-8"?>
 <p:sld xmlns:a="http://schemas.openxmlformats.org/drawingml/2006/main" xmlns:r="http://schemas.openxmlformats.org/officeDocument/2006/relationships" xmlns:p="http://schemas.openxmlformats.org/presentationml/2006/main">
   <p:cSld>
     <p:spTree>
@@ -23963,7 +23974,7 @@
           <a:lstStyle/>
           <a:p>
             <a:r>
-              <a:rPr lang="en-US" dirty="0"/>
+              <a:rPr lang="en-US"/>
               <a:t>The Geography of Brazilian E-Commerce</a:t>
             </a:r>
           </a:p>
@@ -24037,12 +24048,12 @@
                     <a:lstStyle/>
                     <a:p>
                       <a:r>
-                        <a:rPr lang="cs-CZ" sz="1600" dirty="0">
+                        <a:rPr lang="cs-CZ" sz="1600">
                           <a:latin typeface="+mj-lt"/>
                         </a:rPr>
                         <a:t>City Route</a:t>
                       </a:r>
-                      <a:endParaRPr lang="en-US" sz="1600" dirty="0">
+                      <a:endParaRPr lang="en-US" sz="1600">
                         <a:latin typeface="+mj-lt"/>
                       </a:endParaRPr>
                     </a:p>
@@ -24056,7 +24067,7 @@
                     <a:p>
                       <a:pPr algn="r"/>
                       <a:r>
-                        <a:rPr lang="en-US" sz="1600" dirty="0">
+                        <a:rPr lang="en-US" sz="1600">
                           <a:latin typeface="+mj-lt"/>
                         </a:rPr>
                         <a:t>Order Count</a:t>
@@ -24072,31 +24083,31 @@
                     <a:p>
                       <a:pPr algn="r"/>
                       <a:r>
-                        <a:rPr lang="en-US" sz="1600" dirty="0">
+                        <a:rPr lang="en-US" sz="1600">
                           <a:latin typeface="+mj-lt"/>
                         </a:rPr>
                         <a:t>Av</a:t>
                       </a:r>
                       <a:r>
-                        <a:rPr lang="cs-CZ" sz="1600" dirty="0" err="1">
+                        <a:rPr lang="cs-CZ" sz="1600" err="1">
                           <a:latin typeface="+mj-lt"/>
                         </a:rPr>
                         <a:t>era</a:t>
                       </a:r>
                       <a:r>
-                        <a:rPr lang="en-US" sz="1600" dirty="0">
+                        <a:rPr lang="en-US" sz="1600">
                           <a:latin typeface="+mj-lt"/>
                         </a:rPr>
                         <a:t>g</a:t>
                       </a:r>
                       <a:r>
-                        <a:rPr lang="cs-CZ" sz="1600" dirty="0">
+                        <a:rPr lang="cs-CZ" sz="1600">
                           <a:latin typeface="+mj-lt"/>
                         </a:rPr>
                         <a:t>e</a:t>
                       </a:r>
                       <a:r>
-                        <a:rPr lang="en-US" sz="1600" dirty="0">
+                        <a:rPr lang="en-US" sz="1600">
                           <a:latin typeface="+mj-lt"/>
                         </a:rPr>
                         <a:t> Distance (miles)</a:t>
@@ -24112,31 +24123,31 @@
                     <a:p>
                       <a:pPr algn="r"/>
                       <a:r>
-                        <a:rPr lang="en-US" sz="1600" dirty="0">
+                        <a:rPr lang="en-US" sz="1600">
                           <a:latin typeface="+mj-lt"/>
                         </a:rPr>
                         <a:t>Av</a:t>
                       </a:r>
                       <a:r>
-                        <a:rPr lang="cs-CZ" sz="1600" dirty="0" err="1">
+                        <a:rPr lang="cs-CZ" sz="1600" err="1">
                           <a:latin typeface="+mj-lt"/>
                         </a:rPr>
                         <a:t>era</a:t>
                       </a:r>
                       <a:r>
-                        <a:rPr lang="en-US" sz="1600" dirty="0">
+                        <a:rPr lang="en-US" sz="1600">
                           <a:latin typeface="+mj-lt"/>
                         </a:rPr>
                         <a:t>g</a:t>
                       </a:r>
                       <a:r>
-                        <a:rPr lang="cs-CZ" sz="1600" dirty="0">
+                        <a:rPr lang="cs-CZ" sz="1600">
                           <a:latin typeface="+mj-lt"/>
                         </a:rPr>
                         <a:t>e</a:t>
                       </a:r>
                       <a:r>
-                        <a:rPr lang="en-US" sz="1600" dirty="0">
+                        <a:rPr lang="en-US" sz="1600">
                           <a:latin typeface="+mj-lt"/>
                         </a:rPr>
                         <a:t> Freight Cost (R$)</a:t>
@@ -24167,7 +24178,7 @@
                         <a:buNone/>
                       </a:pPr>
                       <a:r>
-                        <a:rPr lang="en-US" sz="1600" kern="100" dirty="0">
+                        <a:rPr lang="en-US" sz="1600" kern="100">
                           <a:effectLst/>
                           <a:latin typeface="+mj-lt"/>
                           <a:ea typeface="Aptos" panose="020B0004020202020204" pitchFamily="34" charset="0"/>
@@ -24176,7 +24187,7 @@
                         <a:t>São P</a:t>
                       </a:r>
                       <a:r>
-                        <a:rPr lang="cs-CZ" sz="1600" kern="100" dirty="0">
+                        <a:rPr lang="cs-CZ" sz="1600" kern="100">
                           <a:effectLst/>
                           <a:latin typeface="+mj-lt"/>
                           <a:ea typeface="Aptos" panose="020B0004020202020204" pitchFamily="34" charset="0"/>
@@ -24185,7 +24196,7 @@
                         <a:t>aulo</a:t>
                       </a:r>
                       <a:r>
-                        <a:rPr lang="en-US" sz="1600" kern="100" dirty="0">
+                        <a:rPr lang="en-US" sz="1600" kern="100">
                           <a:effectLst/>
                           <a:latin typeface="+mj-lt"/>
                           <a:ea typeface="Aptos" panose="020B0004020202020204" pitchFamily="34" charset="0"/>
@@ -24194,7 +24205,7 @@
                         <a:t> → São P</a:t>
                       </a:r>
                       <a:r>
-                        <a:rPr lang="cs-CZ" sz="1600" kern="100" dirty="0">
+                        <a:rPr lang="cs-CZ" sz="1600" kern="100">
                           <a:effectLst/>
                           <a:latin typeface="+mj-lt"/>
                           <a:ea typeface="Aptos" panose="020B0004020202020204" pitchFamily="34" charset="0"/>
@@ -24202,7 +24213,7 @@
                         </a:rPr>
                         <a:t>aulo</a:t>
                       </a:r>
-                      <a:endParaRPr lang="en-US" sz="1600" kern="100" dirty="0">
+                      <a:endParaRPr lang="en-US" sz="1600" kern="100">
                         <a:effectLst/>
                         <a:latin typeface="+mj-lt"/>
                         <a:ea typeface="Aptos" panose="020B0004020202020204" pitchFamily="34" charset="0"/>
@@ -24227,7 +24238,7 @@
                         <a:buNone/>
                       </a:pPr>
                       <a:r>
-                        <a:rPr lang="en-US" sz="1600" kern="100" dirty="0">
+                        <a:rPr lang="en-US" sz="1600" kern="100">
                           <a:effectLst/>
                           <a:latin typeface="+mn-lt"/>
                           <a:ea typeface="Aptos" panose="020B0004020202020204" pitchFamily="34" charset="0"/>
@@ -24254,7 +24265,7 @@
                         <a:buNone/>
                       </a:pPr>
                       <a:r>
-                        <a:rPr lang="en-US" sz="1600" kern="100" dirty="0">
+                        <a:rPr lang="en-US" sz="1600" kern="100">
                           <a:effectLst/>
                           <a:latin typeface="+mn-lt"/>
                           <a:ea typeface="Aptos" panose="020B0004020202020204" pitchFamily="34" charset="0"/>
@@ -24281,7 +24292,7 @@
                         <a:buNone/>
                       </a:pPr>
                       <a:r>
-                        <a:rPr lang="en-US" sz="1600" kern="100" dirty="0">
+                        <a:rPr lang="en-US" sz="1600" kern="100">
                           <a:effectLst/>
                           <a:latin typeface="+mn-lt"/>
                           <a:ea typeface="Aptos" panose="020B0004020202020204" pitchFamily="34" charset="0"/>
@@ -24315,7 +24326,7 @@
                         <a:buNone/>
                       </a:pPr>
                       <a:r>
-                        <a:rPr lang="en-US" sz="1600" kern="100" dirty="0">
+                        <a:rPr lang="en-US" sz="1600" kern="100">
                           <a:effectLst/>
                           <a:latin typeface="+mj-lt"/>
                           <a:ea typeface="Aptos" panose="020B0004020202020204" pitchFamily="34" charset="0"/>
@@ -24324,7 +24335,7 @@
                         <a:t>São P</a:t>
                       </a:r>
                       <a:r>
-                        <a:rPr lang="cs-CZ" sz="1600" kern="100" dirty="0">
+                        <a:rPr lang="cs-CZ" sz="1600" kern="100">
                           <a:effectLst/>
                           <a:latin typeface="+mj-lt"/>
                           <a:ea typeface="Aptos" panose="020B0004020202020204" pitchFamily="34" charset="0"/>
@@ -24333,7 +24344,7 @@
                         <a:t>aulo</a:t>
                       </a:r>
                       <a:r>
-                        <a:rPr lang="en-US" sz="1600" kern="100" dirty="0">
+                        <a:rPr lang="en-US" sz="1600" kern="100">
                           <a:effectLst/>
                           <a:latin typeface="+mj-lt"/>
                           <a:ea typeface="Aptos" panose="020B0004020202020204" pitchFamily="34" charset="0"/>
@@ -24342,7 +24353,7 @@
                         <a:t> → Rio</a:t>
                       </a:r>
                       <a:r>
-                        <a:rPr lang="cs-CZ" sz="1600" kern="100" dirty="0">
+                        <a:rPr lang="cs-CZ" sz="1600" kern="100">
                           <a:effectLst/>
                           <a:latin typeface="+mj-lt"/>
                           <a:ea typeface="Aptos" panose="020B0004020202020204" pitchFamily="34" charset="0"/>
@@ -24351,7 +24362,7 @@
                         <a:t> de </a:t>
                       </a:r>
                       <a:r>
-                        <a:rPr lang="cs-CZ" sz="1600" kern="100" dirty="0" err="1">
+                        <a:rPr lang="cs-CZ" sz="1600" kern="100" err="1">
                           <a:effectLst/>
                           <a:latin typeface="+mj-lt"/>
                           <a:ea typeface="Aptos" panose="020B0004020202020204" pitchFamily="34" charset="0"/>
@@ -24359,7 +24370,7 @@
                         </a:rPr>
                         <a:t>Janeiro</a:t>
                       </a:r>
-                      <a:endParaRPr lang="en-US" sz="1600" kern="100" dirty="0">
+                      <a:endParaRPr lang="en-US" sz="1600" kern="100">
                         <a:effectLst/>
                         <a:latin typeface="+mj-lt"/>
                         <a:ea typeface="Aptos" panose="020B0004020202020204" pitchFamily="34" charset="0"/>
@@ -24384,7 +24395,7 @@
                         <a:buNone/>
                       </a:pPr>
                       <a:r>
-                        <a:rPr lang="en-US" sz="1600" kern="100" dirty="0">
+                        <a:rPr lang="en-US" sz="1600" kern="100">
                           <a:effectLst/>
                           <a:latin typeface="+mn-lt"/>
                           <a:ea typeface="Aptos" panose="020B0004020202020204" pitchFamily="34" charset="0"/>
@@ -24411,7 +24422,7 @@
                         <a:buNone/>
                       </a:pPr>
                       <a:r>
-                        <a:rPr lang="en-US" sz="1600" kern="100" dirty="0">
+                        <a:rPr lang="en-US" sz="1600" kern="100">
                           <a:effectLst/>
                           <a:latin typeface="+mn-lt"/>
                           <a:ea typeface="Aptos" panose="020B0004020202020204" pitchFamily="34" charset="0"/>
@@ -24438,7 +24449,7 @@
                         <a:buNone/>
                       </a:pPr>
                       <a:r>
-                        <a:rPr lang="en-US" sz="1600" kern="100" dirty="0">
+                        <a:rPr lang="en-US" sz="1600" kern="100">
                           <a:effectLst/>
                           <a:latin typeface="+mn-lt"/>
                           <a:ea typeface="Aptos" panose="020B0004020202020204" pitchFamily="34" charset="0"/>
@@ -24472,7 +24483,7 @@
                         <a:buNone/>
                       </a:pPr>
                       <a:r>
-                        <a:rPr lang="en-US" sz="1600" kern="100" dirty="0" err="1">
+                        <a:rPr lang="en-US" sz="1600" kern="100" err="1">
                           <a:effectLst/>
                           <a:latin typeface="+mj-lt"/>
                           <a:ea typeface="Aptos" panose="020B0004020202020204" pitchFamily="34" charset="0"/>
@@ -24481,7 +24492,7 @@
                         <a:t>Ibitinga</a:t>
                       </a:r>
                       <a:r>
-                        <a:rPr lang="en-US" sz="1600" kern="100" dirty="0">
+                        <a:rPr lang="en-US" sz="1600" kern="100">
                           <a:effectLst/>
                           <a:latin typeface="+mj-lt"/>
                           <a:ea typeface="Aptos" panose="020B0004020202020204" pitchFamily="34" charset="0"/>
@@ -24490,7 +24501,7 @@
                         <a:t> → São P</a:t>
                       </a:r>
                       <a:r>
-                        <a:rPr lang="cs-CZ" sz="1600" kern="100" dirty="0">
+                        <a:rPr lang="cs-CZ" sz="1600" kern="100">
                           <a:effectLst/>
                           <a:latin typeface="+mj-lt"/>
                           <a:ea typeface="Aptos" panose="020B0004020202020204" pitchFamily="34" charset="0"/>
@@ -24498,7 +24509,7 @@
                         </a:rPr>
                         <a:t>aulo</a:t>
                       </a:r>
-                      <a:endParaRPr lang="en-US" sz="1600" kern="100" dirty="0">
+                      <a:endParaRPr lang="en-US" sz="1600" kern="100">
                         <a:effectLst/>
                         <a:latin typeface="+mj-lt"/>
                         <a:ea typeface="Aptos" panose="020B0004020202020204" pitchFamily="34" charset="0"/>
@@ -24523,7 +24534,7 @@
                         <a:buNone/>
                       </a:pPr>
                       <a:r>
-                        <a:rPr lang="en-US" sz="1600" kern="100" dirty="0">
+                        <a:rPr lang="en-US" sz="1600" kern="100">
                           <a:effectLst/>
                           <a:latin typeface="+mn-lt"/>
                           <a:ea typeface="Aptos" panose="020B0004020202020204" pitchFamily="34" charset="0"/>
@@ -24550,7 +24561,7 @@
                         <a:buNone/>
                       </a:pPr>
                       <a:r>
-                        <a:rPr lang="en-US" sz="1600" kern="100" dirty="0">
+                        <a:rPr lang="en-US" sz="1600" kern="100">
                           <a:effectLst/>
                           <a:latin typeface="+mn-lt"/>
                           <a:ea typeface="Aptos" panose="020B0004020202020204" pitchFamily="34" charset="0"/>
@@ -24577,7 +24588,7 @@
                         <a:buNone/>
                       </a:pPr>
                       <a:r>
-                        <a:rPr lang="en-US" sz="1600" kern="100" dirty="0">
+                        <a:rPr lang="en-US" sz="1600" kern="100">
                           <a:effectLst/>
                           <a:latin typeface="+mn-lt"/>
                           <a:ea typeface="Aptos" panose="020B0004020202020204" pitchFamily="34" charset="0"/>
@@ -24611,7 +24622,7 @@
                         <a:buNone/>
                       </a:pPr>
                       <a:r>
-                        <a:rPr lang="en-US" sz="1600" kern="100" dirty="0">
+                        <a:rPr lang="en-US" sz="1600" kern="100">
                           <a:effectLst/>
                           <a:latin typeface="+mj-lt"/>
                           <a:ea typeface="Aptos" panose="020B0004020202020204" pitchFamily="34" charset="0"/>
@@ -24620,7 +24631,7 @@
                         <a:t>São P</a:t>
                       </a:r>
                       <a:r>
-                        <a:rPr lang="cs-CZ" sz="1600" kern="100" dirty="0">
+                        <a:rPr lang="cs-CZ" sz="1600" kern="100">
                           <a:effectLst/>
                           <a:latin typeface="+mj-lt"/>
                           <a:ea typeface="Aptos" panose="020B0004020202020204" pitchFamily="34" charset="0"/>
@@ -24629,7 +24640,7 @@
                         <a:t>aulo</a:t>
                       </a:r>
                       <a:r>
-                        <a:rPr lang="en-US" sz="1600" kern="100" dirty="0">
+                        <a:rPr lang="en-US" sz="1600" kern="100">
                           <a:effectLst/>
                           <a:latin typeface="+mj-lt"/>
                           <a:ea typeface="Aptos" panose="020B0004020202020204" pitchFamily="34" charset="0"/>
@@ -24656,7 +24667,7 @@
                         <a:buNone/>
                       </a:pPr>
                       <a:r>
-                        <a:rPr lang="en-US" sz="1600" kern="100" dirty="0">
+                        <a:rPr lang="en-US" sz="1600" kern="100">
                           <a:effectLst/>
                           <a:latin typeface="+mn-lt"/>
                           <a:ea typeface="Aptos" panose="020B0004020202020204" pitchFamily="34" charset="0"/>
@@ -24683,7 +24694,7 @@
                         <a:buNone/>
                       </a:pPr>
                       <a:r>
-                        <a:rPr lang="en-US" sz="1600" kern="100" dirty="0">
+                        <a:rPr lang="en-US" sz="1600" kern="100">
                           <a:effectLst/>
                           <a:latin typeface="+mn-lt"/>
                           <a:ea typeface="Aptos" panose="020B0004020202020204" pitchFamily="34" charset="0"/>
@@ -24710,7 +24721,7 @@
                         <a:buNone/>
                       </a:pPr>
                       <a:r>
-                        <a:rPr lang="en-US" sz="1600" kern="100" dirty="0">
+                        <a:rPr lang="en-US" sz="1600" kern="100">
                           <a:effectLst/>
                           <a:latin typeface="+mn-lt"/>
                           <a:ea typeface="Aptos" panose="020B0004020202020204" pitchFamily="34" charset="0"/>
@@ -24744,7 +24755,7 @@
                         <a:buNone/>
                       </a:pPr>
                       <a:r>
-                        <a:rPr lang="en-US" sz="1600" kern="100" dirty="0" err="1">
+                        <a:rPr lang="en-US" sz="1600" kern="100" err="1">
                           <a:effectLst/>
                           <a:latin typeface="+mj-lt"/>
                           <a:ea typeface="Aptos" panose="020B0004020202020204" pitchFamily="34" charset="0"/>
@@ -24753,7 +24764,7 @@
                         <a:t>Ibitinga</a:t>
                       </a:r>
                       <a:r>
-                        <a:rPr lang="en-US" sz="1600" kern="100" dirty="0">
+                        <a:rPr lang="en-US" sz="1600" kern="100">
                           <a:effectLst/>
                           <a:latin typeface="+mj-lt"/>
                           <a:ea typeface="Aptos" panose="020B0004020202020204" pitchFamily="34" charset="0"/>
@@ -24762,7 +24773,7 @@
                         <a:t> → Rio</a:t>
                       </a:r>
                       <a:r>
-                        <a:rPr lang="cs-CZ" sz="1600" kern="100" dirty="0">
+                        <a:rPr lang="cs-CZ" sz="1600" kern="100">
                           <a:effectLst/>
                           <a:latin typeface="+mj-lt"/>
                           <a:ea typeface="Aptos" panose="020B0004020202020204" pitchFamily="34" charset="0"/>
@@ -24771,7 +24782,7 @@
                         <a:t> de </a:t>
                       </a:r>
                       <a:r>
-                        <a:rPr lang="cs-CZ" sz="1600" kern="100" dirty="0" err="1">
+                        <a:rPr lang="cs-CZ" sz="1600" kern="100" err="1">
                           <a:effectLst/>
                           <a:latin typeface="+mj-lt"/>
                           <a:ea typeface="Aptos" panose="020B0004020202020204" pitchFamily="34" charset="0"/>
@@ -24779,7 +24790,7 @@
                         </a:rPr>
                         <a:t>Janeiro</a:t>
                       </a:r>
-                      <a:endParaRPr lang="en-US" sz="1600" kern="100" dirty="0">
+                      <a:endParaRPr lang="en-US" sz="1600" kern="100">
                         <a:effectLst/>
                         <a:latin typeface="+mj-lt"/>
                         <a:ea typeface="Aptos" panose="020B0004020202020204" pitchFamily="34" charset="0"/>
@@ -24804,7 +24815,7 @@
                         <a:buNone/>
                       </a:pPr>
                       <a:r>
-                        <a:rPr lang="en-US" sz="1600" kern="100" dirty="0">
+                        <a:rPr lang="en-US" sz="1600" kern="100">
                           <a:effectLst/>
                           <a:latin typeface="+mn-lt"/>
                           <a:ea typeface="Aptos" panose="020B0004020202020204" pitchFamily="34" charset="0"/>
@@ -24831,7 +24842,7 @@
                         <a:buNone/>
                       </a:pPr>
                       <a:r>
-                        <a:rPr lang="en-US" sz="1600" kern="100" dirty="0">
+                        <a:rPr lang="en-US" sz="1600" kern="100">
                           <a:effectLst/>
                           <a:latin typeface="+mn-lt"/>
                           <a:ea typeface="Aptos" panose="020B0004020202020204" pitchFamily="34" charset="0"/>
@@ -24858,7 +24869,7 @@
                         <a:buNone/>
                       </a:pPr>
                       <a:r>
-                        <a:rPr lang="en-US" sz="1600" kern="100" dirty="0">
+                        <a:rPr lang="en-US" sz="1600" kern="100">
                           <a:effectLst/>
                           <a:latin typeface="+mn-lt"/>
                           <a:ea typeface="Aptos" panose="020B0004020202020204" pitchFamily="34" charset="0"/>
@@ -24892,7 +24903,7 @@
                         <a:buNone/>
                       </a:pPr>
                       <a:r>
-                        <a:rPr lang="en-US" sz="1600" kern="100" dirty="0">
+                        <a:rPr lang="en-US" sz="1600" kern="100">
                           <a:effectLst/>
                           <a:latin typeface="+mj-lt"/>
                           <a:ea typeface="Aptos" panose="020B0004020202020204" pitchFamily="34" charset="0"/>
@@ -24901,7 +24912,7 @@
                         <a:t>Santo André (SP) → São P</a:t>
                       </a:r>
                       <a:r>
-                        <a:rPr lang="cs-CZ" sz="1600" kern="100" dirty="0">
+                        <a:rPr lang="cs-CZ" sz="1600" kern="100">
                           <a:effectLst/>
                           <a:latin typeface="+mj-lt"/>
                           <a:ea typeface="Aptos" panose="020B0004020202020204" pitchFamily="34" charset="0"/>
@@ -24909,7 +24920,7 @@
                         </a:rPr>
                         <a:t>aulo</a:t>
                       </a:r>
-                      <a:endParaRPr lang="en-US" sz="1600" kern="100" dirty="0">
+                      <a:endParaRPr lang="en-US" sz="1600" kern="100">
                         <a:effectLst/>
                         <a:latin typeface="+mj-lt"/>
                         <a:ea typeface="Aptos" panose="020B0004020202020204" pitchFamily="34" charset="0"/>
@@ -24934,7 +24945,7 @@
                         <a:buNone/>
                       </a:pPr>
                       <a:r>
-                        <a:rPr lang="en-US" sz="1600" kern="100" dirty="0">
+                        <a:rPr lang="en-US" sz="1600" kern="100">
                           <a:effectLst/>
                           <a:latin typeface="+mn-lt"/>
                           <a:ea typeface="Aptos" panose="020B0004020202020204" pitchFamily="34" charset="0"/>
@@ -24961,7 +24972,7 @@
                         <a:buNone/>
                       </a:pPr>
                       <a:r>
-                        <a:rPr lang="en-US" sz="1600" kern="100" dirty="0">
+                        <a:rPr lang="en-US" sz="1600" kern="100">
                           <a:effectLst/>
                           <a:latin typeface="+mn-lt"/>
                           <a:ea typeface="Aptos" panose="020B0004020202020204" pitchFamily="34" charset="0"/>
@@ -24988,7 +24999,7 @@
                         <a:buNone/>
                       </a:pPr>
                       <a:r>
-                        <a:rPr lang="en-US" sz="1600" kern="100" dirty="0">
+                        <a:rPr lang="en-US" sz="1600" kern="100">
                           <a:effectLst/>
                           <a:latin typeface="+mn-lt"/>
                           <a:ea typeface="Aptos" panose="020B0004020202020204" pitchFamily="34" charset="0"/>
@@ -25022,7 +25033,7 @@
                         <a:buNone/>
                       </a:pPr>
                       <a:r>
-                        <a:rPr lang="en-US" sz="1600" kern="100" dirty="0">
+                        <a:rPr lang="en-US" sz="1600" kern="100">
                           <a:effectLst/>
                           <a:latin typeface="+mj-lt"/>
                           <a:ea typeface="Aptos" panose="020B0004020202020204" pitchFamily="34" charset="0"/>
@@ -25031,7 +25042,7 @@
                         <a:t>São José (SP) → São P</a:t>
                       </a:r>
                       <a:r>
-                        <a:rPr lang="cs-CZ" sz="1600" kern="100" dirty="0">
+                        <a:rPr lang="cs-CZ" sz="1600" kern="100">
                           <a:effectLst/>
                           <a:latin typeface="+mj-lt"/>
                           <a:ea typeface="Aptos" panose="020B0004020202020204" pitchFamily="34" charset="0"/>
@@ -25039,7 +25050,7 @@
                         </a:rPr>
                         <a:t>aulo</a:t>
                       </a:r>
-                      <a:endParaRPr lang="en-US" sz="1600" kern="100" dirty="0">
+                      <a:endParaRPr lang="en-US" sz="1600" kern="100">
                         <a:effectLst/>
                         <a:latin typeface="+mj-lt"/>
                         <a:ea typeface="Aptos" panose="020B0004020202020204" pitchFamily="34" charset="0"/>
@@ -25064,7 +25075,7 @@
                         <a:buNone/>
                       </a:pPr>
                       <a:r>
-                        <a:rPr lang="en-US" sz="1600" kern="100" dirty="0">
+                        <a:rPr lang="en-US" sz="1600" kern="100">
                           <a:effectLst/>
                           <a:latin typeface="+mn-lt"/>
                           <a:ea typeface="Aptos" panose="020B0004020202020204" pitchFamily="34" charset="0"/>
@@ -25091,7 +25102,7 @@
                         <a:buNone/>
                       </a:pPr>
                       <a:r>
-                        <a:rPr lang="en-US" sz="1600" kern="100" dirty="0">
+                        <a:rPr lang="en-US" sz="1600" kern="100">
                           <a:effectLst/>
                           <a:latin typeface="+mn-lt"/>
                           <a:ea typeface="Aptos" panose="020B0004020202020204" pitchFamily="34" charset="0"/>
@@ -25118,7 +25129,7 @@
                         <a:buNone/>
                       </a:pPr>
                       <a:r>
-                        <a:rPr lang="en-US" sz="1600" kern="100" dirty="0">
+                        <a:rPr lang="en-US" sz="1600" kern="100">
                           <a:effectLst/>
                           <a:latin typeface="+mn-lt"/>
                           <a:ea typeface="Aptos" panose="020B0004020202020204" pitchFamily="34" charset="0"/>
@@ -25152,7 +25163,7 @@
                         <a:buNone/>
                       </a:pPr>
                       <a:r>
-                        <a:rPr lang="en-US" sz="1600" kern="100" dirty="0">
+                        <a:rPr lang="en-US" sz="1600" kern="100">
                           <a:effectLst/>
                           <a:latin typeface="+mj-lt"/>
                           <a:ea typeface="Aptos" panose="020B0004020202020204" pitchFamily="34" charset="0"/>
@@ -25161,7 +25172,7 @@
                         <a:t>São P</a:t>
                       </a:r>
                       <a:r>
-                        <a:rPr lang="cs-CZ" sz="1600" kern="100" dirty="0">
+                        <a:rPr lang="cs-CZ" sz="1600" kern="100">
                           <a:effectLst/>
                           <a:latin typeface="+mj-lt"/>
                           <a:ea typeface="Aptos" panose="020B0004020202020204" pitchFamily="34" charset="0"/>
@@ -25170,7 +25181,7 @@
                         <a:t>aulo</a:t>
                       </a:r>
                       <a:r>
-                        <a:rPr lang="en-US" sz="1600" kern="100" dirty="0">
+                        <a:rPr lang="en-US" sz="1600" kern="100">
                           <a:effectLst/>
                           <a:latin typeface="+mj-lt"/>
                           <a:ea typeface="Aptos" panose="020B0004020202020204" pitchFamily="34" charset="0"/>
@@ -25224,7 +25235,7 @@
                         <a:buNone/>
                       </a:pPr>
                       <a:r>
-                        <a:rPr lang="en-US" sz="1600" kern="100" dirty="0">
+                        <a:rPr lang="en-US" sz="1600" kern="100">
                           <a:effectLst/>
                           <a:latin typeface="+mn-lt"/>
                           <a:ea typeface="Aptos" panose="020B0004020202020204" pitchFamily="34" charset="0"/>
@@ -25251,7 +25262,7 @@
                         <a:buNone/>
                       </a:pPr>
                       <a:r>
-                        <a:rPr lang="en-US" sz="1600" kern="100" dirty="0">
+                        <a:rPr lang="en-US" sz="1600" kern="100">
                           <a:effectLst/>
                           <a:latin typeface="+mn-lt"/>
                           <a:ea typeface="Aptos" panose="020B0004020202020204" pitchFamily="34" charset="0"/>
@@ -25285,7 +25296,7 @@
                         <a:buNone/>
                       </a:pPr>
                       <a:r>
-                        <a:rPr lang="en-US" sz="1600" kern="100" dirty="0">
+                        <a:rPr lang="en-US" sz="1600" kern="100">
                           <a:effectLst/>
                           <a:latin typeface="+mj-lt"/>
                           <a:ea typeface="Aptos" panose="020B0004020202020204" pitchFamily="34" charset="0"/>
@@ -25294,7 +25305,7 @@
                         <a:t>São P</a:t>
                       </a:r>
                       <a:r>
-                        <a:rPr lang="cs-CZ" sz="1600" kern="100" dirty="0">
+                        <a:rPr lang="cs-CZ" sz="1600" kern="100">
                           <a:effectLst/>
                           <a:latin typeface="+mj-lt"/>
                           <a:ea typeface="Aptos" panose="020B0004020202020204" pitchFamily="34" charset="0"/>
@@ -25303,7 +25314,7 @@
                         <a:t>aulo</a:t>
                       </a:r>
                       <a:r>
-                        <a:rPr lang="en-US" sz="1600" kern="100" dirty="0">
+                        <a:rPr lang="en-US" sz="1600" kern="100">
                           <a:effectLst/>
                           <a:latin typeface="+mj-lt"/>
                           <a:ea typeface="Aptos" panose="020B0004020202020204" pitchFamily="34" charset="0"/>
@@ -25357,7 +25368,7 @@
                         <a:buNone/>
                       </a:pPr>
                       <a:r>
-                        <a:rPr lang="en-US" sz="1600" kern="100" dirty="0">
+                        <a:rPr lang="en-US" sz="1600" kern="100">
                           <a:effectLst/>
                           <a:latin typeface="+mn-lt"/>
                           <a:ea typeface="Aptos" panose="020B0004020202020204" pitchFamily="34" charset="0"/>
@@ -25384,7 +25395,7 @@
                         <a:buNone/>
                       </a:pPr>
                       <a:r>
-                        <a:rPr lang="en-US" sz="1600" kern="100" dirty="0">
+                        <a:rPr lang="en-US" sz="1600" kern="100">
                           <a:effectLst/>
                           <a:latin typeface="+mn-lt"/>
                           <a:ea typeface="Aptos" panose="020B0004020202020204" pitchFamily="34" charset="0"/>
@@ -25418,7 +25429,7 @@
                         <a:buNone/>
                       </a:pPr>
                       <a:r>
-                        <a:rPr lang="en-US" sz="1600" kern="100" dirty="0">
+                        <a:rPr lang="en-US" sz="1600" kern="100">
                           <a:effectLst/>
                           <a:latin typeface="+mj-lt"/>
                           <a:ea typeface="Aptos" panose="020B0004020202020204" pitchFamily="34" charset="0"/>
@@ -25427,7 +25438,7 @@
                         <a:t>São P</a:t>
                       </a:r>
                       <a:r>
-                        <a:rPr lang="cs-CZ" sz="1600" kern="100" dirty="0">
+                        <a:rPr lang="cs-CZ" sz="1600" kern="100">
                           <a:effectLst/>
                           <a:latin typeface="+mj-lt"/>
                           <a:ea typeface="Aptos" panose="020B0004020202020204" pitchFamily="34" charset="0"/>
@@ -25436,7 +25447,7 @@
                         <a:t>aulo</a:t>
                       </a:r>
                       <a:r>
-                        <a:rPr lang="en-US" sz="1600" kern="100" dirty="0">
+                        <a:rPr lang="en-US" sz="1600" kern="100">
                           <a:effectLst/>
                           <a:latin typeface="+mj-lt"/>
                           <a:ea typeface="Aptos" panose="020B0004020202020204" pitchFamily="34" charset="0"/>
@@ -25463,7 +25474,7 @@
                         <a:buNone/>
                       </a:pPr>
                       <a:r>
-                        <a:rPr lang="en-US" sz="1600" kern="100" dirty="0">
+                        <a:rPr lang="en-US" sz="1600" kern="100">
                           <a:effectLst/>
                           <a:latin typeface="+mn-lt"/>
                           <a:ea typeface="Aptos" panose="020B0004020202020204" pitchFamily="34" charset="0"/>
@@ -25490,7 +25501,7 @@
                         <a:buNone/>
                       </a:pPr>
                       <a:r>
-                        <a:rPr lang="en-US" sz="1600" kern="100" dirty="0">
+                        <a:rPr lang="en-US" sz="1600" kern="100">
                           <a:effectLst/>
                           <a:latin typeface="+mn-lt"/>
                           <a:ea typeface="Aptos" panose="020B0004020202020204" pitchFamily="34" charset="0"/>
@@ -25517,7 +25528,7 @@
                         <a:buNone/>
                       </a:pPr>
                       <a:r>
-                        <a:rPr lang="en-US" sz="1600" kern="100" dirty="0">
+                        <a:rPr lang="en-US" sz="1600" kern="100">
                           <a:effectLst/>
                           <a:latin typeface="+mn-lt"/>
                           <a:ea typeface="Aptos" panose="020B0004020202020204" pitchFamily="34" charset="0"/>
@@ -25568,85 +25579,85 @@
           <a:lstStyle/>
           <a:p>
             <a:r>
-              <a:rPr lang="en-US" b="1" dirty="0"/>
+              <a:rPr lang="en-US" b="1"/>
               <a:t>Sao Paulo is basically Amazon Brazil</a:t>
             </a:r>
           </a:p>
           <a:p>
             <a:pPr lvl="1"/>
             <a:r>
-              <a:rPr lang="en-US" dirty="0"/>
+              <a:rPr lang="en-US"/>
               <a:t>One city shows up in 8 of the top 10 shipping routes.</a:t>
             </a:r>
           </a:p>
           <a:p>
             <a:pPr lvl="1"/>
             <a:r>
-              <a:rPr lang="en-US" dirty="0"/>
+              <a:rPr lang="en-US"/>
               <a:t>The SP→SP route alone beats the next three routes combined.</a:t>
             </a:r>
           </a:p>
           <a:p>
             <a:r>
-              <a:rPr lang="en-US" b="1" dirty="0" err="1"/>
+              <a:rPr lang="en-US" b="1" err="1"/>
               <a:t>Ibitinga</a:t>
             </a:r>
             <a:r>
-              <a:rPr lang="en-US" b="1" dirty="0"/>
+              <a:rPr lang="en-US" b="1"/>
               <a:t> who?</a:t>
             </a:r>
           </a:p>
           <a:p>
             <a:pPr lvl="1"/>
             <a:r>
-              <a:rPr lang="en-US" dirty="0"/>
+              <a:rPr lang="en-US"/>
               <a:t>A town of 60,000 people</a:t>
             </a:r>
           </a:p>
           <a:p>
             <a:pPr lvl="1"/>
             <a:r>
-              <a:rPr lang="en-US" dirty="0"/>
+              <a:rPr lang="en-US"/>
               <a:t>Brazil's #2 seller city. Zero name recognition, but shipping textiles/craft to the entire country. Specialization &gt; size.</a:t>
             </a:r>
           </a:p>
           <a:p>
             <a:r>
-              <a:rPr lang="en-US" b="1" dirty="0"/>
+              <a:rPr lang="en-US" b="1"/>
               <a:t>533 miles for R$ 7 (~ $1.40) extra </a:t>
             </a:r>
           </a:p>
           <a:p>
             <a:pPr lvl="1"/>
             <a:r>
-              <a:rPr lang="en-US" dirty="0"/>
+              <a:rPr lang="en-US"/>
               <a:t>Shipping from Sao Paulo to Brasilia costs about the same as shipping across town.</a:t>
             </a:r>
           </a:p>
           <a:p>
             <a:pPr lvl="1"/>
             <a:r>
-              <a:rPr lang="en-US" dirty="0"/>
+              <a:rPr lang="en-US"/>
               <a:t>Distance barely moves the needle on freight</a:t>
             </a:r>
           </a:p>
           <a:p>
             <a:r>
-              <a:rPr lang="en-US" b="1" dirty="0"/>
+              <a:rPr lang="en-US" b="1"/>
               <a:t>Rio de Janeiro</a:t>
             </a:r>
           </a:p>
           <a:p>
             <a:pPr lvl="1"/>
             <a:r>
-              <a:rPr lang="en-US" dirty="0"/>
+              <a:rPr lang="en-US"/>
               <a:t>All vibes, no warehouses</a:t>
             </a:r>
           </a:p>
           <a:p>
             <a:pPr lvl="1"/>
             <a:r>
-              <a:rPr lang="en-US" dirty="0"/>
+              <a:rPr lang="en-US"/>
               <a:t>RJ is a top destination on two routes but nowhere to be found as a seller. The city buys. It does not ship.</a:t>
             </a:r>
           </a:p>
@@ -25665,7 +25676,7 @@
 </p:sld>
 </file>
 
-<file path=ppt/slides/slide23.xml><?xml version="1.0" encoding="utf-8"?>
+<file path=ppt/slides/slide21.xml><?xml version="1.0" encoding="utf-8"?>
 <p:sld xmlns:a="http://schemas.openxmlformats.org/drawingml/2006/main" xmlns:r="http://schemas.openxmlformats.org/officeDocument/2006/relationships" xmlns:p="http://schemas.openxmlformats.org/presentationml/2006/main">
   <p:cSld>
     <p:spTree>
@@ -25704,7 +25715,7 @@
           <a:lstStyle/>
           <a:p>
             <a:r>
-              <a:rPr lang="en-US" dirty="0"/>
+              <a:rPr lang="en-US"/>
               <a:t>Interactive MAP</a:t>
             </a:r>
           </a:p>
@@ -25734,17 +25745,17 @@
           <a:lstStyle/>
           <a:p>
             <a:pPr algn="ctr"/>
-            <a:endParaRPr lang="en-US" sz="4400" dirty="0"/>
+            <a:endParaRPr lang="en-US" sz="4400"/>
           </a:p>
           <a:p>
             <a:pPr algn="ctr"/>
             <a:r>
-              <a:rPr lang="en-US" sz="4400" dirty="0">
+              <a:rPr lang="en-US" sz="4400">
                 <a:hlinkClick r:id="rId2"/>
               </a:rPr>
               <a:t>https://olist-db.netlify.app/</a:t>
             </a:r>
-            <a:endParaRPr lang="en-US" sz="4400" dirty="0"/>
+            <a:endParaRPr lang="en-US" sz="4400"/>
           </a:p>
         </p:txBody>
       </p:sp>
@@ -25761,7 +25772,7 @@
 </p:sld>
 </file>
 
-<file path=ppt/slides/slide24.xml><?xml version="1.0" encoding="utf-8"?>
+<file path=ppt/slides/slide22.xml><?xml version="1.0" encoding="utf-8"?>
 <p:sld xmlns:a="http://schemas.openxmlformats.org/drawingml/2006/main" xmlns:r="http://schemas.openxmlformats.org/officeDocument/2006/relationships" xmlns:p="http://schemas.openxmlformats.org/presentationml/2006/main">
   <p:cSld>
     <p:spTree>
@@ -25800,7 +25811,7 @@
           <a:lstStyle/>
           <a:p>
             <a:r>
-              <a:rPr lang="en-US" dirty="0"/>
+              <a:rPr lang="en-US"/>
               <a:t>References</a:t>
             </a:r>
           </a:p>
@@ -25828,36 +25839,36 @@
           <a:lstStyle/>
           <a:p>
             <a:r>
-              <a:rPr lang="en-US" dirty="0"/>
+              <a:rPr lang="en-US"/>
               <a:t>Dataset: https://www.kaggle.com/datasets/terencicp/e-commerce-dataset-by-olist-as-an-sqlite-database</a:t>
             </a:r>
           </a:p>
           <a:p>
             <a:r>
-              <a:rPr lang="en-US" dirty="0"/>
+              <a:rPr lang="en-US"/>
               <a:t>Project Repo: https://github.com/jan-zika/olist-db</a:t>
             </a:r>
           </a:p>
           <a:p>
             <a:r>
-              <a:rPr lang="en-US" dirty="0"/>
+              <a:rPr lang="en-US"/>
               <a:t>Database: Azure SQL</a:t>
             </a:r>
           </a:p>
           <a:p>
             <a:r>
-              <a:rPr lang="en-US" dirty="0"/>
+              <a:rPr lang="en-US"/>
               <a:t>Tools: SSMS, Azure SQL, Python, </a:t>
             </a:r>
             <a:r>
-              <a:rPr lang="en-US" dirty="0" err="1"/>
+              <a:rPr lang="en-US" err="1"/>
               <a:t>DBCode</a:t>
             </a:r>
             <a:r>
-              <a:rPr lang="cs-CZ" dirty="0"/>
+              <a:rPr lang="cs-CZ"/>
               <a:t>, dbdiagram.io</a:t>
             </a:r>
-            <a:endParaRPr lang="en-US" dirty="0"/>
+            <a:endParaRPr lang="en-US"/>
           </a:p>
         </p:txBody>
       </p:sp>
@@ -25874,7 +25885,7 @@
 </p:sld>
 </file>
 
-<file path=ppt/slides/slide25.xml><?xml version="1.0" encoding="utf-8"?>
+<file path=ppt/slides/slide23.xml><?xml version="1.0" encoding="utf-8"?>
 <p:sld xmlns:a="http://schemas.openxmlformats.org/drawingml/2006/main" xmlns:r="http://schemas.openxmlformats.org/officeDocument/2006/relationships" xmlns:p="http://schemas.openxmlformats.org/presentationml/2006/main">
   <p:cSld>
     <p:spTree>
@@ -25913,7 +25924,7 @@
           <a:lstStyle/>
           <a:p>
             <a:r>
-              <a:rPr lang="en-US" dirty="0"/>
+              <a:rPr lang="en-US"/>
               <a:t>Questions?</a:t>
             </a:r>
           </a:p>
@@ -25940,7 +25951,7 @@
           <a:bodyPr/>
           <a:lstStyle/>
           <a:p>
-            <a:endParaRPr lang="en-US" dirty="0"/>
+            <a:endParaRPr lang="en-US"/>
           </a:p>
         </p:txBody>
       </p:sp>
@@ -25996,10 +26007,10 @@
           <a:lstStyle/>
           <a:p>
             <a:r>
-              <a:rPr lang="it-IT" dirty="0"/>
+              <a:rPr lang="it-IT"/>
               <a:t>Data Pipeline: SQLite → SQL Server</a:t>
             </a:r>
-            <a:endParaRPr lang="en-US" dirty="0"/>
+            <a:endParaRPr lang="en-US"/>
           </a:p>
         </p:txBody>
       </p:sp>
@@ -26027,226 +26038,226 @@
           <a:lstStyle/>
           <a:p>
             <a:r>
-              <a:rPr lang="en-US" dirty="0"/>
+              <a:rPr lang="en-US"/>
               <a:t>Source: single-file </a:t>
             </a:r>
             <a:r>
-              <a:rPr lang="en-US" b="1" dirty="0"/>
+              <a:rPr lang="en-US" b="1"/>
               <a:t>SQLite</a:t>
             </a:r>
             <a:r>
-              <a:rPr lang="en-US" dirty="0"/>
+              <a:rPr lang="en-US"/>
               <a:t> database (110 MB)</a:t>
             </a:r>
           </a:p>
           <a:p>
             <a:r>
-              <a:rPr lang="en-US" b="1" dirty="0"/>
+              <a:rPr lang="en-US" b="1"/>
               <a:t>Python script:</a:t>
             </a:r>
           </a:p>
           <a:p>
             <a:pPr lvl="1"/>
             <a:r>
-              <a:rPr lang="cs-CZ" dirty="0"/>
+              <a:rPr lang="cs-CZ"/>
               <a:t>P</a:t>
             </a:r>
             <a:r>
-              <a:rPr lang="en-US" dirty="0" err="1"/>
+              <a:rPr lang="en-US" err="1"/>
               <a:t>arsed</a:t>
             </a:r>
             <a:r>
-              <a:rPr lang="en-US" dirty="0"/>
+              <a:rPr lang="en-US"/>
               <a:t> the SQLite data</a:t>
             </a:r>
           </a:p>
           <a:p>
             <a:pPr lvl="1"/>
             <a:r>
-              <a:rPr lang="cs-CZ" dirty="0"/>
+              <a:rPr lang="cs-CZ"/>
               <a:t>G</a:t>
             </a:r>
             <a:r>
-              <a:rPr lang="en-US" dirty="0" err="1"/>
+              <a:rPr lang="en-US" err="1"/>
               <a:t>enerated</a:t>
             </a:r>
             <a:r>
-              <a:rPr lang="en-US" dirty="0"/>
+              <a:rPr lang="en-US"/>
               <a:t> SQL Server-compatible INSERT scripts for each entity</a:t>
             </a:r>
           </a:p>
           <a:p>
             <a:pPr lvl="1"/>
             <a:r>
-              <a:rPr lang="cs-CZ" dirty="0"/>
+              <a:rPr lang="cs-CZ"/>
               <a:t>H</a:t>
             </a:r>
             <a:r>
-              <a:rPr lang="en-US" dirty="0" err="1"/>
+              <a:rPr lang="en-US" err="1"/>
               <a:t>andled</a:t>
             </a:r>
             <a:r>
-              <a:rPr lang="en-US" dirty="0"/>
+              <a:rPr lang="en-US"/>
               <a:t> </a:t>
             </a:r>
             <a:r>
-              <a:rPr lang="en-US" b="1" dirty="0"/>
+              <a:rPr lang="en-US" b="1"/>
               <a:t>type conversion</a:t>
             </a:r>
             <a:r>
-              <a:rPr lang="en-US" dirty="0"/>
+              <a:rPr lang="en-US"/>
               <a:t>, scientific notation, FK ordering, and </a:t>
             </a:r>
             <a:r>
-              <a:rPr lang="en-US" b="1" dirty="0"/>
+              <a:rPr lang="en-US" b="1"/>
               <a:t>data validation</a:t>
             </a:r>
           </a:p>
           <a:p>
             <a:r>
-              <a:rPr lang="en-US" dirty="0"/>
+              <a:rPr lang="en-US"/>
               <a:t>Scripts executed in SQL Server Management Studio to create and populate the database on </a:t>
             </a:r>
             <a:r>
-              <a:rPr lang="en-US" b="1" dirty="0"/>
+              <a:rPr lang="en-US" b="1"/>
               <a:t>local SQL Server</a:t>
             </a:r>
           </a:p>
           <a:p>
             <a:r>
-              <a:rPr lang="en-US" dirty="0"/>
+              <a:rPr lang="en-US"/>
               <a:t>Database exported as a </a:t>
             </a:r>
             <a:r>
-              <a:rPr lang="en-US" b="1" dirty="0"/>
+              <a:rPr lang="en-US" b="1"/>
               <a:t>.</a:t>
             </a:r>
             <a:r>
-              <a:rPr lang="en-US" b="1" dirty="0" err="1"/>
+              <a:rPr lang="en-US" b="1" err="1"/>
               <a:t>bacpac</a:t>
             </a:r>
             <a:r>
-              <a:rPr lang="en-US" dirty="0"/>
+              <a:rPr lang="en-US"/>
               <a:t> file and uploaded to </a:t>
             </a:r>
             <a:r>
-              <a:rPr lang="en-US" b="1" dirty="0"/>
+              <a:rPr lang="en-US" b="1"/>
               <a:t>Azure SQL</a:t>
             </a:r>
             <a:r>
-              <a:rPr lang="en-US" dirty="0"/>
+              <a:rPr lang="en-US"/>
               <a:t> for team access</a:t>
             </a:r>
           </a:p>
           <a:p>
             <a:r>
-              <a:rPr lang="en-US" dirty="0"/>
+              <a:rPr lang="en-US"/>
               <a:t>SQL Server database schema </a:t>
             </a:r>
             <a:r>
-              <a:rPr lang="cs-CZ" b="1" dirty="0" err="1"/>
+              <a:rPr lang="cs-CZ" b="1" err="1"/>
               <a:t>verified</a:t>
             </a:r>
             <a:r>
-              <a:rPr lang="en-US" dirty="0"/>
+              <a:rPr lang="en-US"/>
               <a:t> via an SQL script</a:t>
             </a:r>
-            <a:endParaRPr lang="cs-CZ" dirty="0"/>
+            <a:endParaRPr lang="cs-CZ"/>
           </a:p>
           <a:p>
             <a:pPr lvl="1"/>
             <a:r>
-              <a:rPr lang="cs-CZ" dirty="0" err="1"/>
+              <a:rPr lang="cs-CZ" err="1"/>
               <a:t>Verified</a:t>
             </a:r>
             <a:r>
-              <a:rPr lang="cs-CZ" dirty="0"/>
+              <a:rPr lang="cs-CZ"/>
               <a:t> data profile and </a:t>
             </a:r>
             <a:r>
-              <a:rPr lang="cs-CZ" dirty="0" err="1"/>
+              <a:rPr lang="cs-CZ" err="1"/>
               <a:t>types</a:t>
             </a:r>
             <a:r>
-              <a:rPr lang="cs-CZ" dirty="0"/>
+              <a:rPr lang="cs-CZ"/>
               <a:t> (sanity </a:t>
             </a:r>
             <a:r>
-              <a:rPr lang="cs-CZ" dirty="0" err="1"/>
+              <a:rPr lang="cs-CZ" err="1"/>
               <a:t>check</a:t>
             </a:r>
             <a:r>
-              <a:rPr lang="cs-CZ" dirty="0"/>
+              <a:rPr lang="cs-CZ"/>
               <a:t>)</a:t>
             </a:r>
           </a:p>
           <a:p>
             <a:pPr lvl="1"/>
             <a:r>
-              <a:rPr lang="cs-CZ" dirty="0" err="1"/>
+              <a:rPr lang="cs-CZ" err="1"/>
               <a:t>Compared</a:t>
             </a:r>
             <a:r>
-              <a:rPr lang="cs-CZ" dirty="0"/>
+              <a:rPr lang="cs-CZ"/>
               <a:t> </a:t>
             </a:r>
             <a:r>
-              <a:rPr lang="cs-CZ" dirty="0" err="1"/>
+              <a:rPr lang="cs-CZ" err="1"/>
               <a:t>the</a:t>
             </a:r>
             <a:r>
-              <a:rPr lang="cs-CZ" dirty="0"/>
+              <a:rPr lang="cs-CZ"/>
               <a:t> </a:t>
             </a:r>
             <a:r>
-              <a:rPr lang="cs-CZ" dirty="0" err="1"/>
+              <a:rPr lang="cs-CZ" err="1"/>
               <a:t>result</a:t>
             </a:r>
             <a:r>
-              <a:rPr lang="cs-CZ" dirty="0"/>
+              <a:rPr lang="cs-CZ"/>
               <a:t> to </a:t>
             </a:r>
             <a:r>
-              <a:rPr lang="cs-CZ" dirty="0" err="1"/>
+              <a:rPr lang="cs-CZ" err="1"/>
               <a:t>an</a:t>
             </a:r>
             <a:r>
-              <a:rPr lang="cs-CZ" dirty="0"/>
+              <a:rPr lang="cs-CZ"/>
               <a:t> </a:t>
             </a:r>
             <a:r>
-              <a:rPr lang="cs-CZ" dirty="0" err="1"/>
+              <a:rPr lang="cs-CZ" err="1"/>
               <a:t>SQLite</a:t>
             </a:r>
             <a:r>
-              <a:rPr lang="cs-CZ" dirty="0"/>
+              <a:rPr lang="cs-CZ"/>
               <a:t> script ran on </a:t>
             </a:r>
             <a:r>
-              <a:rPr lang="cs-CZ" dirty="0" err="1"/>
+              <a:rPr lang="cs-CZ" err="1"/>
               <a:t>the</a:t>
             </a:r>
             <a:r>
-              <a:rPr lang="cs-CZ" dirty="0"/>
+              <a:rPr lang="cs-CZ"/>
               <a:t> </a:t>
             </a:r>
             <a:r>
-              <a:rPr lang="cs-CZ" dirty="0" err="1"/>
+              <a:rPr lang="cs-CZ" err="1"/>
               <a:t>original</a:t>
             </a:r>
             <a:r>
-              <a:rPr lang="cs-CZ" dirty="0"/>
+              <a:rPr lang="cs-CZ"/>
               <a:t> </a:t>
             </a:r>
             <a:r>
-              <a:rPr lang="cs-CZ" dirty="0" err="1"/>
+              <a:rPr lang="cs-CZ" err="1"/>
               <a:t>SQLite</a:t>
             </a:r>
             <a:r>
-              <a:rPr lang="cs-CZ" dirty="0"/>
+              <a:rPr lang="cs-CZ"/>
               <a:t> database</a:t>
             </a:r>
-            <a:endParaRPr lang="en-US" dirty="0"/>
+            <a:endParaRPr lang="en-US"/>
           </a:p>
         </p:txBody>
       </p:sp>
@@ -26570,7 +26581,7 @@
           </a:lstStyle>
           <a:p>
             <a:r>
-              <a:rPr lang="en-US" dirty="0">
+              <a:rPr lang="en-US">
                 <a:solidFill>
                   <a:srgbClr val="1CADE4"/>
                 </a:solidFill>
@@ -26632,7 +26643,7 @@
           <a:lstStyle/>
           <a:p>
             <a:r>
-              <a:rPr lang="en-US" dirty="0"/>
+              <a:rPr lang="en-US"/>
               <a:t>Sales &amp; Revenue</a:t>
             </a:r>
           </a:p>
@@ -26660,7 +26671,7 @@
           <a:lstStyle/>
           <a:p>
             <a:r>
-              <a:rPr lang="en-US" dirty="0"/>
+              <a:rPr lang="en-US"/>
               <a:t>Jan Zika | Q1–Q4</a:t>
             </a:r>
           </a:p>
@@ -26718,7 +26729,7 @@
           <a:lstStyle/>
           <a:p>
             <a:r>
-              <a:rPr lang="en-US" dirty="0"/>
+              <a:rPr lang="en-US"/>
               <a:t>Revenue Trends</a:t>
             </a:r>
           </a:p>
@@ -26746,7 +26757,7 @@
           <a:lstStyle/>
           <a:p>
             <a:r>
-              <a:rPr lang="en-US" dirty="0"/>
+              <a:rPr lang="en-US"/>
               <a:t>Q1 (+ View)</a:t>
             </a:r>
           </a:p>
@@ -26774,56 +26785,56 @@
           <a:lstStyle/>
           <a:p>
             <a:r>
-              <a:rPr lang="en-US" b="1" dirty="0"/>
+              <a:rPr lang="en-US" b="1"/>
               <a:t>Revenue grew 9x</a:t>
             </a:r>
             <a:r>
-              <a:rPr lang="en-US" dirty="0"/>
+              <a:rPr lang="en-US"/>
               <a:t> from January 2017</a:t>
             </a:r>
             <a:br>
-              <a:rPr lang="en-US" dirty="0"/>
+              <a:rPr lang="en-US"/>
             </a:br>
             <a:r>
-              <a:rPr lang="en-US" dirty="0"/>
+              <a:rPr lang="en-US"/>
               <a:t>to peak in November 2017</a:t>
             </a:r>
             <a:br>
-              <a:rPr lang="en-US" dirty="0"/>
+              <a:rPr lang="en-US"/>
             </a:br>
             <a:r>
-              <a:rPr lang="en-US" dirty="0"/>
+              <a:rPr lang="en-US"/>
               <a:t>— potential seasonality</a:t>
             </a:r>
             <a:br>
-              <a:rPr lang="en-US" dirty="0"/>
+              <a:rPr lang="en-US"/>
             </a:br>
             <a:r>
-              <a:rPr lang="en-US" dirty="0"/>
+              <a:rPr lang="en-US"/>
               <a:t>(Black Friday effect)</a:t>
             </a:r>
           </a:p>
           <a:p>
             <a:r>
-              <a:rPr lang="en-US" b="1" dirty="0"/>
+              <a:rPr lang="en-US" b="1"/>
               <a:t>Average</a:t>
             </a:r>
             <a:r>
-              <a:rPr lang="en-US" dirty="0"/>
+              <a:rPr lang="en-US"/>
               <a:t> monthly growth was 15%</a:t>
             </a:r>
           </a:p>
           <a:p>
             <a:r>
-              <a:rPr lang="en-US" dirty="0"/>
+              <a:rPr lang="en-US"/>
               <a:t>Revenue </a:t>
             </a:r>
             <a:r>
-              <a:rPr lang="en-US" b="1" dirty="0"/>
+              <a:rPr lang="en-US" b="1"/>
               <a:t>plateaued</a:t>
             </a:r>
             <a:r>
-              <a:rPr lang="en-US" dirty="0"/>
+              <a:rPr lang="en-US"/>
               <a:t> in 2018 around R$1M</a:t>
             </a:r>
           </a:p>
@@ -26924,7 +26935,7 @@
           <a:lstStyle/>
           <a:p>
             <a:r>
-              <a:rPr lang="en-US" dirty="0"/>
+              <a:rPr lang="en-US"/>
               <a:t>Payment Methods</a:t>
             </a:r>
           </a:p>
@@ -26952,7 +26963,7 @@
           <a:lstStyle/>
           <a:p>
             <a:r>
-              <a:rPr lang="en-US" dirty="0"/>
+              <a:rPr lang="en-US"/>
               <a:t>Q2 (+ View)</a:t>
             </a:r>
           </a:p>
@@ -26980,35 +26991,35 @@
           <a:lstStyle/>
           <a:p>
             <a:r>
-              <a:rPr lang="en-US" b="1" dirty="0"/>
+              <a:rPr lang="en-US" b="1"/>
               <a:t>Credit cards</a:t>
             </a:r>
             <a:r>
-              <a:rPr lang="en-US" dirty="0"/>
+              <a:rPr lang="en-US"/>
               <a:t> dominate</a:t>
             </a:r>
             <a:br>
-              <a:rPr lang="en-US" dirty="0"/>
+              <a:rPr lang="en-US"/>
             </a:br>
             <a:r>
-              <a:rPr lang="en-US" dirty="0"/>
+              <a:rPr lang="en-US"/>
               <a:t>— CC purchases split to 3.5 installments on average, confirms that installment culture is important in Brazilian e-commerce</a:t>
             </a:r>
           </a:p>
           <a:p>
             <a:r>
-              <a:rPr lang="en-US" b="1" dirty="0" err="1"/>
+              <a:rPr lang="en-US" b="1" err="1"/>
               <a:t>Boleto</a:t>
             </a:r>
             <a:r>
-              <a:rPr lang="en-US" dirty="0"/>
+              <a:rPr lang="en-US"/>
               <a:t> (bank slip) second</a:t>
             </a:r>
             <a:br>
-              <a:rPr lang="en-US" dirty="0"/>
+              <a:rPr lang="en-US"/>
             </a:br>
             <a:r>
-              <a:rPr lang="en-US" dirty="0"/>
+              <a:rPr lang="en-US"/>
               <a:t>— no card required</a:t>
             </a:r>
           </a:p>
@@ -27103,7 +27114,7 @@
           <a:lstStyle/>
           <a:p>
             <a:r>
-              <a:rPr lang="en-US" dirty="0"/>
+              <a:rPr lang="en-US"/>
               <a:t>Order Value by State</a:t>
             </a:r>
           </a:p>
@@ -27131,7 +27142,7 @@
           <a:lstStyle/>
           <a:p>
             <a:r>
-              <a:rPr lang="en-US" dirty="0"/>
+              <a:rPr lang="en-US"/>
               <a:t>Q3 (+ Stored Procedure)</a:t>
             </a:r>
           </a:p>
@@ -27159,45 +27170,45 @@
           <a:lstStyle/>
           <a:p>
             <a:r>
-              <a:rPr lang="en-US" dirty="0"/>
+              <a:rPr lang="en-US"/>
               <a:t>Top 10 </a:t>
             </a:r>
             <a:r>
-              <a:rPr lang="en-US" b="1" dirty="0"/>
+              <a:rPr lang="en-US" b="1"/>
               <a:t>highest avg order</a:t>
             </a:r>
             <a:r>
-              <a:rPr lang="en-US" dirty="0"/>
+              <a:rPr lang="en-US"/>
               <a:t> value are all North/Northeast states</a:t>
             </a:r>
           </a:p>
           <a:p>
             <a:r>
-              <a:rPr lang="en-US" b="1" dirty="0"/>
+              <a:rPr lang="en-US" b="1"/>
               <a:t>Paraíba</a:t>
             </a:r>
             <a:r>
-              <a:rPr lang="en-US" dirty="0"/>
+              <a:rPr lang="en-US"/>
               <a:t> highest: average product value</a:t>
             </a:r>
             <a:br>
-              <a:rPr lang="en-US" dirty="0"/>
+              <a:rPr lang="en-US"/>
             </a:br>
             <a:r>
-              <a:rPr lang="en-US" dirty="0"/>
+              <a:rPr lang="en-US"/>
               <a:t>R$192 + freight R$43 = R$235 total</a:t>
             </a:r>
           </a:p>
           <a:p>
             <a:r>
-              <a:rPr lang="en-US" dirty="0"/>
+              <a:rPr lang="en-US"/>
               <a:t>Higher product values</a:t>
             </a:r>
             <a:br>
-              <a:rPr lang="en-US" dirty="0"/>
+              <a:rPr lang="en-US"/>
             </a:br>
             <a:r>
-              <a:rPr lang="en-US" dirty="0"/>
+              <a:rPr lang="en-US"/>
               <a:t>— not just freight inflation</a:t>
             </a:r>
           </a:p>
@@ -27299,7 +27310,7 @@
           <a:lstStyle/>
           <a:p>
             <a:r>
-              <a:rPr lang="en-US" dirty="0"/>
+              <a:rPr lang="en-US"/>
               <a:t>Top 10 Categories by revenue</a:t>
             </a:r>
           </a:p>
@@ -27327,7 +27338,7 @@
           <a:lstStyle/>
           <a:p>
             <a:r>
-              <a:rPr lang="en-US" dirty="0"/>
+              <a:rPr lang="en-US"/>
               <a:t>Q4</a:t>
             </a:r>
           </a:p>
@@ -27355,49 +27366,49 @@
           <a:lstStyle/>
           <a:p>
             <a:r>
-              <a:rPr lang="en-US" b="1" dirty="0"/>
+              <a:rPr lang="en-US" b="1"/>
               <a:t>Health &amp; beauty</a:t>
             </a:r>
             <a:br>
-              <a:rPr lang="en-US" b="1" dirty="0"/>
+              <a:rPr lang="en-US" b="1"/>
             </a:br>
             <a:r>
-              <a:rPr lang="en-US" dirty="0"/>
+              <a:rPr lang="en-US"/>
               <a:t>is #1 category</a:t>
             </a:r>
             <a:br>
-              <a:rPr lang="en-US" dirty="0"/>
+              <a:rPr lang="en-US"/>
             </a:br>
             <a:r>
-              <a:rPr lang="en-US" dirty="0"/>
+              <a:rPr lang="en-US"/>
               <a:t>by revenue: R$1.44M</a:t>
             </a:r>
           </a:p>
           <a:p>
             <a:r>
-              <a:rPr lang="en-US" b="1" dirty="0"/>
+              <a:rPr lang="en-US" b="1"/>
               <a:t>Watches &amp; gifts</a:t>
             </a:r>
             <a:r>
-              <a:rPr lang="en-US" dirty="0"/>
+              <a:rPr lang="en-US"/>
               <a:t> #2</a:t>
             </a:r>
             <a:br>
-              <a:rPr lang="en-US" dirty="0"/>
+              <a:rPr lang="en-US"/>
             </a:br>
             <a:r>
-              <a:rPr lang="en-US" b="1" dirty="0"/>
+              <a:rPr lang="en-US" b="1"/>
               <a:t>Bed/bath/table</a:t>
             </a:r>
             <a:r>
-              <a:rPr lang="en-US" dirty="0"/>
+              <a:rPr lang="en-US"/>
               <a:t> #3</a:t>
             </a:r>
             <a:br>
-              <a:rPr lang="en-US" dirty="0"/>
+              <a:rPr lang="en-US"/>
             </a:br>
             <a:r>
-              <a:rPr lang="en-US" dirty="0"/>
+              <a:rPr lang="en-US"/>
               <a:t>— lifestyle over electronics</a:t>
             </a:r>
           </a:p>
